--- a/research/pediatric-dentistry-2021-2026/deck-mih-lopes-2021/Presentasi-Jurnal-MIH-Lopes-2021.pptx
+++ b/research/pediatric-dentistry-2021-2026/deck-mih-lopes-2021/Presentasi-Jurnal-MIH-Lopes-2021.pptx
@@ -5541,8 +5541,8 @@
         </p:nvSpPr>
         <p:spPr>
           <a:xfrm>
-            <a:off x="640080" y="1298448"/>
-            <a:ext cx="6446520" cy="1645920"/>
+            <a:off x="640080" y="1188720"/>
+            <a:ext cx="6537960" cy="1975104"/>
           </a:xfrm>
           <a:prstGeom prst="rect">
             <a:avLst/>
@@ -5586,7 +5586,7 @@
         </p:nvSpPr>
         <p:spPr>
           <a:xfrm>
-            <a:off x="640080" y="3017520"/>
+            <a:off x="640080" y="3218688"/>
             <a:ext cx="6035040" cy="310896"/>
           </a:xfrm>
           <a:prstGeom prst="rect">
@@ -5628,7 +5628,7 @@
         </p:nvSpPr>
         <p:spPr>
           <a:xfrm>
-            <a:off x="640080" y="3456432"/>
+            <a:off x="640080" y="3602736"/>
             <a:ext cx="5852160" cy="12801"/>
           </a:xfrm>
           <a:prstGeom prst="rect">
@@ -5670,8 +5670,8 @@
         </p:nvSpPr>
         <p:spPr>
           <a:xfrm>
-            <a:off x="640080" y="3602736"/>
-            <a:ext cx="5943600" cy="1188720"/>
+            <a:off x="640080" y="3730752"/>
+            <a:ext cx="5943600" cy="1280160"/>
           </a:xfrm>
           <a:prstGeom prst="rect">
             <a:avLst/>
@@ -6695,7 +6695,7 @@
                 </a:solidFill>
                 <a:latin typeface="Calibri"/>
               </a:rPr>
-              <a:t>abstrak menulis 36,6%</a:t>
+              <a:t>MIH tipe molar-insisivus; abstrak menulis 36,6%</a:t>
             </a:r>
           </a:p>
         </p:txBody>
@@ -10945,7 +10945,7 @@
                 </a:solidFill>
                 <a:latin typeface="Calibri"/>
               </a:rPr>
-              <a:t>Desensitisasi, sealant, restorasi bila enamel pecah. Hindari preparasi agresif.</a:t>
+              <a:t>Desensitisasi, sealant pada molar berisiko, restorasi atau SSC bila enamel pecah. Hindari preparasi agresif.</a:t>
             </a:r>
           </a:p>
         </p:txBody>
@@ -11306,7 +11306,7 @@
                 </a:solidFill>
                 <a:latin typeface="Cambria"/>
               </a:rPr>
-              <a:t>Kesimpulan</a:t>
+              <a:t>Tiga angka, satu pesan</a:t>
             </a:r>
           </a:p>
         </p:txBody>
@@ -13606,7 +13606,7 @@
         <p:spPr>
           <a:xfrm>
             <a:off x="640080" y="1682496"/>
-            <a:ext cx="5120640" cy="786384"/>
+            <a:ext cx="5120640" cy="969264"/>
           </a:xfrm>
           <a:prstGeom prst="rect">
             <a:avLst/>
@@ -13637,7 +13637,7 @@
                 </a:solidFill>
                 <a:latin typeface="Calibri"/>
               </a:rPr>
-              <a:t>Email pada gigi permanen muda gagal matang. Bercaknya keras, putih sampai cokelat, batasnya tegas, dan email itu lebih rapuh daripada email di sebelahnya.</a:t>
+              <a:t>Email pada gigi permanen muda gagal matang. Opasitasnya berbatas tegas, warnanya putih sampai cokelat, dan jaringan itu lebih rapuh daripada email di sebelahnya sehingga mudah pecah setelah gigi erupsi (post-eruptive enamel breakdown).</a:t>
             </a:r>
           </a:p>
         </p:txBody>
@@ -14812,7 +14812,7 @@
                 </a:solidFill>
                 <a:latin typeface="Calibri"/>
               </a:rPr>
-              <a:t>Defek kualitatif email: jumlah mineralnya kurang, bukan jumlah emailnya.</a:t>
+              <a:t>Defek kualitatif email: kandungan mineralnya berkurang, bukan jumlah emailnya.</a:t>
             </a:r>
           </a:p>
         </p:txBody>
@@ -14941,7 +14941,7 @@
                 </a:solidFill>
                 <a:latin typeface="Calibri"/>
               </a:rPr>
-              <a:t>Gigi sensitif, sulit menyikat, dan restorasi sering harus diulang.</a:t>
+              <a:t>Hipersensitivitas dentin, sulit menyikat, dan restorasi yang sering harus diulang.</a:t>
             </a:r>
           </a:p>
         </p:txBody>

--- a/research/pediatric-dentistry-2021-2026/deck-mih-lopes-2021/Presentasi-Jurnal-MIH-Lopes-2021.pptx
+++ b/research/pediatric-dentistry-2021-2026/deck-mih-lopes-2021/Presentasi-Jurnal-MIH-Lopes-2021.pptx
@@ -5805,17 +5805,9 @@
           <a:prstGeom prst="rect">
             <a:avLst/>
           </a:prstGeom>
-          <a:gradFill rotWithShape="1">
-            <a:gsLst>
-              <a:gs pos="0">
-                <a:srgbClr val="F9F7F3"/>
-              </a:gs>
-              <a:gs pos="100000">
-                <a:srgbClr val="E6EFF2"/>
-              </a:gs>
-            </a:gsLst>
-            <a:lin scaled="0" ang="19200000"/>
-          </a:gradFill>
+          <a:solidFill>
+            <a:srgbClr val="D8EAE5"/>
+          </a:solidFill>
           <a:ln>
             <a:noFill/>
           </a:ln>
@@ -5849,14 +5841,14 @@
         </p:nvSpPr>
         <p:spPr>
           <a:xfrm>
-            <a:off x="9098280" y="-2240280"/>
-            <a:ext cx="4480560" cy="4480560"/>
+            <a:off x="8732520" y="3520440"/>
+            <a:ext cx="5760720" cy="5760720"/>
           </a:xfrm>
           <a:prstGeom prst="ellipse">
             <a:avLst/>
           </a:prstGeom>
           <a:solidFill>
-            <a:srgbClr val="E4EFF1"/>
+            <a:srgbClr val="CCE1DF"/>
           </a:solidFill>
           <a:ln>
             <a:noFill/>
@@ -5885,20 +5877,20 @@
       </p:sp>
       <p:sp>
         <p:nvSpPr>
-          <p:cNvPr id="4" name="Oval 3"/>
+          <p:cNvPr id="4" name="Rectangle 3"/>
           <p:cNvSpPr/>
           <p:nvPr/>
         </p:nvSpPr>
         <p:spPr>
           <a:xfrm>
-            <a:off x="-1600200" y="4160520"/>
-            <a:ext cx="3931920" cy="3931920"/>
-          </a:xfrm>
-          <a:prstGeom prst="ellipse">
-            <a:avLst/>
-          </a:prstGeom>
-          <a:solidFill>
-            <a:srgbClr val="EAF3F4"/>
+            <a:off x="3309213" y="1417320"/>
+            <a:ext cx="7315" cy="4663440"/>
+          </a:xfrm>
+          <a:prstGeom prst="rect">
+            <a:avLst/>
+          </a:prstGeom>
+          <a:solidFill>
+            <a:srgbClr val="C7DCE1"/>
           </a:solidFill>
           <a:ln>
             <a:noFill/>
@@ -5933,16 +5925,14 @@
         </p:nvSpPr>
         <p:spPr>
           <a:xfrm>
-            <a:off x="0" y="6455664"/>
-            <a:ext cx="12191695" cy="402336"/>
-          </a:xfrm>
-          <a:prstGeom prst="rect">
-            <a:avLst/>
-          </a:prstGeom>
-          <a:solidFill>
-            <a:srgbClr val="DCE7EA">
-              <a:alpha val="85000"/>
-            </a:srgbClr>
+            <a:off x="6092647" y="1417320"/>
+            <a:ext cx="7315" cy="4663440"/>
+          </a:xfrm>
+          <a:prstGeom prst="rect">
+            <a:avLst/>
+          </a:prstGeom>
+          <a:solidFill>
+            <a:srgbClr val="C7DCE1"/>
           </a:solidFill>
           <a:ln>
             <a:noFill/>
@@ -5972,6 +5962,90 @@
       <p:sp>
         <p:nvSpPr>
           <p:cNvPr id="6" name="Rectangle 5"/>
+          <p:cNvSpPr/>
+          <p:nvPr/>
+        </p:nvSpPr>
+        <p:spPr>
+          <a:xfrm>
+            <a:off x="8875166" y="1417320"/>
+            <a:ext cx="7315" cy="4663440"/>
+          </a:xfrm>
+          <a:prstGeom prst="rect">
+            <a:avLst/>
+          </a:prstGeom>
+          <a:solidFill>
+            <a:srgbClr val="C7DCE1"/>
+          </a:solidFill>
+          <a:ln>
+            <a:noFill/>
+          </a:ln>
+          <a:effectLst/>
+        </p:spPr>
+        <p:style>
+          <a:lnRef idx="1">
+            <a:schemeClr val="accent1"/>
+          </a:lnRef>
+          <a:fillRef idx="3">
+            <a:schemeClr val="accent1"/>
+          </a:fillRef>
+          <a:effectRef idx="2">
+            <a:schemeClr val="accent1"/>
+          </a:effectRef>
+          <a:fontRef idx="minor">
+            <a:schemeClr val="lt1"/>
+          </a:fontRef>
+        </p:style>
+        <p:txBody>
+          <a:bodyPr rtlCol="0" anchor="ctr"/>
+          <a:lstStyle/>
+          <a:p/>
+        </p:txBody>
+      </p:sp>
+      <p:sp>
+        <p:nvSpPr>
+          <p:cNvPr id="7" name="Rectangle 6"/>
+          <p:cNvSpPr/>
+          <p:nvPr/>
+        </p:nvSpPr>
+        <p:spPr>
+          <a:xfrm>
+            <a:off x="0" y="0"/>
+            <a:ext cx="201168" cy="6858000"/>
+          </a:xfrm>
+          <a:prstGeom prst="rect">
+            <a:avLst/>
+          </a:prstGeom>
+          <a:solidFill>
+            <a:srgbClr val="0B4A5A"/>
+          </a:solidFill>
+          <a:ln>
+            <a:noFill/>
+          </a:ln>
+          <a:effectLst/>
+        </p:spPr>
+        <p:style>
+          <a:lnRef idx="1">
+            <a:schemeClr val="accent1"/>
+          </a:lnRef>
+          <a:fillRef idx="3">
+            <a:schemeClr val="accent1"/>
+          </a:fillRef>
+          <a:effectRef idx="2">
+            <a:schemeClr val="accent1"/>
+          </a:effectRef>
+          <a:fontRef idx="minor">
+            <a:schemeClr val="lt1"/>
+          </a:fontRef>
+        </p:style>
+        <p:txBody>
+          <a:bodyPr rtlCol="0" anchor="ctr"/>
+          <a:lstStyle/>
+          <a:p/>
+        </p:txBody>
+      </p:sp>
+      <p:sp>
+        <p:nvSpPr>
+          <p:cNvPr id="8" name="Rectangle 7"/>
           <p:cNvSpPr/>
           <p:nvPr/>
         </p:nvSpPr>
@@ -6021,20 +6095,20 @@
       </p:sp>
       <p:sp>
         <p:nvSpPr>
-          <p:cNvPr id="7" name="Rectangle 6"/>
+          <p:cNvPr id="9" name="Rectangle 8"/>
           <p:cNvSpPr/>
           <p:nvPr/>
         </p:nvSpPr>
         <p:spPr>
           <a:xfrm>
             <a:off x="0" y="1171346"/>
-            <a:ext cx="12191695" cy="45720"/>
-          </a:xfrm>
-          <a:prstGeom prst="rect">
-            <a:avLst/>
-          </a:prstGeom>
-          <a:solidFill>
-            <a:srgbClr val="14A0B4"/>
+            <a:ext cx="12191695" cy="64008"/>
+          </a:xfrm>
+          <a:prstGeom prst="rect">
+            <a:avLst/>
+          </a:prstGeom>
+          <a:solidFill>
+            <a:srgbClr val="D98A2B"/>
           </a:solidFill>
           <a:ln>
             <a:noFill/>
@@ -6063,7 +6137,7 @@
       </p:sp>
       <p:sp>
         <p:nvSpPr>
-          <p:cNvPr id="8" name="TextBox 7"/>
+          <p:cNvPr id="10" name="TextBox 9"/>
           <p:cNvSpPr txBox="1"/>
           <p:nvPr/>
         </p:nvSpPr>
@@ -6098,14 +6172,14 @@
                 </a:solidFill>
                 <a:latin typeface="Calibri"/>
               </a:rPr>
-              <a:t>HASIL · 3</a:t>
-            </a:r>
-          </a:p>
-        </p:txBody>
-      </p:sp>
-      <p:sp>
-        <p:nvSpPr>
-          <p:cNvPr id="9" name="TextBox 8"/>
+              <a:t>10  ·  HASIL · 3</a:t>
+            </a:r>
+          </a:p>
+        </p:txBody>
+      </p:sp>
+      <p:sp>
+        <p:nvSpPr>
+          <p:cNvPr id="11" name="TextBox 10"/>
           <p:cNvSpPr txBox="1"/>
           <p:nvPr/>
         </p:nvSpPr>
@@ -6147,7 +6221,7 @@
       </p:sp>
       <p:sp>
         <p:nvSpPr>
-          <p:cNvPr id="10" name="Rounded Rectangle 9"/>
+          <p:cNvPr id="12" name="Rounded Rectangle 11"/>
           <p:cNvSpPr/>
           <p:nvPr/>
         </p:nvSpPr>
@@ -6193,7 +6267,7 @@
       </p:sp>
       <p:sp>
         <p:nvSpPr>
-          <p:cNvPr id="11" name="Rectangle 10"/>
+          <p:cNvPr id="13" name="Rectangle 12"/>
           <p:cNvSpPr/>
           <p:nvPr/>
         </p:nvSpPr>
@@ -6235,7 +6309,7 @@
       </p:sp>
       <p:sp>
         <p:nvSpPr>
-          <p:cNvPr id="12" name="TextBox 11"/>
+          <p:cNvPr id="14" name="TextBox 13"/>
           <p:cNvSpPr txBox="1"/>
           <p:nvPr/>
         </p:nvSpPr>
@@ -6277,7 +6351,7 @@
       </p:sp>
       <p:sp>
         <p:nvSpPr>
-          <p:cNvPr id="13" name="Rounded Rectangle 12"/>
+          <p:cNvPr id="15" name="Rounded Rectangle 14"/>
           <p:cNvSpPr/>
           <p:nvPr/>
         </p:nvSpPr>
@@ -6321,7 +6395,7 @@
       </p:sp>
       <p:graphicFrame>
         <p:nvGraphicFramePr>
-          <p:cNvPr id="14" name="Chart 13"/>
+          <p:cNvPr id="16" name="Chart 15"/>
           <p:cNvGraphicFramePr>
             <a:graphicFrameLocks noGrp="1"/>
           </p:cNvGraphicFramePr>
@@ -6339,7 +6413,7 @@
       </p:graphicFrame>
       <p:sp>
         <p:nvSpPr>
-          <p:cNvPr id="15" name="TextBox 14"/>
+          <p:cNvPr id="17" name="TextBox 16"/>
           <p:cNvSpPr txBox="1"/>
           <p:nvPr/>
         </p:nvSpPr>
@@ -6381,7 +6455,7 @@
       </p:sp>
       <p:sp>
         <p:nvSpPr>
-          <p:cNvPr id="16" name="TextBox 15"/>
+          <p:cNvPr id="18" name="TextBox 17"/>
           <p:cNvSpPr txBox="1"/>
           <p:nvPr/>
         </p:nvSpPr>
@@ -6423,7 +6497,7 @@
       </p:sp>
       <p:sp>
         <p:nvSpPr>
-          <p:cNvPr id="17" name="TextBox 16"/>
+          <p:cNvPr id="19" name="TextBox 18"/>
           <p:cNvSpPr txBox="1"/>
           <p:nvPr/>
         </p:nvSpPr>
@@ -6465,7 +6539,7 @@
       </p:sp>
       <p:sp>
         <p:nvSpPr>
-          <p:cNvPr id="18" name="TextBox 17"/>
+          <p:cNvPr id="20" name="TextBox 19"/>
           <p:cNvSpPr txBox="1"/>
           <p:nvPr/>
         </p:nvSpPr>
@@ -6507,7 +6581,7 @@
       </p:sp>
       <p:sp>
         <p:nvSpPr>
-          <p:cNvPr id="19" name="TextBox 18"/>
+          <p:cNvPr id="21" name="TextBox 20"/>
           <p:cNvSpPr txBox="1"/>
           <p:nvPr/>
         </p:nvSpPr>
@@ -6549,7 +6623,7 @@
       </p:sp>
       <p:sp>
         <p:nvSpPr>
-          <p:cNvPr id="20" name="TextBox 19"/>
+          <p:cNvPr id="22" name="TextBox 21"/>
           <p:cNvSpPr txBox="1"/>
           <p:nvPr/>
         </p:nvSpPr>
@@ -6591,7 +6665,7 @@
       </p:sp>
       <p:sp>
         <p:nvSpPr>
-          <p:cNvPr id="21" name="TextBox 20"/>
+          <p:cNvPr id="23" name="TextBox 22"/>
           <p:cNvSpPr txBox="1"/>
           <p:nvPr/>
         </p:nvSpPr>
@@ -6633,7 +6707,7 @@
       </p:sp>
       <p:sp>
         <p:nvSpPr>
-          <p:cNvPr id="22" name="TextBox 21"/>
+          <p:cNvPr id="24" name="TextBox 23"/>
           <p:cNvSpPr txBox="1"/>
           <p:nvPr/>
         </p:nvSpPr>
@@ -6675,7 +6749,7 @@
       </p:sp>
       <p:sp>
         <p:nvSpPr>
-          <p:cNvPr id="23" name="TextBox 22"/>
+          <p:cNvPr id="25" name="TextBox 24"/>
           <p:cNvSpPr txBox="1"/>
           <p:nvPr/>
         </p:nvSpPr>
@@ -6717,7 +6791,7 @@
       </p:sp>
       <p:sp>
         <p:nvSpPr>
-          <p:cNvPr id="24" name="TextBox 23"/>
+          <p:cNvPr id="26" name="TextBox 25"/>
           <p:cNvSpPr txBox="1"/>
           <p:nvPr/>
         </p:nvSpPr>
@@ -6759,7 +6833,7 @@
       </p:sp>
       <p:sp>
         <p:nvSpPr>
-          <p:cNvPr id="25" name="Rounded Rectangle 24"/>
+          <p:cNvPr id="27" name="Rounded Rectangle 26"/>
           <p:cNvSpPr/>
           <p:nvPr/>
         </p:nvSpPr>
@@ -6803,7 +6877,7 @@
       </p:sp>
       <p:sp>
         <p:nvSpPr>
-          <p:cNvPr id="26" name="TextBox 25"/>
+          <p:cNvPr id="28" name="TextBox 27"/>
           <p:cNvSpPr txBox="1"/>
           <p:nvPr/>
         </p:nvSpPr>
@@ -6845,20 +6919,20 @@
       </p:sp>
       <p:sp>
         <p:nvSpPr>
-          <p:cNvPr id="27" name="Rectangle 26"/>
+          <p:cNvPr id="29" name="Rectangle 28"/>
           <p:cNvSpPr/>
           <p:nvPr/>
         </p:nvSpPr>
         <p:spPr>
           <a:xfrm>
-            <a:off x="530352" y="6254496"/>
-            <a:ext cx="11130991" cy="12801"/>
-          </a:xfrm>
-          <a:prstGeom prst="rect">
-            <a:avLst/>
-          </a:prstGeom>
-          <a:solidFill>
-            <a:srgbClr val="D7E3E6"/>
+            <a:off x="0" y="6163056"/>
+            <a:ext cx="12191695" cy="694944"/>
+          </a:xfrm>
+          <a:prstGeom prst="rect">
+            <a:avLst/>
+          </a:prstGeom>
+          <a:solidFill>
+            <a:srgbClr val="0B4A5A"/>
           </a:solidFill>
           <a:ln>
             <a:noFill/>
@@ -6887,64 +6961,20 @@
       </p:sp>
       <p:sp>
         <p:nvSpPr>
-          <p:cNvPr id="28" name="TextBox 27"/>
-          <p:cNvSpPr txBox="1"/>
-          <p:nvPr/>
-        </p:nvSpPr>
-        <p:spPr>
-          <a:xfrm>
-            <a:off x="530352" y="6291072"/>
-            <a:ext cx="8595360" cy="256032"/>
-          </a:xfrm>
-          <a:prstGeom prst="rect">
-            <a:avLst/>
-          </a:prstGeom>
-          <a:noFill/>
-        </p:spPr>
-        <p:txBody>
-          <a:bodyPr wrap="square" lIns="0" rIns="0" tIns="0" bIns="0" anchor="t">
-            <a:noAutofit/>
-          </a:bodyPr>
-          <a:lstStyle/>
-          <a:p>
-            <a:pPr algn="l">
-              <a:spcBef>
-                <a:spcPts val="0"/>
-              </a:spcBef>
-              <a:spcAft>
-                <a:spcPts val="0"/>
-              </a:spcAft>
-            </a:pPr>
-            <a:r>
-              <a:rPr sz="900" b="0" i="0" lang="id-ID">
-                <a:solidFill>
-                  <a:srgbClr val="5C757C"/>
-                </a:solidFill>
-                <a:latin typeface="Calibri"/>
-              </a:rPr>
-              <a:t>Lopes dkk., Sci Rep 2021;11:22405 · DOI 10.1038/s41598-021-01541-7 · CC BY 4.0</a:t>
-            </a:r>
-          </a:p>
-        </p:txBody>
-      </p:sp>
-      <p:sp>
-        <p:nvSpPr>
-          <p:cNvPr id="29" name="Rounded Rectangle 28"/>
+          <p:cNvPr id="30" name="Rectangle 29"/>
           <p:cNvSpPr/>
           <p:nvPr/>
         </p:nvSpPr>
         <p:spPr>
           <a:xfrm>
-            <a:off x="11259007" y="6227064"/>
-            <a:ext cx="402336" cy="256032"/>
-          </a:xfrm>
-          <a:prstGeom prst="roundRect">
-            <a:avLst>
-              <a:gd name="adj" fmla="val 17857"/>
-            </a:avLst>
-          </a:prstGeom>
-          <a:solidFill>
-            <a:srgbClr val="0B4A5A"/>
+            <a:off x="0" y="6163056"/>
+            <a:ext cx="12191695" cy="41148"/>
+          </a:xfrm>
+          <a:prstGeom prst="rect">
+            <a:avLst/>
+          </a:prstGeom>
+          <a:solidFill>
+            <a:srgbClr val="D98A2B"/>
           </a:solidFill>
           <a:ln>
             <a:noFill/>
@@ -6973,14 +7003,14 @@
       </p:sp>
       <p:sp>
         <p:nvSpPr>
-          <p:cNvPr id="30" name="TextBox 29"/>
+          <p:cNvPr id="31" name="TextBox 30"/>
           <p:cNvSpPr txBox="1"/>
           <p:nvPr/>
         </p:nvSpPr>
         <p:spPr>
           <a:xfrm>
-            <a:off x="11259007" y="6286500"/>
-            <a:ext cx="402336" cy="182880"/>
+            <a:off x="530352" y="6327648"/>
+            <a:ext cx="8595360" cy="256032"/>
           </a:xfrm>
           <a:prstGeom prst="rect">
             <a:avLst/>
@@ -6993,6 +7023,92 @@
           </a:bodyPr>
           <a:lstStyle/>
           <a:p>
+            <a:pPr algn="l">
+              <a:spcBef>
+                <a:spcPts val="0"/>
+              </a:spcBef>
+              <a:spcAft>
+                <a:spcPts val="0"/>
+              </a:spcAft>
+            </a:pPr>
+            <a:r>
+              <a:rPr sz="850" b="0" i="0" lang="id-ID">
+                <a:solidFill>
+                  <a:srgbClr val="9FC7CF"/>
+                </a:solidFill>
+                <a:latin typeface="Calibri"/>
+              </a:rPr>
+              <a:t>Lopes dkk., Sci Rep 2021;11:22405 · DOI 10.1038/s41598-021-01541-7 · CC BY 4.0</a:t>
+            </a:r>
+          </a:p>
+        </p:txBody>
+      </p:sp>
+      <p:sp>
+        <p:nvSpPr>
+          <p:cNvPr id="32" name="Rounded Rectangle 31"/>
+          <p:cNvSpPr/>
+          <p:nvPr/>
+        </p:nvSpPr>
+        <p:spPr>
+          <a:xfrm>
+            <a:off x="11204143" y="6291072"/>
+            <a:ext cx="457200" cy="256032"/>
+          </a:xfrm>
+          <a:prstGeom prst="roundRect">
+            <a:avLst>
+              <a:gd name="adj" fmla="val 17857"/>
+            </a:avLst>
+          </a:prstGeom>
+          <a:solidFill>
+            <a:srgbClr val="E8F4F6"/>
+          </a:solidFill>
+          <a:ln>
+            <a:noFill/>
+          </a:ln>
+          <a:effectLst/>
+        </p:spPr>
+        <p:style>
+          <a:lnRef idx="1">
+            <a:schemeClr val="accent1"/>
+          </a:lnRef>
+          <a:fillRef idx="3">
+            <a:schemeClr val="accent1"/>
+          </a:fillRef>
+          <a:effectRef idx="2">
+            <a:schemeClr val="accent1"/>
+          </a:effectRef>
+          <a:fontRef idx="minor">
+            <a:schemeClr val="lt1"/>
+          </a:fontRef>
+        </p:style>
+        <p:txBody>
+          <a:bodyPr rtlCol="0" anchor="ctr"/>
+          <a:lstStyle/>
+          <a:p/>
+        </p:txBody>
+      </p:sp>
+      <p:sp>
+        <p:nvSpPr>
+          <p:cNvPr id="33" name="TextBox 32"/>
+          <p:cNvSpPr txBox="1"/>
+          <p:nvPr/>
+        </p:nvSpPr>
+        <p:spPr>
+          <a:xfrm>
+            <a:off x="11204143" y="6332220"/>
+            <a:ext cx="457200" cy="182880"/>
+          </a:xfrm>
+          <a:prstGeom prst="rect">
+            <a:avLst/>
+          </a:prstGeom>
+          <a:noFill/>
+        </p:spPr>
+        <p:txBody>
+          <a:bodyPr wrap="square" lIns="0" rIns="0" tIns="0" bIns="0" anchor="t">
+            <a:noAutofit/>
+          </a:bodyPr>
+          <a:lstStyle/>
+          <a:p>
             <a:pPr algn="ctr">
               <a:spcBef>
                 <a:spcPts val="0"/>
@@ -7004,7 +7120,7 @@
             <a:r>
               <a:rPr sz="950" b="1" i="0" lang="id-ID">
                 <a:solidFill>
-                  <a:srgbClr val="FFFFFF"/>
+                  <a:srgbClr val="0B4A5A"/>
                 </a:solidFill>
                 <a:latin typeface="Calibri"/>
               </a:rPr>
@@ -7045,17 +7161,9 @@
           <a:prstGeom prst="rect">
             <a:avLst/>
           </a:prstGeom>
-          <a:gradFill rotWithShape="1">
-            <a:gsLst>
-              <a:gs pos="0">
-                <a:srgbClr val="F9F7F3"/>
-              </a:gs>
-              <a:gs pos="100000">
-                <a:srgbClr val="E6EFF2"/>
-              </a:gs>
-            </a:gsLst>
-            <a:lin scaled="0" ang="19200000"/>
-          </a:gradFill>
+          <a:solidFill>
+            <a:srgbClr val="DEE7EE"/>
+          </a:solidFill>
           <a:ln>
             <a:noFill/>
           </a:ln>
@@ -7089,14 +7197,14 @@
         </p:nvSpPr>
         <p:spPr>
           <a:xfrm>
-            <a:off x="9098280" y="-2240280"/>
-            <a:ext cx="4480560" cy="4480560"/>
+            <a:off x="8732520" y="3520440"/>
+            <a:ext cx="5760720" cy="5760720"/>
           </a:xfrm>
           <a:prstGeom prst="ellipse">
             <a:avLst/>
           </a:prstGeom>
           <a:solidFill>
-            <a:srgbClr val="E4EFF1"/>
+            <a:srgbClr val="D1DFE6"/>
           </a:solidFill>
           <a:ln>
             <a:noFill/>
@@ -7125,20 +7233,20 @@
       </p:sp>
       <p:sp>
         <p:nvSpPr>
-          <p:cNvPr id="4" name="Oval 3"/>
+          <p:cNvPr id="4" name="Rectangle 3"/>
           <p:cNvSpPr/>
           <p:nvPr/>
         </p:nvSpPr>
         <p:spPr>
           <a:xfrm>
-            <a:off x="-1600200" y="4160520"/>
-            <a:ext cx="3931920" cy="3931920"/>
-          </a:xfrm>
-          <a:prstGeom prst="ellipse">
-            <a:avLst/>
-          </a:prstGeom>
-          <a:solidFill>
-            <a:srgbClr val="EAF3F4"/>
+            <a:off x="3309213" y="1417320"/>
+            <a:ext cx="7315" cy="4663440"/>
+          </a:xfrm>
+          <a:prstGeom prst="rect">
+            <a:avLst/>
+          </a:prstGeom>
+          <a:solidFill>
+            <a:srgbClr val="C7DCE1"/>
           </a:solidFill>
           <a:ln>
             <a:noFill/>
@@ -7173,16 +7281,14 @@
         </p:nvSpPr>
         <p:spPr>
           <a:xfrm>
-            <a:off x="0" y="6455664"/>
-            <a:ext cx="12191695" cy="402336"/>
-          </a:xfrm>
-          <a:prstGeom prst="rect">
-            <a:avLst/>
-          </a:prstGeom>
-          <a:solidFill>
-            <a:srgbClr val="DCE7EA">
-              <a:alpha val="85000"/>
-            </a:srgbClr>
+            <a:off x="6092647" y="1417320"/>
+            <a:ext cx="7315" cy="4663440"/>
+          </a:xfrm>
+          <a:prstGeom prst="rect">
+            <a:avLst/>
+          </a:prstGeom>
+          <a:solidFill>
+            <a:srgbClr val="C7DCE1"/>
           </a:solidFill>
           <a:ln>
             <a:noFill/>
@@ -7212,6 +7318,90 @@
       <p:sp>
         <p:nvSpPr>
           <p:cNvPr id="6" name="Rectangle 5"/>
+          <p:cNvSpPr/>
+          <p:nvPr/>
+        </p:nvSpPr>
+        <p:spPr>
+          <a:xfrm>
+            <a:off x="8875166" y="1417320"/>
+            <a:ext cx="7315" cy="4663440"/>
+          </a:xfrm>
+          <a:prstGeom prst="rect">
+            <a:avLst/>
+          </a:prstGeom>
+          <a:solidFill>
+            <a:srgbClr val="C7DCE1"/>
+          </a:solidFill>
+          <a:ln>
+            <a:noFill/>
+          </a:ln>
+          <a:effectLst/>
+        </p:spPr>
+        <p:style>
+          <a:lnRef idx="1">
+            <a:schemeClr val="accent1"/>
+          </a:lnRef>
+          <a:fillRef idx="3">
+            <a:schemeClr val="accent1"/>
+          </a:fillRef>
+          <a:effectRef idx="2">
+            <a:schemeClr val="accent1"/>
+          </a:effectRef>
+          <a:fontRef idx="minor">
+            <a:schemeClr val="lt1"/>
+          </a:fontRef>
+        </p:style>
+        <p:txBody>
+          <a:bodyPr rtlCol="0" anchor="ctr"/>
+          <a:lstStyle/>
+          <a:p/>
+        </p:txBody>
+      </p:sp>
+      <p:sp>
+        <p:nvSpPr>
+          <p:cNvPr id="7" name="Rectangle 6"/>
+          <p:cNvSpPr/>
+          <p:nvPr/>
+        </p:nvSpPr>
+        <p:spPr>
+          <a:xfrm>
+            <a:off x="0" y="0"/>
+            <a:ext cx="201168" cy="6858000"/>
+          </a:xfrm>
+          <a:prstGeom prst="rect">
+            <a:avLst/>
+          </a:prstGeom>
+          <a:solidFill>
+            <a:srgbClr val="0B4A5A"/>
+          </a:solidFill>
+          <a:ln>
+            <a:noFill/>
+          </a:ln>
+          <a:effectLst/>
+        </p:spPr>
+        <p:style>
+          <a:lnRef idx="1">
+            <a:schemeClr val="accent1"/>
+          </a:lnRef>
+          <a:fillRef idx="3">
+            <a:schemeClr val="accent1"/>
+          </a:fillRef>
+          <a:effectRef idx="2">
+            <a:schemeClr val="accent1"/>
+          </a:effectRef>
+          <a:fontRef idx="minor">
+            <a:schemeClr val="lt1"/>
+          </a:fontRef>
+        </p:style>
+        <p:txBody>
+          <a:bodyPr rtlCol="0" anchor="ctr"/>
+          <a:lstStyle/>
+          <a:p/>
+        </p:txBody>
+      </p:sp>
+      <p:sp>
+        <p:nvSpPr>
+          <p:cNvPr id="8" name="Rectangle 7"/>
           <p:cNvSpPr/>
           <p:nvPr/>
         </p:nvSpPr>
@@ -7261,20 +7451,20 @@
       </p:sp>
       <p:sp>
         <p:nvSpPr>
-          <p:cNvPr id="7" name="Rectangle 6"/>
+          <p:cNvPr id="9" name="Rectangle 8"/>
           <p:cNvSpPr/>
           <p:nvPr/>
         </p:nvSpPr>
         <p:spPr>
           <a:xfrm>
             <a:off x="0" y="1171346"/>
-            <a:ext cx="12191695" cy="45720"/>
-          </a:xfrm>
-          <a:prstGeom prst="rect">
-            <a:avLst/>
-          </a:prstGeom>
-          <a:solidFill>
-            <a:srgbClr val="14A0B4"/>
+            <a:ext cx="12191695" cy="64008"/>
+          </a:xfrm>
+          <a:prstGeom prst="rect">
+            <a:avLst/>
+          </a:prstGeom>
+          <a:solidFill>
+            <a:srgbClr val="D98A2B"/>
           </a:solidFill>
           <a:ln>
             <a:noFill/>
@@ -7303,7 +7493,7 @@
       </p:sp>
       <p:sp>
         <p:nvSpPr>
-          <p:cNvPr id="8" name="TextBox 7"/>
+          <p:cNvPr id="10" name="TextBox 9"/>
           <p:cNvSpPr txBox="1"/>
           <p:nvPr/>
         </p:nvSpPr>
@@ -7338,14 +7528,14 @@
                 </a:solidFill>
                 <a:latin typeface="Calibri"/>
               </a:rPr>
-              <a:t>SUB-ANALISIS</a:t>
-            </a:r>
-          </a:p>
-        </p:txBody>
-      </p:sp>
-      <p:sp>
-        <p:nvSpPr>
-          <p:cNvPr id="9" name="TextBox 8"/>
+              <a:t>11  ·  SUB-ANALISIS</a:t>
+            </a:r>
+          </a:p>
+        </p:txBody>
+      </p:sp>
+      <p:sp>
+        <p:nvSpPr>
+          <p:cNvPr id="11" name="TextBox 10"/>
           <p:cNvSpPr txBox="1"/>
           <p:nvPr/>
         </p:nvSpPr>
@@ -7387,7 +7577,7 @@
       </p:sp>
       <p:sp>
         <p:nvSpPr>
-          <p:cNvPr id="10" name="Rounded Rectangle 9"/>
+          <p:cNvPr id="12" name="Rounded Rectangle 11"/>
           <p:cNvSpPr/>
           <p:nvPr/>
         </p:nvSpPr>
@@ -7433,7 +7623,7 @@
       </p:sp>
       <p:sp>
         <p:nvSpPr>
-          <p:cNvPr id="11" name="Rectangle 10"/>
+          <p:cNvPr id="13" name="Rectangle 12"/>
           <p:cNvSpPr/>
           <p:nvPr/>
         </p:nvSpPr>
@@ -7475,7 +7665,7 @@
       </p:sp>
       <p:sp>
         <p:nvSpPr>
-          <p:cNvPr id="12" name="TextBox 11"/>
+          <p:cNvPr id="14" name="TextBox 13"/>
           <p:cNvSpPr txBox="1"/>
           <p:nvPr/>
         </p:nvSpPr>
@@ -7517,7 +7707,7 @@
       </p:sp>
       <p:sp>
         <p:nvSpPr>
-          <p:cNvPr id="13" name="Rounded Rectangle 12"/>
+          <p:cNvPr id="15" name="Rounded Rectangle 14"/>
           <p:cNvSpPr/>
           <p:nvPr/>
         </p:nvSpPr>
@@ -7561,7 +7751,7 @@
       </p:sp>
       <p:sp>
         <p:nvSpPr>
-          <p:cNvPr id="14" name="TextBox 13"/>
+          <p:cNvPr id="16" name="TextBox 15"/>
           <p:cNvSpPr txBox="1"/>
           <p:nvPr/>
         </p:nvSpPr>
@@ -7603,7 +7793,7 @@
       </p:sp>
       <p:graphicFrame>
         <p:nvGraphicFramePr>
-          <p:cNvPr id="15" name="Chart 14"/>
+          <p:cNvPr id="17" name="Chart 16"/>
           <p:cNvGraphicFramePr>
             <a:graphicFrameLocks noGrp="1"/>
           </p:cNvGraphicFramePr>
@@ -7621,7 +7811,7 @@
       </p:graphicFrame>
       <p:sp>
         <p:nvSpPr>
-          <p:cNvPr id="16" name="TextBox 15"/>
+          <p:cNvPr id="18" name="TextBox 17"/>
           <p:cNvSpPr txBox="1"/>
           <p:nvPr/>
         </p:nvSpPr>
@@ -7663,7 +7853,7 @@
       </p:sp>
       <p:sp>
         <p:nvSpPr>
-          <p:cNvPr id="17" name="Rounded Rectangle 16"/>
+          <p:cNvPr id="19" name="Rounded Rectangle 18"/>
           <p:cNvSpPr/>
           <p:nvPr/>
         </p:nvSpPr>
@@ -7707,7 +7897,7 @@
       </p:sp>
       <p:sp>
         <p:nvSpPr>
-          <p:cNvPr id="18" name="TextBox 17"/>
+          <p:cNvPr id="20" name="TextBox 19"/>
           <p:cNvSpPr txBox="1"/>
           <p:nvPr/>
         </p:nvSpPr>
@@ -7749,7 +7939,7 @@
       </p:sp>
       <p:sp>
         <p:nvSpPr>
-          <p:cNvPr id="19" name="TextBox 18"/>
+          <p:cNvPr id="21" name="TextBox 20"/>
           <p:cNvSpPr txBox="1"/>
           <p:nvPr/>
         </p:nvSpPr>
@@ -7791,7 +7981,7 @@
       </p:sp>
       <p:sp>
         <p:nvSpPr>
-          <p:cNvPr id="20" name="TextBox 19"/>
+          <p:cNvPr id="22" name="TextBox 21"/>
           <p:cNvSpPr txBox="1"/>
           <p:nvPr/>
         </p:nvSpPr>
@@ -7836,7 +8026,7 @@
       </p:sp>
       <p:sp>
         <p:nvSpPr>
-          <p:cNvPr id="21" name="Rectangle 20"/>
+          <p:cNvPr id="23" name="Rectangle 22"/>
           <p:cNvSpPr/>
           <p:nvPr/>
         </p:nvSpPr>
@@ -7878,7 +8068,7 @@
       </p:sp>
       <p:sp>
         <p:nvSpPr>
-          <p:cNvPr id="22" name="TextBox 21"/>
+          <p:cNvPr id="24" name="TextBox 23"/>
           <p:cNvSpPr txBox="1"/>
           <p:nvPr/>
         </p:nvSpPr>
@@ -7920,7 +8110,7 @@
       </p:sp>
       <p:sp>
         <p:nvSpPr>
-          <p:cNvPr id="23" name="Rounded Rectangle 22"/>
+          <p:cNvPr id="25" name="Rounded Rectangle 24"/>
           <p:cNvSpPr/>
           <p:nvPr/>
         </p:nvSpPr>
@@ -7964,7 +8154,7 @@
       </p:sp>
       <p:sp>
         <p:nvSpPr>
-          <p:cNvPr id="24" name="TextBox 23"/>
+          <p:cNvPr id="26" name="TextBox 25"/>
           <p:cNvSpPr txBox="1"/>
           <p:nvPr/>
         </p:nvSpPr>
@@ -8009,7 +8199,7 @@
       </p:sp>
       <p:sp>
         <p:nvSpPr>
-          <p:cNvPr id="25" name="TextBox 24"/>
+          <p:cNvPr id="27" name="TextBox 26"/>
           <p:cNvSpPr txBox="1"/>
           <p:nvPr/>
         </p:nvSpPr>
@@ -8054,20 +8244,20 @@
       </p:sp>
       <p:sp>
         <p:nvSpPr>
-          <p:cNvPr id="26" name="Rectangle 25"/>
+          <p:cNvPr id="28" name="Rectangle 27"/>
           <p:cNvSpPr/>
           <p:nvPr/>
         </p:nvSpPr>
         <p:spPr>
           <a:xfrm>
-            <a:off x="530352" y="6254496"/>
-            <a:ext cx="11130991" cy="12801"/>
-          </a:xfrm>
-          <a:prstGeom prst="rect">
-            <a:avLst/>
-          </a:prstGeom>
-          <a:solidFill>
-            <a:srgbClr val="D7E3E6"/>
+            <a:off x="0" y="6163056"/>
+            <a:ext cx="12191695" cy="694944"/>
+          </a:xfrm>
+          <a:prstGeom prst="rect">
+            <a:avLst/>
+          </a:prstGeom>
+          <a:solidFill>
+            <a:srgbClr val="0B4A5A"/>
           </a:solidFill>
           <a:ln>
             <a:noFill/>
@@ -8096,64 +8286,20 @@
       </p:sp>
       <p:sp>
         <p:nvSpPr>
-          <p:cNvPr id="27" name="TextBox 26"/>
-          <p:cNvSpPr txBox="1"/>
-          <p:nvPr/>
-        </p:nvSpPr>
-        <p:spPr>
-          <a:xfrm>
-            <a:off x="530352" y="6291072"/>
-            <a:ext cx="8595360" cy="256032"/>
-          </a:xfrm>
-          <a:prstGeom prst="rect">
-            <a:avLst/>
-          </a:prstGeom>
-          <a:noFill/>
-        </p:spPr>
-        <p:txBody>
-          <a:bodyPr wrap="square" lIns="0" rIns="0" tIns="0" bIns="0" anchor="t">
-            <a:noAutofit/>
-          </a:bodyPr>
-          <a:lstStyle/>
-          <a:p>
-            <a:pPr algn="l">
-              <a:spcBef>
-                <a:spcPts val="0"/>
-              </a:spcBef>
-              <a:spcAft>
-                <a:spcPts val="0"/>
-              </a:spcAft>
-            </a:pPr>
-            <a:r>
-              <a:rPr sz="900" b="0" i="0" lang="id-ID">
-                <a:solidFill>
-                  <a:srgbClr val="5C757C"/>
-                </a:solidFill>
-                <a:latin typeface="Calibri"/>
-              </a:rPr>
-              <a:t>Lopes dkk., Sci Rep 2021;11:22405 · DOI 10.1038/s41598-021-01541-7 · CC BY 4.0</a:t>
-            </a:r>
-          </a:p>
-        </p:txBody>
-      </p:sp>
-      <p:sp>
-        <p:nvSpPr>
-          <p:cNvPr id="28" name="Rounded Rectangle 27"/>
+          <p:cNvPr id="29" name="Rectangle 28"/>
           <p:cNvSpPr/>
           <p:nvPr/>
         </p:nvSpPr>
         <p:spPr>
           <a:xfrm>
-            <a:off x="11259007" y="6227064"/>
-            <a:ext cx="402336" cy="256032"/>
-          </a:xfrm>
-          <a:prstGeom prst="roundRect">
-            <a:avLst>
-              <a:gd name="adj" fmla="val 17857"/>
-            </a:avLst>
-          </a:prstGeom>
-          <a:solidFill>
-            <a:srgbClr val="0B4A5A"/>
+            <a:off x="0" y="6163056"/>
+            <a:ext cx="12191695" cy="41148"/>
+          </a:xfrm>
+          <a:prstGeom prst="rect">
+            <a:avLst/>
+          </a:prstGeom>
+          <a:solidFill>
+            <a:srgbClr val="D98A2B"/>
           </a:solidFill>
           <a:ln>
             <a:noFill/>
@@ -8182,14 +8328,14 @@
       </p:sp>
       <p:sp>
         <p:nvSpPr>
-          <p:cNvPr id="29" name="TextBox 28"/>
+          <p:cNvPr id="30" name="TextBox 29"/>
           <p:cNvSpPr txBox="1"/>
           <p:nvPr/>
         </p:nvSpPr>
         <p:spPr>
           <a:xfrm>
-            <a:off x="11259007" y="6286500"/>
-            <a:ext cx="402336" cy="182880"/>
+            <a:off x="530352" y="6327648"/>
+            <a:ext cx="8595360" cy="256032"/>
           </a:xfrm>
           <a:prstGeom prst="rect">
             <a:avLst/>
@@ -8202,6 +8348,92 @@
           </a:bodyPr>
           <a:lstStyle/>
           <a:p>
+            <a:pPr algn="l">
+              <a:spcBef>
+                <a:spcPts val="0"/>
+              </a:spcBef>
+              <a:spcAft>
+                <a:spcPts val="0"/>
+              </a:spcAft>
+            </a:pPr>
+            <a:r>
+              <a:rPr sz="850" b="0" i="0" lang="id-ID">
+                <a:solidFill>
+                  <a:srgbClr val="9FC7CF"/>
+                </a:solidFill>
+                <a:latin typeface="Calibri"/>
+              </a:rPr>
+              <a:t>Lopes dkk., Sci Rep 2021;11:22405 · DOI 10.1038/s41598-021-01541-7 · CC BY 4.0</a:t>
+            </a:r>
+          </a:p>
+        </p:txBody>
+      </p:sp>
+      <p:sp>
+        <p:nvSpPr>
+          <p:cNvPr id="31" name="Rounded Rectangle 30"/>
+          <p:cNvSpPr/>
+          <p:nvPr/>
+        </p:nvSpPr>
+        <p:spPr>
+          <a:xfrm>
+            <a:off x="11204143" y="6291072"/>
+            <a:ext cx="457200" cy="256032"/>
+          </a:xfrm>
+          <a:prstGeom prst="roundRect">
+            <a:avLst>
+              <a:gd name="adj" fmla="val 17857"/>
+            </a:avLst>
+          </a:prstGeom>
+          <a:solidFill>
+            <a:srgbClr val="E8F4F6"/>
+          </a:solidFill>
+          <a:ln>
+            <a:noFill/>
+          </a:ln>
+          <a:effectLst/>
+        </p:spPr>
+        <p:style>
+          <a:lnRef idx="1">
+            <a:schemeClr val="accent1"/>
+          </a:lnRef>
+          <a:fillRef idx="3">
+            <a:schemeClr val="accent1"/>
+          </a:fillRef>
+          <a:effectRef idx="2">
+            <a:schemeClr val="accent1"/>
+          </a:effectRef>
+          <a:fontRef idx="minor">
+            <a:schemeClr val="lt1"/>
+          </a:fontRef>
+        </p:style>
+        <p:txBody>
+          <a:bodyPr rtlCol="0" anchor="ctr"/>
+          <a:lstStyle/>
+          <a:p/>
+        </p:txBody>
+      </p:sp>
+      <p:sp>
+        <p:nvSpPr>
+          <p:cNvPr id="32" name="TextBox 31"/>
+          <p:cNvSpPr txBox="1"/>
+          <p:nvPr/>
+        </p:nvSpPr>
+        <p:spPr>
+          <a:xfrm>
+            <a:off x="11204143" y="6332220"/>
+            <a:ext cx="457200" cy="182880"/>
+          </a:xfrm>
+          <a:prstGeom prst="rect">
+            <a:avLst/>
+          </a:prstGeom>
+          <a:noFill/>
+        </p:spPr>
+        <p:txBody>
+          <a:bodyPr wrap="square" lIns="0" rIns="0" tIns="0" bIns="0" anchor="t">
+            <a:noAutofit/>
+          </a:bodyPr>
+          <a:lstStyle/>
+          <a:p>
             <a:pPr algn="ctr">
               <a:spcBef>
                 <a:spcPts val="0"/>
@@ -8213,7 +8445,7 @@
             <a:r>
               <a:rPr sz="950" b="1" i="0" lang="id-ID">
                 <a:solidFill>
-                  <a:srgbClr val="FFFFFF"/>
+                  <a:srgbClr val="0B4A5A"/>
                 </a:solidFill>
                 <a:latin typeface="Calibri"/>
               </a:rPr>
@@ -8254,17 +8486,9 @@
           <a:prstGeom prst="rect">
             <a:avLst/>
           </a:prstGeom>
-          <a:gradFill rotWithShape="1">
-            <a:gsLst>
-              <a:gs pos="0">
-                <a:srgbClr val="F9F7F3"/>
-              </a:gs>
-              <a:gs pos="100000">
-                <a:srgbClr val="E6EFF2"/>
-              </a:gs>
-            </a:gsLst>
-            <a:lin scaled="0" ang="19200000"/>
-          </a:gradFill>
+          <a:solidFill>
+            <a:srgbClr val="EFE8D9"/>
+          </a:solidFill>
           <a:ln>
             <a:noFill/>
           </a:ln>
@@ -8298,14 +8522,14 @@
         </p:nvSpPr>
         <p:spPr>
           <a:xfrm>
-            <a:off x="9098280" y="-2240280"/>
-            <a:ext cx="4480560" cy="4480560"/>
+            <a:off x="8732520" y="3520440"/>
+            <a:ext cx="5760720" cy="5760720"/>
           </a:xfrm>
           <a:prstGeom prst="ellipse">
             <a:avLst/>
           </a:prstGeom>
           <a:solidFill>
-            <a:srgbClr val="E4EFF1"/>
+            <a:srgbClr val="E0E0D5"/>
           </a:solidFill>
           <a:ln>
             <a:noFill/>
@@ -8334,20 +8558,20 @@
       </p:sp>
       <p:sp>
         <p:nvSpPr>
-          <p:cNvPr id="4" name="Oval 3"/>
+          <p:cNvPr id="4" name="Rectangle 3"/>
           <p:cNvSpPr/>
           <p:nvPr/>
         </p:nvSpPr>
         <p:spPr>
           <a:xfrm>
-            <a:off x="-1600200" y="4160520"/>
-            <a:ext cx="3931920" cy="3931920"/>
-          </a:xfrm>
-          <a:prstGeom prst="ellipse">
-            <a:avLst/>
-          </a:prstGeom>
-          <a:solidFill>
-            <a:srgbClr val="EAF3F4"/>
+            <a:off x="3309213" y="1417320"/>
+            <a:ext cx="7315" cy="4663440"/>
+          </a:xfrm>
+          <a:prstGeom prst="rect">
+            <a:avLst/>
+          </a:prstGeom>
+          <a:solidFill>
+            <a:srgbClr val="C7DCE1"/>
           </a:solidFill>
           <a:ln>
             <a:noFill/>
@@ -8382,16 +8606,14 @@
         </p:nvSpPr>
         <p:spPr>
           <a:xfrm>
-            <a:off x="0" y="6455664"/>
-            <a:ext cx="12191695" cy="402336"/>
-          </a:xfrm>
-          <a:prstGeom prst="rect">
-            <a:avLst/>
-          </a:prstGeom>
-          <a:solidFill>
-            <a:srgbClr val="DCE7EA">
-              <a:alpha val="85000"/>
-            </a:srgbClr>
+            <a:off x="6092647" y="1417320"/>
+            <a:ext cx="7315" cy="4663440"/>
+          </a:xfrm>
+          <a:prstGeom prst="rect">
+            <a:avLst/>
+          </a:prstGeom>
+          <a:solidFill>
+            <a:srgbClr val="C7DCE1"/>
           </a:solidFill>
           <a:ln>
             <a:noFill/>
@@ -8421,6 +8643,90 @@
       <p:sp>
         <p:nvSpPr>
           <p:cNvPr id="6" name="Rectangle 5"/>
+          <p:cNvSpPr/>
+          <p:nvPr/>
+        </p:nvSpPr>
+        <p:spPr>
+          <a:xfrm>
+            <a:off x="8875166" y="1417320"/>
+            <a:ext cx="7315" cy="4663440"/>
+          </a:xfrm>
+          <a:prstGeom prst="rect">
+            <a:avLst/>
+          </a:prstGeom>
+          <a:solidFill>
+            <a:srgbClr val="C7DCE1"/>
+          </a:solidFill>
+          <a:ln>
+            <a:noFill/>
+          </a:ln>
+          <a:effectLst/>
+        </p:spPr>
+        <p:style>
+          <a:lnRef idx="1">
+            <a:schemeClr val="accent1"/>
+          </a:lnRef>
+          <a:fillRef idx="3">
+            <a:schemeClr val="accent1"/>
+          </a:fillRef>
+          <a:effectRef idx="2">
+            <a:schemeClr val="accent1"/>
+          </a:effectRef>
+          <a:fontRef idx="minor">
+            <a:schemeClr val="lt1"/>
+          </a:fontRef>
+        </p:style>
+        <p:txBody>
+          <a:bodyPr rtlCol="0" anchor="ctr"/>
+          <a:lstStyle/>
+          <a:p/>
+        </p:txBody>
+      </p:sp>
+      <p:sp>
+        <p:nvSpPr>
+          <p:cNvPr id="7" name="Rectangle 6"/>
+          <p:cNvSpPr/>
+          <p:nvPr/>
+        </p:nvSpPr>
+        <p:spPr>
+          <a:xfrm>
+            <a:off x="0" y="0"/>
+            <a:ext cx="201168" cy="6858000"/>
+          </a:xfrm>
+          <a:prstGeom prst="rect">
+            <a:avLst/>
+          </a:prstGeom>
+          <a:solidFill>
+            <a:srgbClr val="0B4A5A"/>
+          </a:solidFill>
+          <a:ln>
+            <a:noFill/>
+          </a:ln>
+          <a:effectLst/>
+        </p:spPr>
+        <p:style>
+          <a:lnRef idx="1">
+            <a:schemeClr val="accent1"/>
+          </a:lnRef>
+          <a:fillRef idx="3">
+            <a:schemeClr val="accent1"/>
+          </a:fillRef>
+          <a:effectRef idx="2">
+            <a:schemeClr val="accent1"/>
+          </a:effectRef>
+          <a:fontRef idx="minor">
+            <a:schemeClr val="lt1"/>
+          </a:fontRef>
+        </p:style>
+        <p:txBody>
+          <a:bodyPr rtlCol="0" anchor="ctr"/>
+          <a:lstStyle/>
+          <a:p/>
+        </p:txBody>
+      </p:sp>
+      <p:sp>
+        <p:nvSpPr>
+          <p:cNvPr id="8" name="Rectangle 7"/>
           <p:cNvSpPr/>
           <p:nvPr/>
         </p:nvSpPr>
@@ -8470,20 +8776,20 @@
       </p:sp>
       <p:sp>
         <p:nvSpPr>
-          <p:cNvPr id="7" name="Rectangle 6"/>
+          <p:cNvPr id="9" name="Rectangle 8"/>
           <p:cNvSpPr/>
           <p:nvPr/>
         </p:nvSpPr>
         <p:spPr>
           <a:xfrm>
             <a:off x="0" y="1171346"/>
-            <a:ext cx="12191695" cy="45720"/>
-          </a:xfrm>
-          <a:prstGeom prst="rect">
-            <a:avLst/>
-          </a:prstGeom>
-          <a:solidFill>
-            <a:srgbClr val="14A0B4"/>
+            <a:ext cx="12191695" cy="64008"/>
+          </a:xfrm>
+          <a:prstGeom prst="rect">
+            <a:avLst/>
+          </a:prstGeom>
+          <a:solidFill>
+            <a:srgbClr val="D98A2B"/>
           </a:solidFill>
           <a:ln>
             <a:noFill/>
@@ -8512,7 +8818,7 @@
       </p:sp>
       <p:sp>
         <p:nvSpPr>
-          <p:cNvPr id="8" name="TextBox 7"/>
+          <p:cNvPr id="10" name="TextBox 9"/>
           <p:cNvSpPr txBox="1"/>
           <p:nvPr/>
         </p:nvSpPr>
@@ -8547,14 +8853,14 @@
                 </a:solidFill>
                 <a:latin typeface="Calibri"/>
               </a:rPr>
-              <a:t>DISKUSI · 1</a:t>
-            </a:r>
-          </a:p>
-        </p:txBody>
-      </p:sp>
-      <p:sp>
-        <p:nvSpPr>
-          <p:cNvPr id="9" name="TextBox 8"/>
+              <a:t>12  ·  DISKUSI · 1</a:t>
+            </a:r>
+          </a:p>
+        </p:txBody>
+      </p:sp>
+      <p:sp>
+        <p:nvSpPr>
+          <p:cNvPr id="11" name="TextBox 10"/>
           <p:cNvSpPr txBox="1"/>
           <p:nvPr/>
         </p:nvSpPr>
@@ -8596,7 +8902,7 @@
       </p:sp>
       <p:sp>
         <p:nvSpPr>
-          <p:cNvPr id="10" name="Rounded Rectangle 9"/>
+          <p:cNvPr id="12" name="Rounded Rectangle 11"/>
           <p:cNvSpPr/>
           <p:nvPr/>
         </p:nvSpPr>
@@ -8611,12 +8917,10 @@
             </a:avLst>
           </a:prstGeom>
           <a:solidFill>
-            <a:srgbClr val="FFFFFF"/>
-          </a:solidFill>
-          <a:ln w="9525">
-            <a:solidFill>
-              <a:srgbClr val="D7E3E6"/>
-            </a:solidFill>
+            <a:srgbClr val="08262E"/>
+          </a:solidFill>
+          <a:ln>
+            <a:noFill/>
           </a:ln>
           <a:effectLst/>
         </p:spPr>
@@ -8642,7 +8946,7 @@
       </p:sp>
       <p:sp>
         <p:nvSpPr>
-          <p:cNvPr id="11" name="Rectangle 10"/>
+          <p:cNvPr id="13" name="Rectangle 12"/>
           <p:cNvSpPr/>
           <p:nvPr/>
         </p:nvSpPr>
@@ -8655,7 +8959,7 @@
             <a:avLst/>
           </a:prstGeom>
           <a:solidFill>
-            <a:srgbClr val="FFFFFF"/>
+            <a:srgbClr val="D98A2B"/>
           </a:solidFill>
           <a:ln>
             <a:noFill/>
@@ -8684,7 +8988,7 @@
       </p:sp>
       <p:sp>
         <p:nvSpPr>
-          <p:cNvPr id="12" name="TextBox 11"/>
+          <p:cNvPr id="14" name="TextBox 13"/>
           <p:cNvSpPr txBox="1"/>
           <p:nvPr/>
         </p:nvSpPr>
@@ -8726,7 +9030,7 @@
       </p:sp>
       <p:sp>
         <p:nvSpPr>
-          <p:cNvPr id="13" name="Rounded Rectangle 12"/>
+          <p:cNvPr id="15" name="Rounded Rectangle 14"/>
           <p:cNvSpPr/>
           <p:nvPr/>
         </p:nvSpPr>
@@ -8770,7 +9074,7 @@
       </p:sp>
       <p:sp>
         <p:nvSpPr>
-          <p:cNvPr id="14" name="Rectangle 13"/>
+          <p:cNvPr id="16" name="Rectangle 15"/>
           <p:cNvSpPr/>
           <p:nvPr/>
         </p:nvSpPr>
@@ -8812,7 +9116,7 @@
       </p:sp>
       <p:sp>
         <p:nvSpPr>
-          <p:cNvPr id="15" name="TextBox 14"/>
+          <p:cNvPr id="17" name="TextBox 16"/>
           <p:cNvSpPr txBox="1"/>
           <p:nvPr/>
         </p:nvSpPr>
@@ -8854,7 +9158,7 @@
       </p:sp>
       <p:sp>
         <p:nvSpPr>
-          <p:cNvPr id="16" name="TextBox 15"/>
+          <p:cNvPr id="18" name="TextBox 17"/>
           <p:cNvSpPr txBox="1"/>
           <p:nvPr/>
         </p:nvSpPr>
@@ -8899,7 +9203,7 @@
       </p:sp>
       <p:sp>
         <p:nvSpPr>
-          <p:cNvPr id="17" name="TextBox 16"/>
+          <p:cNvPr id="19" name="TextBox 18"/>
           <p:cNvSpPr txBox="1"/>
           <p:nvPr/>
         </p:nvSpPr>
@@ -8941,7 +9245,7 @@
       </p:sp>
       <p:sp>
         <p:nvSpPr>
-          <p:cNvPr id="18" name="Rounded Rectangle 17"/>
+          <p:cNvPr id="20" name="Rounded Rectangle 19"/>
           <p:cNvSpPr/>
           <p:nvPr/>
         </p:nvSpPr>
@@ -8985,7 +9289,7 @@
       </p:sp>
       <p:sp>
         <p:nvSpPr>
-          <p:cNvPr id="19" name="Rectangle 18"/>
+          <p:cNvPr id="21" name="Rectangle 20"/>
           <p:cNvSpPr/>
           <p:nvPr/>
         </p:nvSpPr>
@@ -9027,7 +9331,7 @@
       </p:sp>
       <p:sp>
         <p:nvSpPr>
-          <p:cNvPr id="20" name="TextBox 19"/>
+          <p:cNvPr id="22" name="TextBox 21"/>
           <p:cNvSpPr txBox="1"/>
           <p:nvPr/>
         </p:nvSpPr>
@@ -9069,7 +9373,7 @@
       </p:sp>
       <p:sp>
         <p:nvSpPr>
-          <p:cNvPr id="21" name="TextBox 20"/>
+          <p:cNvPr id="23" name="TextBox 22"/>
           <p:cNvSpPr txBox="1"/>
           <p:nvPr/>
         </p:nvSpPr>
@@ -9114,7 +9418,7 @@
       </p:sp>
       <p:sp>
         <p:nvSpPr>
-          <p:cNvPr id="22" name="TextBox 21"/>
+          <p:cNvPr id="24" name="TextBox 23"/>
           <p:cNvSpPr txBox="1"/>
           <p:nvPr/>
         </p:nvSpPr>
@@ -9156,7 +9460,7 @@
       </p:sp>
       <p:sp>
         <p:nvSpPr>
-          <p:cNvPr id="23" name="Rounded Rectangle 22"/>
+          <p:cNvPr id="25" name="Rounded Rectangle 24"/>
           <p:cNvSpPr/>
           <p:nvPr/>
         </p:nvSpPr>
@@ -9200,7 +9504,7 @@
       </p:sp>
       <p:sp>
         <p:nvSpPr>
-          <p:cNvPr id="24" name="Rectangle 23"/>
+          <p:cNvPr id="26" name="Rectangle 25"/>
           <p:cNvSpPr/>
           <p:nvPr/>
         </p:nvSpPr>
@@ -9242,7 +9546,7 @@
       </p:sp>
       <p:sp>
         <p:nvSpPr>
-          <p:cNvPr id="25" name="TextBox 24"/>
+          <p:cNvPr id="27" name="TextBox 26"/>
           <p:cNvSpPr txBox="1"/>
           <p:nvPr/>
         </p:nvSpPr>
@@ -9284,7 +9588,7 @@
       </p:sp>
       <p:sp>
         <p:nvSpPr>
-          <p:cNvPr id="26" name="TextBox 25"/>
+          <p:cNvPr id="28" name="TextBox 27"/>
           <p:cNvSpPr txBox="1"/>
           <p:nvPr/>
         </p:nvSpPr>
@@ -9329,7 +9633,7 @@
       </p:sp>
       <p:sp>
         <p:nvSpPr>
-          <p:cNvPr id="27" name="TextBox 26"/>
+          <p:cNvPr id="29" name="TextBox 28"/>
           <p:cNvSpPr txBox="1"/>
           <p:nvPr/>
         </p:nvSpPr>
@@ -9371,7 +9675,7 @@
       </p:sp>
       <p:sp>
         <p:nvSpPr>
-          <p:cNvPr id="28" name="Rounded Rectangle 27"/>
+          <p:cNvPr id="30" name="Rounded Rectangle 29"/>
           <p:cNvSpPr/>
           <p:nvPr/>
         </p:nvSpPr>
@@ -9415,7 +9719,7 @@
       </p:sp>
       <p:sp>
         <p:nvSpPr>
-          <p:cNvPr id="29" name="TextBox 28"/>
+          <p:cNvPr id="31" name="TextBox 30"/>
           <p:cNvSpPr txBox="1"/>
           <p:nvPr/>
         </p:nvSpPr>
@@ -9457,7 +9761,7 @@
       </p:sp>
       <p:sp>
         <p:nvSpPr>
-          <p:cNvPr id="30" name="TextBox 29"/>
+          <p:cNvPr id="32" name="TextBox 31"/>
           <p:cNvSpPr txBox="1"/>
           <p:nvPr/>
         </p:nvSpPr>
@@ -9499,7 +9803,7 @@
       </p:sp>
       <p:sp>
         <p:nvSpPr>
-          <p:cNvPr id="31" name="TextBox 30"/>
+          <p:cNvPr id="33" name="TextBox 32"/>
           <p:cNvSpPr txBox="1"/>
           <p:nvPr/>
         </p:nvSpPr>
@@ -9541,20 +9845,20 @@
       </p:sp>
       <p:sp>
         <p:nvSpPr>
-          <p:cNvPr id="32" name="Rectangle 31"/>
+          <p:cNvPr id="34" name="Rectangle 33"/>
           <p:cNvSpPr/>
           <p:nvPr/>
         </p:nvSpPr>
         <p:spPr>
           <a:xfrm>
-            <a:off x="530352" y="6254496"/>
-            <a:ext cx="11130991" cy="12801"/>
-          </a:xfrm>
-          <a:prstGeom prst="rect">
-            <a:avLst/>
-          </a:prstGeom>
-          <a:solidFill>
-            <a:srgbClr val="D7E3E6"/>
+            <a:off x="0" y="6163056"/>
+            <a:ext cx="12191695" cy="694944"/>
+          </a:xfrm>
+          <a:prstGeom prst="rect">
+            <a:avLst/>
+          </a:prstGeom>
+          <a:solidFill>
+            <a:srgbClr val="0B4A5A"/>
           </a:solidFill>
           <a:ln>
             <a:noFill/>
@@ -9583,64 +9887,20 @@
       </p:sp>
       <p:sp>
         <p:nvSpPr>
-          <p:cNvPr id="33" name="TextBox 32"/>
-          <p:cNvSpPr txBox="1"/>
-          <p:nvPr/>
-        </p:nvSpPr>
-        <p:spPr>
-          <a:xfrm>
-            <a:off x="530352" y="6291072"/>
-            <a:ext cx="8595360" cy="256032"/>
-          </a:xfrm>
-          <a:prstGeom prst="rect">
-            <a:avLst/>
-          </a:prstGeom>
-          <a:noFill/>
-        </p:spPr>
-        <p:txBody>
-          <a:bodyPr wrap="square" lIns="0" rIns="0" tIns="0" bIns="0" anchor="t">
-            <a:noAutofit/>
-          </a:bodyPr>
-          <a:lstStyle/>
-          <a:p>
-            <a:pPr algn="l">
-              <a:spcBef>
-                <a:spcPts val="0"/>
-              </a:spcBef>
-              <a:spcAft>
-                <a:spcPts val="0"/>
-              </a:spcAft>
-            </a:pPr>
-            <a:r>
-              <a:rPr sz="900" b="0" i="0" lang="id-ID">
-                <a:solidFill>
-                  <a:srgbClr val="5C757C"/>
-                </a:solidFill>
-                <a:latin typeface="Calibri"/>
-              </a:rPr>
-              <a:t>Lopes dkk., Sci Rep 2021;11:22405 · DOI 10.1038/s41598-021-01541-7 · CC BY 4.0</a:t>
-            </a:r>
-          </a:p>
-        </p:txBody>
-      </p:sp>
-      <p:sp>
-        <p:nvSpPr>
-          <p:cNvPr id="34" name="Rounded Rectangle 33"/>
+          <p:cNvPr id="35" name="Rectangle 34"/>
           <p:cNvSpPr/>
           <p:nvPr/>
         </p:nvSpPr>
         <p:spPr>
           <a:xfrm>
-            <a:off x="11259007" y="6227064"/>
-            <a:ext cx="402336" cy="256032"/>
-          </a:xfrm>
-          <a:prstGeom prst="roundRect">
-            <a:avLst>
-              <a:gd name="adj" fmla="val 17857"/>
-            </a:avLst>
-          </a:prstGeom>
-          <a:solidFill>
-            <a:srgbClr val="0B4A5A"/>
+            <a:off x="0" y="6163056"/>
+            <a:ext cx="12191695" cy="41148"/>
+          </a:xfrm>
+          <a:prstGeom prst="rect">
+            <a:avLst/>
+          </a:prstGeom>
+          <a:solidFill>
+            <a:srgbClr val="D98A2B"/>
           </a:solidFill>
           <a:ln>
             <a:noFill/>
@@ -9669,14 +9929,14 @@
       </p:sp>
       <p:sp>
         <p:nvSpPr>
-          <p:cNvPr id="35" name="TextBox 34"/>
+          <p:cNvPr id="36" name="TextBox 35"/>
           <p:cNvSpPr txBox="1"/>
           <p:nvPr/>
         </p:nvSpPr>
         <p:spPr>
           <a:xfrm>
-            <a:off x="11259007" y="6286500"/>
-            <a:ext cx="402336" cy="182880"/>
+            <a:off x="530352" y="6327648"/>
+            <a:ext cx="8595360" cy="256032"/>
           </a:xfrm>
           <a:prstGeom prst="rect">
             <a:avLst/>
@@ -9689,6 +9949,92 @@
           </a:bodyPr>
           <a:lstStyle/>
           <a:p>
+            <a:pPr algn="l">
+              <a:spcBef>
+                <a:spcPts val="0"/>
+              </a:spcBef>
+              <a:spcAft>
+                <a:spcPts val="0"/>
+              </a:spcAft>
+            </a:pPr>
+            <a:r>
+              <a:rPr sz="850" b="0" i="0" lang="id-ID">
+                <a:solidFill>
+                  <a:srgbClr val="9FC7CF"/>
+                </a:solidFill>
+                <a:latin typeface="Calibri"/>
+              </a:rPr>
+              <a:t>Lopes dkk., Sci Rep 2021;11:22405 · DOI 10.1038/s41598-021-01541-7 · CC BY 4.0</a:t>
+            </a:r>
+          </a:p>
+        </p:txBody>
+      </p:sp>
+      <p:sp>
+        <p:nvSpPr>
+          <p:cNvPr id="37" name="Rounded Rectangle 36"/>
+          <p:cNvSpPr/>
+          <p:nvPr/>
+        </p:nvSpPr>
+        <p:spPr>
+          <a:xfrm>
+            <a:off x="11204143" y="6291072"/>
+            <a:ext cx="457200" cy="256032"/>
+          </a:xfrm>
+          <a:prstGeom prst="roundRect">
+            <a:avLst>
+              <a:gd name="adj" fmla="val 17857"/>
+            </a:avLst>
+          </a:prstGeom>
+          <a:solidFill>
+            <a:srgbClr val="E8F4F6"/>
+          </a:solidFill>
+          <a:ln>
+            <a:noFill/>
+          </a:ln>
+          <a:effectLst/>
+        </p:spPr>
+        <p:style>
+          <a:lnRef idx="1">
+            <a:schemeClr val="accent1"/>
+          </a:lnRef>
+          <a:fillRef idx="3">
+            <a:schemeClr val="accent1"/>
+          </a:fillRef>
+          <a:effectRef idx="2">
+            <a:schemeClr val="accent1"/>
+          </a:effectRef>
+          <a:fontRef idx="minor">
+            <a:schemeClr val="lt1"/>
+          </a:fontRef>
+        </p:style>
+        <p:txBody>
+          <a:bodyPr rtlCol="0" anchor="ctr"/>
+          <a:lstStyle/>
+          <a:p/>
+        </p:txBody>
+      </p:sp>
+      <p:sp>
+        <p:nvSpPr>
+          <p:cNvPr id="38" name="TextBox 37"/>
+          <p:cNvSpPr txBox="1"/>
+          <p:nvPr/>
+        </p:nvSpPr>
+        <p:spPr>
+          <a:xfrm>
+            <a:off x="11204143" y="6332220"/>
+            <a:ext cx="457200" cy="182880"/>
+          </a:xfrm>
+          <a:prstGeom prst="rect">
+            <a:avLst/>
+          </a:prstGeom>
+          <a:noFill/>
+        </p:spPr>
+        <p:txBody>
+          <a:bodyPr wrap="square" lIns="0" rIns="0" tIns="0" bIns="0" anchor="t">
+            <a:noAutofit/>
+          </a:bodyPr>
+          <a:lstStyle/>
+          <a:p>
             <a:pPr algn="ctr">
               <a:spcBef>
                 <a:spcPts val="0"/>
@@ -9700,7 +10046,7 @@
             <a:r>
               <a:rPr sz="950" b="1" i="0" lang="id-ID">
                 <a:solidFill>
-                  <a:srgbClr val="FFFFFF"/>
+                  <a:srgbClr val="0B4A5A"/>
                 </a:solidFill>
                 <a:latin typeface="Calibri"/>
               </a:rPr>
@@ -9741,17 +10087,9 @@
           <a:prstGeom prst="rect">
             <a:avLst/>
           </a:prstGeom>
-          <a:gradFill rotWithShape="1">
-            <a:gsLst>
-              <a:gs pos="0">
-                <a:srgbClr val="F9F7F3"/>
-              </a:gs>
-              <a:gs pos="100000">
-                <a:srgbClr val="E6EFF2"/>
-              </a:gs>
-            </a:gsLst>
-            <a:lin scaled="0" ang="19200000"/>
-          </a:gradFill>
+          <a:solidFill>
+            <a:srgbClr val="EFE8D9"/>
+          </a:solidFill>
           <a:ln>
             <a:noFill/>
           </a:ln>
@@ -9785,14 +10123,14 @@
         </p:nvSpPr>
         <p:spPr>
           <a:xfrm>
-            <a:off x="9098280" y="-2240280"/>
-            <a:ext cx="4480560" cy="4480560"/>
+            <a:off x="8732520" y="3520440"/>
+            <a:ext cx="5760720" cy="5760720"/>
           </a:xfrm>
           <a:prstGeom prst="ellipse">
             <a:avLst/>
           </a:prstGeom>
           <a:solidFill>
-            <a:srgbClr val="E4EFF1"/>
+            <a:srgbClr val="E0E0D5"/>
           </a:solidFill>
           <a:ln>
             <a:noFill/>
@@ -9821,20 +10159,20 @@
       </p:sp>
       <p:sp>
         <p:nvSpPr>
-          <p:cNvPr id="4" name="Oval 3"/>
+          <p:cNvPr id="4" name="Rectangle 3"/>
           <p:cNvSpPr/>
           <p:nvPr/>
         </p:nvSpPr>
         <p:spPr>
           <a:xfrm>
-            <a:off x="-1600200" y="4160520"/>
-            <a:ext cx="3931920" cy="3931920"/>
-          </a:xfrm>
-          <a:prstGeom prst="ellipse">
-            <a:avLst/>
-          </a:prstGeom>
-          <a:solidFill>
-            <a:srgbClr val="EAF3F4"/>
+            <a:off x="3309213" y="1417320"/>
+            <a:ext cx="7315" cy="4663440"/>
+          </a:xfrm>
+          <a:prstGeom prst="rect">
+            <a:avLst/>
+          </a:prstGeom>
+          <a:solidFill>
+            <a:srgbClr val="C7DCE1"/>
           </a:solidFill>
           <a:ln>
             <a:noFill/>
@@ -9869,16 +10207,14 @@
         </p:nvSpPr>
         <p:spPr>
           <a:xfrm>
-            <a:off x="0" y="6455664"/>
-            <a:ext cx="12191695" cy="402336"/>
-          </a:xfrm>
-          <a:prstGeom prst="rect">
-            <a:avLst/>
-          </a:prstGeom>
-          <a:solidFill>
-            <a:srgbClr val="DCE7EA">
-              <a:alpha val="85000"/>
-            </a:srgbClr>
+            <a:off x="6092647" y="1417320"/>
+            <a:ext cx="7315" cy="4663440"/>
+          </a:xfrm>
+          <a:prstGeom prst="rect">
+            <a:avLst/>
+          </a:prstGeom>
+          <a:solidFill>
+            <a:srgbClr val="C7DCE1"/>
           </a:solidFill>
           <a:ln>
             <a:noFill/>
@@ -9908,6 +10244,90 @@
       <p:sp>
         <p:nvSpPr>
           <p:cNvPr id="6" name="Rectangle 5"/>
+          <p:cNvSpPr/>
+          <p:nvPr/>
+        </p:nvSpPr>
+        <p:spPr>
+          <a:xfrm>
+            <a:off x="8875166" y="1417320"/>
+            <a:ext cx="7315" cy="4663440"/>
+          </a:xfrm>
+          <a:prstGeom prst="rect">
+            <a:avLst/>
+          </a:prstGeom>
+          <a:solidFill>
+            <a:srgbClr val="C7DCE1"/>
+          </a:solidFill>
+          <a:ln>
+            <a:noFill/>
+          </a:ln>
+          <a:effectLst/>
+        </p:spPr>
+        <p:style>
+          <a:lnRef idx="1">
+            <a:schemeClr val="accent1"/>
+          </a:lnRef>
+          <a:fillRef idx="3">
+            <a:schemeClr val="accent1"/>
+          </a:fillRef>
+          <a:effectRef idx="2">
+            <a:schemeClr val="accent1"/>
+          </a:effectRef>
+          <a:fontRef idx="minor">
+            <a:schemeClr val="lt1"/>
+          </a:fontRef>
+        </p:style>
+        <p:txBody>
+          <a:bodyPr rtlCol="0" anchor="ctr"/>
+          <a:lstStyle/>
+          <a:p/>
+        </p:txBody>
+      </p:sp>
+      <p:sp>
+        <p:nvSpPr>
+          <p:cNvPr id="7" name="Rectangle 6"/>
+          <p:cNvSpPr/>
+          <p:nvPr/>
+        </p:nvSpPr>
+        <p:spPr>
+          <a:xfrm>
+            <a:off x="0" y="0"/>
+            <a:ext cx="201168" cy="6858000"/>
+          </a:xfrm>
+          <a:prstGeom prst="rect">
+            <a:avLst/>
+          </a:prstGeom>
+          <a:solidFill>
+            <a:srgbClr val="0B4A5A"/>
+          </a:solidFill>
+          <a:ln>
+            <a:noFill/>
+          </a:ln>
+          <a:effectLst/>
+        </p:spPr>
+        <p:style>
+          <a:lnRef idx="1">
+            <a:schemeClr val="accent1"/>
+          </a:lnRef>
+          <a:fillRef idx="3">
+            <a:schemeClr val="accent1"/>
+          </a:fillRef>
+          <a:effectRef idx="2">
+            <a:schemeClr val="accent1"/>
+          </a:effectRef>
+          <a:fontRef idx="minor">
+            <a:schemeClr val="lt1"/>
+          </a:fontRef>
+        </p:style>
+        <p:txBody>
+          <a:bodyPr rtlCol="0" anchor="ctr"/>
+          <a:lstStyle/>
+          <a:p/>
+        </p:txBody>
+      </p:sp>
+      <p:sp>
+        <p:nvSpPr>
+          <p:cNvPr id="8" name="Rectangle 7"/>
           <p:cNvSpPr/>
           <p:nvPr/>
         </p:nvSpPr>
@@ -9957,20 +10377,20 @@
       </p:sp>
       <p:sp>
         <p:nvSpPr>
-          <p:cNvPr id="7" name="Rectangle 6"/>
+          <p:cNvPr id="9" name="Rectangle 8"/>
           <p:cNvSpPr/>
           <p:nvPr/>
         </p:nvSpPr>
         <p:spPr>
           <a:xfrm>
             <a:off x="0" y="1171346"/>
-            <a:ext cx="12191695" cy="45720"/>
-          </a:xfrm>
-          <a:prstGeom prst="rect">
-            <a:avLst/>
-          </a:prstGeom>
-          <a:solidFill>
-            <a:srgbClr val="14A0B4"/>
+            <a:ext cx="12191695" cy="64008"/>
+          </a:xfrm>
+          <a:prstGeom prst="rect">
+            <a:avLst/>
+          </a:prstGeom>
+          <a:solidFill>
+            <a:srgbClr val="D98A2B"/>
           </a:solidFill>
           <a:ln>
             <a:noFill/>
@@ -9999,7 +10419,7 @@
       </p:sp>
       <p:sp>
         <p:nvSpPr>
-          <p:cNvPr id="8" name="TextBox 7"/>
+          <p:cNvPr id="10" name="TextBox 9"/>
           <p:cNvSpPr txBox="1"/>
           <p:nvPr/>
         </p:nvSpPr>
@@ -10034,14 +10454,14 @@
                 </a:solidFill>
                 <a:latin typeface="Calibri"/>
               </a:rPr>
-              <a:t>DISKUSI · 2</a:t>
-            </a:r>
-          </a:p>
-        </p:txBody>
-      </p:sp>
-      <p:sp>
-        <p:nvSpPr>
-          <p:cNvPr id="9" name="TextBox 8"/>
+              <a:t>13  ·  DISKUSI · 2</a:t>
+            </a:r>
+          </a:p>
+        </p:txBody>
+      </p:sp>
+      <p:sp>
+        <p:nvSpPr>
+          <p:cNvPr id="11" name="TextBox 10"/>
           <p:cNvSpPr txBox="1"/>
           <p:nvPr/>
         </p:nvSpPr>
@@ -10083,7 +10503,7 @@
       </p:sp>
       <p:sp>
         <p:nvSpPr>
-          <p:cNvPr id="10" name="Rounded Rectangle 9"/>
+          <p:cNvPr id="12" name="Rounded Rectangle 11"/>
           <p:cNvSpPr/>
           <p:nvPr/>
         </p:nvSpPr>
@@ -10129,7 +10549,7 @@
       </p:sp>
       <p:sp>
         <p:nvSpPr>
-          <p:cNvPr id="11" name="Rectangle 10"/>
+          <p:cNvPr id="13" name="Rectangle 12"/>
           <p:cNvSpPr/>
           <p:nvPr/>
         </p:nvSpPr>
@@ -10171,7 +10591,7 @@
       </p:sp>
       <p:sp>
         <p:nvSpPr>
-          <p:cNvPr id="12" name="TextBox 11"/>
+          <p:cNvPr id="14" name="TextBox 13"/>
           <p:cNvSpPr txBox="1"/>
           <p:nvPr/>
         </p:nvSpPr>
@@ -10213,7 +10633,7 @@
       </p:sp>
       <p:sp>
         <p:nvSpPr>
-          <p:cNvPr id="13" name="Rounded Rectangle 12"/>
+          <p:cNvPr id="15" name="Rounded Rectangle 14"/>
           <p:cNvSpPr/>
           <p:nvPr/>
         </p:nvSpPr>
@@ -10257,7 +10677,7 @@
       </p:sp>
       <p:sp>
         <p:nvSpPr>
-          <p:cNvPr id="14" name="TextBox 13"/>
+          <p:cNvPr id="16" name="TextBox 15"/>
           <p:cNvSpPr txBox="1"/>
           <p:nvPr/>
         </p:nvSpPr>
@@ -10299,7 +10719,7 @@
       </p:sp>
       <p:sp>
         <p:nvSpPr>
-          <p:cNvPr id="15" name="Rounded Rectangle 14"/>
+          <p:cNvPr id="17" name="Rounded Rectangle 16"/>
           <p:cNvSpPr/>
           <p:nvPr/>
         </p:nvSpPr>
@@ -10343,7 +10763,7 @@
       </p:sp>
       <p:sp>
         <p:nvSpPr>
-          <p:cNvPr id="16" name="TextBox 15"/>
+          <p:cNvPr id="18" name="TextBox 17"/>
           <p:cNvSpPr txBox="1"/>
           <p:nvPr/>
         </p:nvSpPr>
@@ -10385,7 +10805,7 @@
       </p:sp>
       <p:sp>
         <p:nvSpPr>
-          <p:cNvPr id="17" name="Rounded Rectangle 16"/>
+          <p:cNvPr id="19" name="Rounded Rectangle 18"/>
           <p:cNvSpPr/>
           <p:nvPr/>
         </p:nvSpPr>
@@ -10429,7 +10849,7 @@
       </p:sp>
       <p:sp>
         <p:nvSpPr>
-          <p:cNvPr id="18" name="TextBox 17"/>
+          <p:cNvPr id="20" name="TextBox 19"/>
           <p:cNvSpPr txBox="1"/>
           <p:nvPr/>
         </p:nvSpPr>
@@ -10471,7 +10891,7 @@
       </p:sp>
       <p:sp>
         <p:nvSpPr>
-          <p:cNvPr id="19" name="Rounded Rectangle 18"/>
+          <p:cNvPr id="21" name="Rounded Rectangle 20"/>
           <p:cNvSpPr/>
           <p:nvPr/>
         </p:nvSpPr>
@@ -10515,7 +10935,7 @@
       </p:sp>
       <p:sp>
         <p:nvSpPr>
-          <p:cNvPr id="20" name="TextBox 19"/>
+          <p:cNvPr id="22" name="TextBox 21"/>
           <p:cNvSpPr txBox="1"/>
           <p:nvPr/>
         </p:nvSpPr>
@@ -10557,7 +10977,7 @@
       </p:sp>
       <p:sp>
         <p:nvSpPr>
-          <p:cNvPr id="21" name="Rounded Rectangle 20"/>
+          <p:cNvPr id="23" name="Rounded Rectangle 22"/>
           <p:cNvSpPr/>
           <p:nvPr/>
         </p:nvSpPr>
@@ -10601,7 +11021,7 @@
       </p:sp>
       <p:sp>
         <p:nvSpPr>
-          <p:cNvPr id="22" name="TextBox 21"/>
+          <p:cNvPr id="24" name="TextBox 23"/>
           <p:cNvSpPr txBox="1"/>
           <p:nvPr/>
         </p:nvSpPr>
@@ -10643,7 +11063,7 @@
       </p:sp>
       <p:sp>
         <p:nvSpPr>
-          <p:cNvPr id="23" name="Rounded Rectangle 22"/>
+          <p:cNvPr id="25" name="Rounded Rectangle 24"/>
           <p:cNvSpPr/>
           <p:nvPr/>
         </p:nvSpPr>
@@ -10687,7 +11107,7 @@
       </p:sp>
       <p:sp>
         <p:nvSpPr>
-          <p:cNvPr id="24" name="TextBox 23"/>
+          <p:cNvPr id="26" name="TextBox 25"/>
           <p:cNvSpPr txBox="1"/>
           <p:nvPr/>
         </p:nvSpPr>
@@ -10729,7 +11149,7 @@
       </p:sp>
       <p:sp>
         <p:nvSpPr>
-          <p:cNvPr id="25" name="Rounded Rectangle 24"/>
+          <p:cNvPr id="27" name="Rounded Rectangle 26"/>
           <p:cNvSpPr/>
           <p:nvPr/>
         </p:nvSpPr>
@@ -10773,7 +11193,7 @@
       </p:sp>
       <p:sp>
         <p:nvSpPr>
-          <p:cNvPr id="26" name="TextBox 25"/>
+          <p:cNvPr id="28" name="TextBox 27"/>
           <p:cNvSpPr txBox="1"/>
           <p:nvPr/>
         </p:nvSpPr>
@@ -10815,7 +11235,7 @@
       </p:sp>
       <p:sp>
         <p:nvSpPr>
-          <p:cNvPr id="27" name="Rounded Rectangle 26"/>
+          <p:cNvPr id="29" name="Rounded Rectangle 28"/>
           <p:cNvSpPr/>
           <p:nvPr/>
         </p:nvSpPr>
@@ -10859,7 +11279,7 @@
       </p:sp>
       <p:sp>
         <p:nvSpPr>
-          <p:cNvPr id="28" name="TextBox 27"/>
+          <p:cNvPr id="30" name="TextBox 29"/>
           <p:cNvSpPr txBox="1"/>
           <p:nvPr/>
         </p:nvSpPr>
@@ -10901,7 +11321,7 @@
       </p:sp>
       <p:sp>
         <p:nvSpPr>
-          <p:cNvPr id="29" name="Rounded Rectangle 28"/>
+          <p:cNvPr id="31" name="Rounded Rectangle 30"/>
           <p:cNvSpPr/>
           <p:nvPr/>
         </p:nvSpPr>
@@ -10945,7 +11365,7 @@
       </p:sp>
       <p:sp>
         <p:nvSpPr>
-          <p:cNvPr id="30" name="TextBox 29"/>
+          <p:cNvPr id="32" name="TextBox 31"/>
           <p:cNvSpPr txBox="1"/>
           <p:nvPr/>
         </p:nvSpPr>
@@ -10987,7 +11407,7 @@
       </p:sp>
       <p:sp>
         <p:nvSpPr>
-          <p:cNvPr id="31" name="Rounded Rectangle 30"/>
+          <p:cNvPr id="33" name="Rounded Rectangle 32"/>
           <p:cNvSpPr/>
           <p:nvPr/>
         </p:nvSpPr>
@@ -11031,7 +11451,7 @@
       </p:sp>
       <p:sp>
         <p:nvSpPr>
-          <p:cNvPr id="32" name="TextBox 31"/>
+          <p:cNvPr id="34" name="TextBox 33"/>
           <p:cNvSpPr txBox="1"/>
           <p:nvPr/>
         </p:nvSpPr>
@@ -11073,7 +11493,7 @@
       </p:sp>
       <p:sp>
         <p:nvSpPr>
-          <p:cNvPr id="33" name="Rounded Rectangle 32"/>
+          <p:cNvPr id="35" name="Rounded Rectangle 34"/>
           <p:cNvSpPr/>
           <p:nvPr/>
         </p:nvSpPr>
@@ -11117,7 +11537,7 @@
       </p:sp>
       <p:sp>
         <p:nvSpPr>
-          <p:cNvPr id="34" name="TextBox 33"/>
+          <p:cNvPr id="36" name="TextBox 35"/>
           <p:cNvSpPr txBox="1"/>
           <p:nvPr/>
         </p:nvSpPr>
@@ -11159,7 +11579,7 @@
       </p:sp>
       <p:sp>
         <p:nvSpPr>
-          <p:cNvPr id="35" name="Rounded Rectangle 34"/>
+          <p:cNvPr id="37" name="Rounded Rectangle 36"/>
           <p:cNvSpPr/>
           <p:nvPr/>
         </p:nvSpPr>
@@ -11203,7 +11623,7 @@
       </p:sp>
       <p:sp>
         <p:nvSpPr>
-          <p:cNvPr id="36" name="TextBox 35"/>
+          <p:cNvPr id="38" name="TextBox 37"/>
           <p:cNvSpPr txBox="1"/>
           <p:nvPr/>
         </p:nvSpPr>
@@ -11245,7 +11665,7 @@
       </p:sp>
       <p:sp>
         <p:nvSpPr>
-          <p:cNvPr id="37" name="Rounded Rectangle 36"/>
+          <p:cNvPr id="39" name="Rounded Rectangle 38"/>
           <p:cNvSpPr/>
           <p:nvPr/>
         </p:nvSpPr>
@@ -11289,7 +11709,7 @@
       </p:sp>
       <p:sp>
         <p:nvSpPr>
-          <p:cNvPr id="38" name="TextBox 37"/>
+          <p:cNvPr id="40" name="TextBox 39"/>
           <p:cNvSpPr txBox="1"/>
           <p:nvPr/>
         </p:nvSpPr>
@@ -11331,7 +11751,7 @@
       </p:sp>
       <p:sp>
         <p:nvSpPr>
-          <p:cNvPr id="39" name="Rounded Rectangle 38"/>
+          <p:cNvPr id="41" name="Rounded Rectangle 40"/>
           <p:cNvSpPr/>
           <p:nvPr/>
         </p:nvSpPr>
@@ -11375,7 +11795,7 @@
       </p:sp>
       <p:sp>
         <p:nvSpPr>
-          <p:cNvPr id="40" name="TextBox 39"/>
+          <p:cNvPr id="42" name="TextBox 41"/>
           <p:cNvSpPr txBox="1"/>
           <p:nvPr/>
         </p:nvSpPr>
@@ -11417,7 +11837,7 @@
       </p:sp>
       <p:sp>
         <p:nvSpPr>
-          <p:cNvPr id="41" name="Rounded Rectangle 40"/>
+          <p:cNvPr id="43" name="Rounded Rectangle 42"/>
           <p:cNvSpPr/>
           <p:nvPr/>
         </p:nvSpPr>
@@ -11461,7 +11881,7 @@
       </p:sp>
       <p:sp>
         <p:nvSpPr>
-          <p:cNvPr id="42" name="TextBox 41"/>
+          <p:cNvPr id="44" name="TextBox 43"/>
           <p:cNvSpPr txBox="1"/>
           <p:nvPr/>
         </p:nvSpPr>
@@ -11503,7 +11923,7 @@
       </p:sp>
       <p:sp>
         <p:nvSpPr>
-          <p:cNvPr id="43" name="Rectangle 42"/>
+          <p:cNvPr id="45" name="Rectangle 44"/>
           <p:cNvSpPr/>
           <p:nvPr/>
         </p:nvSpPr>
@@ -11545,7 +11965,7 @@
       </p:sp>
       <p:sp>
         <p:nvSpPr>
-          <p:cNvPr id="44" name="TextBox 43"/>
+          <p:cNvPr id="46" name="TextBox 45"/>
           <p:cNvSpPr txBox="1"/>
           <p:nvPr/>
         </p:nvSpPr>
@@ -11587,20 +12007,20 @@
       </p:sp>
       <p:sp>
         <p:nvSpPr>
-          <p:cNvPr id="45" name="Rectangle 44"/>
+          <p:cNvPr id="47" name="Rectangle 46"/>
           <p:cNvSpPr/>
           <p:nvPr/>
         </p:nvSpPr>
         <p:spPr>
           <a:xfrm>
-            <a:off x="530352" y="6254496"/>
-            <a:ext cx="11130991" cy="12801"/>
-          </a:xfrm>
-          <a:prstGeom prst="rect">
-            <a:avLst/>
-          </a:prstGeom>
-          <a:solidFill>
-            <a:srgbClr val="D7E3E6"/>
+            <a:off x="0" y="6163056"/>
+            <a:ext cx="12191695" cy="694944"/>
+          </a:xfrm>
+          <a:prstGeom prst="rect">
+            <a:avLst/>
+          </a:prstGeom>
+          <a:solidFill>
+            <a:srgbClr val="0B4A5A"/>
           </a:solidFill>
           <a:ln>
             <a:noFill/>
@@ -11629,64 +12049,20 @@
       </p:sp>
       <p:sp>
         <p:nvSpPr>
-          <p:cNvPr id="46" name="TextBox 45"/>
-          <p:cNvSpPr txBox="1"/>
-          <p:nvPr/>
-        </p:nvSpPr>
-        <p:spPr>
-          <a:xfrm>
-            <a:off x="530352" y="6291072"/>
-            <a:ext cx="8595360" cy="256032"/>
-          </a:xfrm>
-          <a:prstGeom prst="rect">
-            <a:avLst/>
-          </a:prstGeom>
-          <a:noFill/>
-        </p:spPr>
-        <p:txBody>
-          <a:bodyPr wrap="square" lIns="0" rIns="0" tIns="0" bIns="0" anchor="t">
-            <a:noAutofit/>
-          </a:bodyPr>
-          <a:lstStyle/>
-          <a:p>
-            <a:pPr algn="l">
-              <a:spcBef>
-                <a:spcPts val="0"/>
-              </a:spcBef>
-              <a:spcAft>
-                <a:spcPts val="0"/>
-              </a:spcAft>
-            </a:pPr>
-            <a:r>
-              <a:rPr sz="900" b="0" i="0" lang="id-ID">
-                <a:solidFill>
-                  <a:srgbClr val="5C757C"/>
-                </a:solidFill>
-                <a:latin typeface="Calibri"/>
-              </a:rPr>
-              <a:t>Lopes dkk., Sci Rep 2021;11:22405 · DOI 10.1038/s41598-021-01541-7 · CC BY 4.0</a:t>
-            </a:r>
-          </a:p>
-        </p:txBody>
-      </p:sp>
-      <p:sp>
-        <p:nvSpPr>
-          <p:cNvPr id="47" name="Rounded Rectangle 46"/>
+          <p:cNvPr id="48" name="Rectangle 47"/>
           <p:cNvSpPr/>
           <p:nvPr/>
         </p:nvSpPr>
         <p:spPr>
           <a:xfrm>
-            <a:off x="11259007" y="6227064"/>
-            <a:ext cx="402336" cy="256032"/>
-          </a:xfrm>
-          <a:prstGeom prst="roundRect">
-            <a:avLst>
-              <a:gd name="adj" fmla="val 17857"/>
-            </a:avLst>
-          </a:prstGeom>
-          <a:solidFill>
-            <a:srgbClr val="0B4A5A"/>
+            <a:off x="0" y="6163056"/>
+            <a:ext cx="12191695" cy="41148"/>
+          </a:xfrm>
+          <a:prstGeom prst="rect">
+            <a:avLst/>
+          </a:prstGeom>
+          <a:solidFill>
+            <a:srgbClr val="D98A2B"/>
           </a:solidFill>
           <a:ln>
             <a:noFill/>
@@ -11715,14 +12091,14 @@
       </p:sp>
       <p:sp>
         <p:nvSpPr>
-          <p:cNvPr id="48" name="TextBox 47"/>
+          <p:cNvPr id="49" name="TextBox 48"/>
           <p:cNvSpPr txBox="1"/>
           <p:nvPr/>
         </p:nvSpPr>
         <p:spPr>
           <a:xfrm>
-            <a:off x="11259007" y="6286500"/>
-            <a:ext cx="402336" cy="182880"/>
+            <a:off x="530352" y="6327648"/>
+            <a:ext cx="8595360" cy="256032"/>
           </a:xfrm>
           <a:prstGeom prst="rect">
             <a:avLst/>
@@ -11735,6 +12111,92 @@
           </a:bodyPr>
           <a:lstStyle/>
           <a:p>
+            <a:pPr algn="l">
+              <a:spcBef>
+                <a:spcPts val="0"/>
+              </a:spcBef>
+              <a:spcAft>
+                <a:spcPts val="0"/>
+              </a:spcAft>
+            </a:pPr>
+            <a:r>
+              <a:rPr sz="850" b="0" i="0" lang="id-ID">
+                <a:solidFill>
+                  <a:srgbClr val="9FC7CF"/>
+                </a:solidFill>
+                <a:latin typeface="Calibri"/>
+              </a:rPr>
+              <a:t>Lopes dkk., Sci Rep 2021;11:22405 · DOI 10.1038/s41598-021-01541-7 · CC BY 4.0</a:t>
+            </a:r>
+          </a:p>
+        </p:txBody>
+      </p:sp>
+      <p:sp>
+        <p:nvSpPr>
+          <p:cNvPr id="50" name="Rounded Rectangle 49"/>
+          <p:cNvSpPr/>
+          <p:nvPr/>
+        </p:nvSpPr>
+        <p:spPr>
+          <a:xfrm>
+            <a:off x="11204143" y="6291072"/>
+            <a:ext cx="457200" cy="256032"/>
+          </a:xfrm>
+          <a:prstGeom prst="roundRect">
+            <a:avLst>
+              <a:gd name="adj" fmla="val 17857"/>
+            </a:avLst>
+          </a:prstGeom>
+          <a:solidFill>
+            <a:srgbClr val="E8F4F6"/>
+          </a:solidFill>
+          <a:ln>
+            <a:noFill/>
+          </a:ln>
+          <a:effectLst/>
+        </p:spPr>
+        <p:style>
+          <a:lnRef idx="1">
+            <a:schemeClr val="accent1"/>
+          </a:lnRef>
+          <a:fillRef idx="3">
+            <a:schemeClr val="accent1"/>
+          </a:fillRef>
+          <a:effectRef idx="2">
+            <a:schemeClr val="accent1"/>
+          </a:effectRef>
+          <a:fontRef idx="minor">
+            <a:schemeClr val="lt1"/>
+          </a:fontRef>
+        </p:style>
+        <p:txBody>
+          <a:bodyPr rtlCol="0" anchor="ctr"/>
+          <a:lstStyle/>
+          <a:p/>
+        </p:txBody>
+      </p:sp>
+      <p:sp>
+        <p:nvSpPr>
+          <p:cNvPr id="51" name="TextBox 50"/>
+          <p:cNvSpPr txBox="1"/>
+          <p:nvPr/>
+        </p:nvSpPr>
+        <p:spPr>
+          <a:xfrm>
+            <a:off x="11204143" y="6332220"/>
+            <a:ext cx="457200" cy="182880"/>
+          </a:xfrm>
+          <a:prstGeom prst="rect">
+            <a:avLst/>
+          </a:prstGeom>
+          <a:noFill/>
+        </p:spPr>
+        <p:txBody>
+          <a:bodyPr wrap="square" lIns="0" rIns="0" tIns="0" bIns="0" anchor="t">
+            <a:noAutofit/>
+          </a:bodyPr>
+          <a:lstStyle/>
+          <a:p>
             <a:pPr algn="ctr">
               <a:spcBef>
                 <a:spcPts val="0"/>
@@ -11746,7 +12208,7 @@
             <a:r>
               <a:rPr sz="950" b="1" i="0" lang="id-ID">
                 <a:solidFill>
-                  <a:srgbClr val="FFFFFF"/>
+                  <a:srgbClr val="0B4A5A"/>
                 </a:solidFill>
                 <a:latin typeface="Calibri"/>
               </a:rPr>
@@ -11787,17 +12249,9 @@
           <a:prstGeom prst="rect">
             <a:avLst/>
           </a:prstGeom>
-          <a:gradFill rotWithShape="1">
-            <a:gsLst>
-              <a:gs pos="0">
-                <a:srgbClr val="F9F7F3"/>
-              </a:gs>
-              <a:gs pos="100000">
-                <a:srgbClr val="E6EFF2"/>
-              </a:gs>
-            </a:gsLst>
-            <a:lin scaled="0" ang="19200000"/>
-          </a:gradFill>
+          <a:solidFill>
+            <a:srgbClr val="EDE8DA"/>
+          </a:solidFill>
           <a:ln>
             <a:noFill/>
           </a:ln>
@@ -11831,14 +12285,14 @@
         </p:nvSpPr>
         <p:spPr>
           <a:xfrm>
-            <a:off x="9098280" y="-2240280"/>
-            <a:ext cx="4480560" cy="4480560"/>
+            <a:off x="8732520" y="3520440"/>
+            <a:ext cx="5760720" cy="5760720"/>
           </a:xfrm>
           <a:prstGeom prst="ellipse">
             <a:avLst/>
           </a:prstGeom>
           <a:solidFill>
-            <a:srgbClr val="E4EFF1"/>
+            <a:srgbClr val="DEE0D5"/>
           </a:solidFill>
           <a:ln>
             <a:noFill/>
@@ -11867,20 +12321,20 @@
       </p:sp>
       <p:sp>
         <p:nvSpPr>
-          <p:cNvPr id="4" name="Oval 3"/>
+          <p:cNvPr id="4" name="Rectangle 3"/>
           <p:cNvSpPr/>
           <p:nvPr/>
         </p:nvSpPr>
         <p:spPr>
           <a:xfrm>
-            <a:off x="-1600200" y="4160520"/>
-            <a:ext cx="3931920" cy="3931920"/>
-          </a:xfrm>
-          <a:prstGeom prst="ellipse">
-            <a:avLst/>
-          </a:prstGeom>
-          <a:solidFill>
-            <a:srgbClr val="EAF3F4"/>
+            <a:off x="3309213" y="1417320"/>
+            <a:ext cx="7315" cy="4663440"/>
+          </a:xfrm>
+          <a:prstGeom prst="rect">
+            <a:avLst/>
+          </a:prstGeom>
+          <a:solidFill>
+            <a:srgbClr val="C7DCE1"/>
           </a:solidFill>
           <a:ln>
             <a:noFill/>
@@ -11915,16 +12369,14 @@
         </p:nvSpPr>
         <p:spPr>
           <a:xfrm>
-            <a:off x="0" y="6455664"/>
-            <a:ext cx="12191695" cy="402336"/>
-          </a:xfrm>
-          <a:prstGeom prst="rect">
-            <a:avLst/>
-          </a:prstGeom>
-          <a:solidFill>
-            <a:srgbClr val="DCE7EA">
-              <a:alpha val="85000"/>
-            </a:srgbClr>
+            <a:off x="6092647" y="1417320"/>
+            <a:ext cx="7315" cy="4663440"/>
+          </a:xfrm>
+          <a:prstGeom prst="rect">
+            <a:avLst/>
+          </a:prstGeom>
+          <a:solidFill>
+            <a:srgbClr val="C7DCE1"/>
           </a:solidFill>
           <a:ln>
             <a:noFill/>
@@ -11954,6 +12406,90 @@
       <p:sp>
         <p:nvSpPr>
           <p:cNvPr id="6" name="Rectangle 5"/>
+          <p:cNvSpPr/>
+          <p:nvPr/>
+        </p:nvSpPr>
+        <p:spPr>
+          <a:xfrm>
+            <a:off x="8875166" y="1417320"/>
+            <a:ext cx="7315" cy="4663440"/>
+          </a:xfrm>
+          <a:prstGeom prst="rect">
+            <a:avLst/>
+          </a:prstGeom>
+          <a:solidFill>
+            <a:srgbClr val="C7DCE1"/>
+          </a:solidFill>
+          <a:ln>
+            <a:noFill/>
+          </a:ln>
+          <a:effectLst/>
+        </p:spPr>
+        <p:style>
+          <a:lnRef idx="1">
+            <a:schemeClr val="accent1"/>
+          </a:lnRef>
+          <a:fillRef idx="3">
+            <a:schemeClr val="accent1"/>
+          </a:fillRef>
+          <a:effectRef idx="2">
+            <a:schemeClr val="accent1"/>
+          </a:effectRef>
+          <a:fontRef idx="minor">
+            <a:schemeClr val="lt1"/>
+          </a:fontRef>
+        </p:style>
+        <p:txBody>
+          <a:bodyPr rtlCol="0" anchor="ctr"/>
+          <a:lstStyle/>
+          <a:p/>
+        </p:txBody>
+      </p:sp>
+      <p:sp>
+        <p:nvSpPr>
+          <p:cNvPr id="7" name="Rectangle 6"/>
+          <p:cNvSpPr/>
+          <p:nvPr/>
+        </p:nvSpPr>
+        <p:spPr>
+          <a:xfrm>
+            <a:off x="0" y="0"/>
+            <a:ext cx="201168" cy="6858000"/>
+          </a:xfrm>
+          <a:prstGeom prst="rect">
+            <a:avLst/>
+          </a:prstGeom>
+          <a:solidFill>
+            <a:srgbClr val="0B4A5A"/>
+          </a:solidFill>
+          <a:ln>
+            <a:noFill/>
+          </a:ln>
+          <a:effectLst/>
+        </p:spPr>
+        <p:style>
+          <a:lnRef idx="1">
+            <a:schemeClr val="accent1"/>
+          </a:lnRef>
+          <a:fillRef idx="3">
+            <a:schemeClr val="accent1"/>
+          </a:fillRef>
+          <a:effectRef idx="2">
+            <a:schemeClr val="accent1"/>
+          </a:effectRef>
+          <a:fontRef idx="minor">
+            <a:schemeClr val="lt1"/>
+          </a:fontRef>
+        </p:style>
+        <p:txBody>
+          <a:bodyPr rtlCol="0" anchor="ctr"/>
+          <a:lstStyle/>
+          <a:p/>
+        </p:txBody>
+      </p:sp>
+      <p:sp>
+        <p:nvSpPr>
+          <p:cNvPr id="8" name="Rectangle 7"/>
           <p:cNvSpPr/>
           <p:nvPr/>
         </p:nvSpPr>
@@ -12003,20 +12539,20 @@
       </p:sp>
       <p:sp>
         <p:nvSpPr>
-          <p:cNvPr id="7" name="Rectangle 6"/>
+          <p:cNvPr id="9" name="Rectangle 8"/>
           <p:cNvSpPr/>
           <p:nvPr/>
         </p:nvSpPr>
         <p:spPr>
           <a:xfrm>
             <a:off x="0" y="1171346"/>
-            <a:ext cx="12191695" cy="45720"/>
-          </a:xfrm>
-          <a:prstGeom prst="rect">
-            <a:avLst/>
-          </a:prstGeom>
-          <a:solidFill>
-            <a:srgbClr val="14A0B4"/>
+            <a:ext cx="12191695" cy="64008"/>
+          </a:xfrm>
+          <a:prstGeom prst="rect">
+            <a:avLst/>
+          </a:prstGeom>
+          <a:solidFill>
+            <a:srgbClr val="D98A2B"/>
           </a:solidFill>
           <a:ln>
             <a:noFill/>
@@ -12045,7 +12581,7 @@
       </p:sp>
       <p:sp>
         <p:nvSpPr>
-          <p:cNvPr id="8" name="TextBox 7"/>
+          <p:cNvPr id="10" name="TextBox 9"/>
           <p:cNvSpPr txBox="1"/>
           <p:nvPr/>
         </p:nvSpPr>
@@ -12080,14 +12616,14 @@
                 </a:solidFill>
                 <a:latin typeface="Calibri"/>
               </a:rPr>
-              <a:t>IMPLIKASI</a:t>
-            </a:r>
-          </a:p>
-        </p:txBody>
-      </p:sp>
-      <p:sp>
-        <p:nvSpPr>
-          <p:cNvPr id="9" name="TextBox 8"/>
+              <a:t>14  ·  IMPLIKASI</a:t>
+            </a:r>
+          </a:p>
+        </p:txBody>
+      </p:sp>
+      <p:sp>
+        <p:nvSpPr>
+          <p:cNvPr id="11" name="TextBox 10"/>
           <p:cNvSpPr txBox="1"/>
           <p:nvPr/>
         </p:nvSpPr>
@@ -12129,7 +12665,7 @@
       </p:sp>
       <p:sp>
         <p:nvSpPr>
-          <p:cNvPr id="10" name="Rounded Rectangle 9"/>
+          <p:cNvPr id="12" name="Rounded Rectangle 11"/>
           <p:cNvSpPr/>
           <p:nvPr/>
         </p:nvSpPr>
@@ -12175,7 +12711,7 @@
       </p:sp>
       <p:sp>
         <p:nvSpPr>
-          <p:cNvPr id="11" name="Rectangle 10"/>
+          <p:cNvPr id="13" name="Rectangle 12"/>
           <p:cNvSpPr/>
           <p:nvPr/>
         </p:nvSpPr>
@@ -12217,7 +12753,7 @@
       </p:sp>
       <p:sp>
         <p:nvSpPr>
-          <p:cNvPr id="12" name="TextBox 11"/>
+          <p:cNvPr id="14" name="TextBox 13"/>
           <p:cNvSpPr txBox="1"/>
           <p:nvPr/>
         </p:nvSpPr>
@@ -12259,7 +12795,7 @@
       </p:sp>
       <p:sp>
         <p:nvSpPr>
-          <p:cNvPr id="13" name="Rounded Rectangle 12"/>
+          <p:cNvPr id="15" name="Rounded Rectangle 14"/>
           <p:cNvSpPr/>
           <p:nvPr/>
         </p:nvSpPr>
@@ -12303,7 +12839,7 @@
       </p:sp>
       <p:sp>
         <p:nvSpPr>
-          <p:cNvPr id="14" name="Rounded Rectangle 13"/>
+          <p:cNvPr id="16" name="Rounded Rectangle 15"/>
           <p:cNvSpPr/>
           <p:nvPr/>
         </p:nvSpPr>
@@ -12347,7 +12883,7 @@
       </p:sp>
       <p:sp>
         <p:nvSpPr>
-          <p:cNvPr id="15" name="TextBox 14"/>
+          <p:cNvPr id="17" name="TextBox 16"/>
           <p:cNvSpPr txBox="1"/>
           <p:nvPr/>
         </p:nvSpPr>
@@ -12389,7 +12925,7 @@
       </p:sp>
       <p:sp>
         <p:nvSpPr>
-          <p:cNvPr id="16" name="TextBox 15"/>
+          <p:cNvPr id="18" name="TextBox 17"/>
           <p:cNvSpPr txBox="1"/>
           <p:nvPr/>
         </p:nvSpPr>
@@ -12431,7 +12967,7 @@
       </p:sp>
       <p:sp>
         <p:nvSpPr>
-          <p:cNvPr id="17" name="TextBox 16"/>
+          <p:cNvPr id="19" name="TextBox 18"/>
           <p:cNvSpPr txBox="1"/>
           <p:nvPr/>
         </p:nvSpPr>
@@ -12473,7 +13009,7 @@
       </p:sp>
       <p:sp>
         <p:nvSpPr>
-          <p:cNvPr id="18" name="Rounded Rectangle 17"/>
+          <p:cNvPr id="20" name="Rounded Rectangle 19"/>
           <p:cNvSpPr/>
           <p:nvPr/>
         </p:nvSpPr>
@@ -12517,7 +13053,7 @@
       </p:sp>
       <p:sp>
         <p:nvSpPr>
-          <p:cNvPr id="19" name="Rounded Rectangle 18"/>
+          <p:cNvPr id="21" name="Rounded Rectangle 20"/>
           <p:cNvSpPr/>
           <p:nvPr/>
         </p:nvSpPr>
@@ -12561,7 +13097,7 @@
       </p:sp>
       <p:sp>
         <p:nvSpPr>
-          <p:cNvPr id="20" name="TextBox 19"/>
+          <p:cNvPr id="22" name="TextBox 21"/>
           <p:cNvSpPr txBox="1"/>
           <p:nvPr/>
         </p:nvSpPr>
@@ -12603,7 +13139,7 @@
       </p:sp>
       <p:sp>
         <p:nvSpPr>
-          <p:cNvPr id="21" name="TextBox 20"/>
+          <p:cNvPr id="23" name="TextBox 22"/>
           <p:cNvSpPr txBox="1"/>
           <p:nvPr/>
         </p:nvSpPr>
@@ -12645,7 +13181,7 @@
       </p:sp>
       <p:sp>
         <p:nvSpPr>
-          <p:cNvPr id="22" name="TextBox 21"/>
+          <p:cNvPr id="24" name="TextBox 23"/>
           <p:cNvSpPr txBox="1"/>
           <p:nvPr/>
         </p:nvSpPr>
@@ -12687,7 +13223,7 @@
       </p:sp>
       <p:sp>
         <p:nvSpPr>
-          <p:cNvPr id="23" name="Rounded Rectangle 22"/>
+          <p:cNvPr id="25" name="Rounded Rectangle 24"/>
           <p:cNvSpPr/>
           <p:nvPr/>
         </p:nvSpPr>
@@ -12731,7 +13267,7 @@
       </p:sp>
       <p:sp>
         <p:nvSpPr>
-          <p:cNvPr id="24" name="Rounded Rectangle 23"/>
+          <p:cNvPr id="26" name="Rounded Rectangle 25"/>
           <p:cNvSpPr/>
           <p:nvPr/>
         </p:nvSpPr>
@@ -12775,7 +13311,7 @@
       </p:sp>
       <p:sp>
         <p:nvSpPr>
-          <p:cNvPr id="25" name="TextBox 24"/>
+          <p:cNvPr id="27" name="TextBox 26"/>
           <p:cNvSpPr txBox="1"/>
           <p:nvPr/>
         </p:nvSpPr>
@@ -12817,7 +13353,7 @@
       </p:sp>
       <p:sp>
         <p:nvSpPr>
-          <p:cNvPr id="26" name="TextBox 25"/>
+          <p:cNvPr id="28" name="TextBox 27"/>
           <p:cNvSpPr txBox="1"/>
           <p:nvPr/>
         </p:nvSpPr>
@@ -12859,7 +13395,7 @@
       </p:sp>
       <p:sp>
         <p:nvSpPr>
-          <p:cNvPr id="27" name="TextBox 26"/>
+          <p:cNvPr id="29" name="TextBox 28"/>
           <p:cNvSpPr txBox="1"/>
           <p:nvPr/>
         </p:nvSpPr>
@@ -12901,7 +13437,7 @@
       </p:sp>
       <p:sp>
         <p:nvSpPr>
-          <p:cNvPr id="28" name="Rounded Rectangle 27"/>
+          <p:cNvPr id="30" name="Rounded Rectangle 29"/>
           <p:cNvSpPr/>
           <p:nvPr/>
         </p:nvSpPr>
@@ -12945,7 +13481,7 @@
       </p:sp>
       <p:sp>
         <p:nvSpPr>
-          <p:cNvPr id="29" name="Rounded Rectangle 28"/>
+          <p:cNvPr id="31" name="Rounded Rectangle 30"/>
           <p:cNvSpPr/>
           <p:nvPr/>
         </p:nvSpPr>
@@ -12989,7 +13525,7 @@
       </p:sp>
       <p:sp>
         <p:nvSpPr>
-          <p:cNvPr id="30" name="TextBox 29"/>
+          <p:cNvPr id="32" name="TextBox 31"/>
           <p:cNvSpPr txBox="1"/>
           <p:nvPr/>
         </p:nvSpPr>
@@ -13031,7 +13567,7 @@
       </p:sp>
       <p:sp>
         <p:nvSpPr>
-          <p:cNvPr id="31" name="TextBox 30"/>
+          <p:cNvPr id="33" name="TextBox 32"/>
           <p:cNvSpPr txBox="1"/>
           <p:nvPr/>
         </p:nvSpPr>
@@ -13073,7 +13609,7 @@
       </p:sp>
       <p:sp>
         <p:nvSpPr>
-          <p:cNvPr id="32" name="TextBox 31"/>
+          <p:cNvPr id="34" name="TextBox 33"/>
           <p:cNvSpPr txBox="1"/>
           <p:nvPr/>
         </p:nvSpPr>
@@ -13115,7 +13651,7 @@
       </p:sp>
       <p:sp>
         <p:nvSpPr>
-          <p:cNvPr id="33" name="Rounded Rectangle 32"/>
+          <p:cNvPr id="35" name="Rounded Rectangle 34"/>
           <p:cNvSpPr/>
           <p:nvPr/>
         </p:nvSpPr>
@@ -13159,7 +13695,7 @@
       </p:sp>
       <p:sp>
         <p:nvSpPr>
-          <p:cNvPr id="34" name="TextBox 33"/>
+          <p:cNvPr id="36" name="TextBox 35"/>
           <p:cNvSpPr txBox="1"/>
           <p:nvPr/>
         </p:nvSpPr>
@@ -13201,7 +13737,7 @@
       </p:sp>
       <p:sp>
         <p:nvSpPr>
-          <p:cNvPr id="35" name="TextBox 34"/>
+          <p:cNvPr id="37" name="TextBox 36"/>
           <p:cNvSpPr txBox="1"/>
           <p:nvPr/>
         </p:nvSpPr>
@@ -13246,20 +13782,20 @@
       </p:sp>
       <p:sp>
         <p:nvSpPr>
-          <p:cNvPr id="36" name="Rectangle 35"/>
+          <p:cNvPr id="38" name="Rectangle 37"/>
           <p:cNvSpPr/>
           <p:nvPr/>
         </p:nvSpPr>
         <p:spPr>
           <a:xfrm>
-            <a:off x="530352" y="6254496"/>
-            <a:ext cx="11130991" cy="12801"/>
-          </a:xfrm>
-          <a:prstGeom prst="rect">
-            <a:avLst/>
-          </a:prstGeom>
-          <a:solidFill>
-            <a:srgbClr val="D7E3E6"/>
+            <a:off x="0" y="6163056"/>
+            <a:ext cx="12191695" cy="694944"/>
+          </a:xfrm>
+          <a:prstGeom prst="rect">
+            <a:avLst/>
+          </a:prstGeom>
+          <a:solidFill>
+            <a:srgbClr val="0B4A5A"/>
           </a:solidFill>
           <a:ln>
             <a:noFill/>
@@ -13288,64 +13824,20 @@
       </p:sp>
       <p:sp>
         <p:nvSpPr>
-          <p:cNvPr id="37" name="TextBox 36"/>
-          <p:cNvSpPr txBox="1"/>
-          <p:nvPr/>
-        </p:nvSpPr>
-        <p:spPr>
-          <a:xfrm>
-            <a:off x="530352" y="6291072"/>
-            <a:ext cx="8595360" cy="256032"/>
-          </a:xfrm>
-          <a:prstGeom prst="rect">
-            <a:avLst/>
-          </a:prstGeom>
-          <a:noFill/>
-        </p:spPr>
-        <p:txBody>
-          <a:bodyPr wrap="square" lIns="0" rIns="0" tIns="0" bIns="0" anchor="t">
-            <a:noAutofit/>
-          </a:bodyPr>
-          <a:lstStyle/>
-          <a:p>
-            <a:pPr algn="l">
-              <a:spcBef>
-                <a:spcPts val="0"/>
-              </a:spcBef>
-              <a:spcAft>
-                <a:spcPts val="0"/>
-              </a:spcAft>
-            </a:pPr>
-            <a:r>
-              <a:rPr sz="900" b="0" i="0" lang="id-ID">
-                <a:solidFill>
-                  <a:srgbClr val="5C757C"/>
-                </a:solidFill>
-                <a:latin typeface="Calibri"/>
-              </a:rPr>
-              <a:t>Lopes dkk., Sci Rep 2021;11:22405 · DOI 10.1038/s41598-021-01541-7 · CC BY 4.0</a:t>
-            </a:r>
-          </a:p>
-        </p:txBody>
-      </p:sp>
-      <p:sp>
-        <p:nvSpPr>
-          <p:cNvPr id="38" name="Rounded Rectangle 37"/>
+          <p:cNvPr id="39" name="Rectangle 38"/>
           <p:cNvSpPr/>
           <p:nvPr/>
         </p:nvSpPr>
         <p:spPr>
           <a:xfrm>
-            <a:off x="11259007" y="6227064"/>
-            <a:ext cx="402336" cy="256032"/>
-          </a:xfrm>
-          <a:prstGeom prst="roundRect">
-            <a:avLst>
-              <a:gd name="adj" fmla="val 17857"/>
-            </a:avLst>
-          </a:prstGeom>
-          <a:solidFill>
-            <a:srgbClr val="0B4A5A"/>
+            <a:off x="0" y="6163056"/>
+            <a:ext cx="12191695" cy="41148"/>
+          </a:xfrm>
+          <a:prstGeom prst="rect">
+            <a:avLst/>
+          </a:prstGeom>
+          <a:solidFill>
+            <a:srgbClr val="D98A2B"/>
           </a:solidFill>
           <a:ln>
             <a:noFill/>
@@ -13374,14 +13866,14 @@
       </p:sp>
       <p:sp>
         <p:nvSpPr>
-          <p:cNvPr id="39" name="TextBox 38"/>
+          <p:cNvPr id="40" name="TextBox 39"/>
           <p:cNvSpPr txBox="1"/>
           <p:nvPr/>
         </p:nvSpPr>
         <p:spPr>
           <a:xfrm>
-            <a:off x="11259007" y="6286500"/>
-            <a:ext cx="402336" cy="182880"/>
+            <a:off x="530352" y="6327648"/>
+            <a:ext cx="8595360" cy="256032"/>
           </a:xfrm>
           <a:prstGeom prst="rect">
             <a:avLst/>
@@ -13394,6 +13886,92 @@
           </a:bodyPr>
           <a:lstStyle/>
           <a:p>
+            <a:pPr algn="l">
+              <a:spcBef>
+                <a:spcPts val="0"/>
+              </a:spcBef>
+              <a:spcAft>
+                <a:spcPts val="0"/>
+              </a:spcAft>
+            </a:pPr>
+            <a:r>
+              <a:rPr sz="850" b="0" i="0" lang="id-ID">
+                <a:solidFill>
+                  <a:srgbClr val="9FC7CF"/>
+                </a:solidFill>
+                <a:latin typeface="Calibri"/>
+              </a:rPr>
+              <a:t>Lopes dkk., Sci Rep 2021;11:22405 · DOI 10.1038/s41598-021-01541-7 · CC BY 4.0</a:t>
+            </a:r>
+          </a:p>
+        </p:txBody>
+      </p:sp>
+      <p:sp>
+        <p:nvSpPr>
+          <p:cNvPr id="41" name="Rounded Rectangle 40"/>
+          <p:cNvSpPr/>
+          <p:nvPr/>
+        </p:nvSpPr>
+        <p:spPr>
+          <a:xfrm>
+            <a:off x="11204143" y="6291072"/>
+            <a:ext cx="457200" cy="256032"/>
+          </a:xfrm>
+          <a:prstGeom prst="roundRect">
+            <a:avLst>
+              <a:gd name="adj" fmla="val 17857"/>
+            </a:avLst>
+          </a:prstGeom>
+          <a:solidFill>
+            <a:srgbClr val="E8F4F6"/>
+          </a:solidFill>
+          <a:ln>
+            <a:noFill/>
+          </a:ln>
+          <a:effectLst/>
+        </p:spPr>
+        <p:style>
+          <a:lnRef idx="1">
+            <a:schemeClr val="accent1"/>
+          </a:lnRef>
+          <a:fillRef idx="3">
+            <a:schemeClr val="accent1"/>
+          </a:fillRef>
+          <a:effectRef idx="2">
+            <a:schemeClr val="accent1"/>
+          </a:effectRef>
+          <a:fontRef idx="minor">
+            <a:schemeClr val="lt1"/>
+          </a:fontRef>
+        </p:style>
+        <p:txBody>
+          <a:bodyPr rtlCol="0" anchor="ctr"/>
+          <a:lstStyle/>
+          <a:p/>
+        </p:txBody>
+      </p:sp>
+      <p:sp>
+        <p:nvSpPr>
+          <p:cNvPr id="42" name="TextBox 41"/>
+          <p:cNvSpPr txBox="1"/>
+          <p:nvPr/>
+        </p:nvSpPr>
+        <p:spPr>
+          <a:xfrm>
+            <a:off x="11204143" y="6332220"/>
+            <a:ext cx="457200" cy="182880"/>
+          </a:xfrm>
+          <a:prstGeom prst="rect">
+            <a:avLst/>
+          </a:prstGeom>
+          <a:noFill/>
+        </p:spPr>
+        <p:txBody>
+          <a:bodyPr wrap="square" lIns="0" rIns="0" tIns="0" bIns="0" anchor="t">
+            <a:noAutofit/>
+          </a:bodyPr>
+          <a:lstStyle/>
+          <a:p>
             <a:pPr algn="ctr">
               <a:spcBef>
                 <a:spcPts val="0"/>
@@ -13405,7 +13983,7 @@
             <a:r>
               <a:rPr sz="950" b="1" i="0" lang="id-ID">
                 <a:solidFill>
-                  <a:srgbClr val="FFFFFF"/>
+                  <a:srgbClr val="0B4A5A"/>
                 </a:solidFill>
                 <a:latin typeface="Calibri"/>
               </a:rPr>
@@ -13446,17 +14024,9 @@
           <a:prstGeom prst="rect">
             <a:avLst/>
           </a:prstGeom>
-          <a:gradFill rotWithShape="1">
-            <a:gsLst>
-              <a:gs pos="0">
-                <a:srgbClr val="F9F7F3"/>
-              </a:gs>
-              <a:gs pos="100000">
-                <a:srgbClr val="E6EFF2"/>
-              </a:gs>
-            </a:gsLst>
-            <a:lin scaled="0" ang="19200000"/>
-          </a:gradFill>
+          <a:solidFill>
+            <a:srgbClr val="DCEAEF"/>
+          </a:solidFill>
           <a:ln>
             <a:noFill/>
           </a:ln>
@@ -13490,14 +14060,14 @@
         </p:nvSpPr>
         <p:spPr>
           <a:xfrm>
-            <a:off x="9098280" y="-2240280"/>
-            <a:ext cx="4480560" cy="4480560"/>
+            <a:off x="8732520" y="3520440"/>
+            <a:ext cx="5760720" cy="5760720"/>
           </a:xfrm>
           <a:prstGeom prst="ellipse">
             <a:avLst/>
           </a:prstGeom>
           <a:solidFill>
-            <a:srgbClr val="E4EFF1"/>
+            <a:srgbClr val="D0E1E7"/>
           </a:solidFill>
           <a:ln>
             <a:noFill/>
@@ -13526,20 +14096,20 @@
       </p:sp>
       <p:sp>
         <p:nvSpPr>
-          <p:cNvPr id="4" name="Oval 3"/>
+          <p:cNvPr id="4" name="Rectangle 3"/>
           <p:cNvSpPr/>
           <p:nvPr/>
         </p:nvSpPr>
         <p:spPr>
           <a:xfrm>
-            <a:off x="-1600200" y="4160520"/>
-            <a:ext cx="3931920" cy="3931920"/>
-          </a:xfrm>
-          <a:prstGeom prst="ellipse">
-            <a:avLst/>
-          </a:prstGeom>
-          <a:solidFill>
-            <a:srgbClr val="EAF3F4"/>
+            <a:off x="3309213" y="1417320"/>
+            <a:ext cx="7315" cy="4663440"/>
+          </a:xfrm>
+          <a:prstGeom prst="rect">
+            <a:avLst/>
+          </a:prstGeom>
+          <a:solidFill>
+            <a:srgbClr val="C7DCE1"/>
           </a:solidFill>
           <a:ln>
             <a:noFill/>
@@ -13574,16 +14144,14 @@
         </p:nvSpPr>
         <p:spPr>
           <a:xfrm>
-            <a:off x="0" y="6455664"/>
-            <a:ext cx="12191695" cy="402336"/>
-          </a:xfrm>
-          <a:prstGeom prst="rect">
-            <a:avLst/>
-          </a:prstGeom>
-          <a:solidFill>
-            <a:srgbClr val="DCE7EA">
-              <a:alpha val="85000"/>
-            </a:srgbClr>
+            <a:off x="6092647" y="1417320"/>
+            <a:ext cx="7315" cy="4663440"/>
+          </a:xfrm>
+          <a:prstGeom prst="rect">
+            <a:avLst/>
+          </a:prstGeom>
+          <a:solidFill>
+            <a:srgbClr val="C7DCE1"/>
           </a:solidFill>
           <a:ln>
             <a:noFill/>
@@ -13613,6 +14181,90 @@
       <p:sp>
         <p:nvSpPr>
           <p:cNvPr id="6" name="Rectangle 5"/>
+          <p:cNvSpPr/>
+          <p:nvPr/>
+        </p:nvSpPr>
+        <p:spPr>
+          <a:xfrm>
+            <a:off x="8875166" y="1417320"/>
+            <a:ext cx="7315" cy="4663440"/>
+          </a:xfrm>
+          <a:prstGeom prst="rect">
+            <a:avLst/>
+          </a:prstGeom>
+          <a:solidFill>
+            <a:srgbClr val="C7DCE1"/>
+          </a:solidFill>
+          <a:ln>
+            <a:noFill/>
+          </a:ln>
+          <a:effectLst/>
+        </p:spPr>
+        <p:style>
+          <a:lnRef idx="1">
+            <a:schemeClr val="accent1"/>
+          </a:lnRef>
+          <a:fillRef idx="3">
+            <a:schemeClr val="accent1"/>
+          </a:fillRef>
+          <a:effectRef idx="2">
+            <a:schemeClr val="accent1"/>
+          </a:effectRef>
+          <a:fontRef idx="minor">
+            <a:schemeClr val="lt1"/>
+          </a:fontRef>
+        </p:style>
+        <p:txBody>
+          <a:bodyPr rtlCol="0" anchor="ctr"/>
+          <a:lstStyle/>
+          <a:p/>
+        </p:txBody>
+      </p:sp>
+      <p:sp>
+        <p:nvSpPr>
+          <p:cNvPr id="7" name="Rectangle 6"/>
+          <p:cNvSpPr/>
+          <p:nvPr/>
+        </p:nvSpPr>
+        <p:spPr>
+          <a:xfrm>
+            <a:off x="0" y="0"/>
+            <a:ext cx="201168" cy="6858000"/>
+          </a:xfrm>
+          <a:prstGeom prst="rect">
+            <a:avLst/>
+          </a:prstGeom>
+          <a:solidFill>
+            <a:srgbClr val="0B4A5A"/>
+          </a:solidFill>
+          <a:ln>
+            <a:noFill/>
+          </a:ln>
+          <a:effectLst/>
+        </p:spPr>
+        <p:style>
+          <a:lnRef idx="1">
+            <a:schemeClr val="accent1"/>
+          </a:lnRef>
+          <a:fillRef idx="3">
+            <a:schemeClr val="accent1"/>
+          </a:fillRef>
+          <a:effectRef idx="2">
+            <a:schemeClr val="accent1"/>
+          </a:effectRef>
+          <a:fontRef idx="minor">
+            <a:schemeClr val="lt1"/>
+          </a:fontRef>
+        </p:style>
+        <p:txBody>
+          <a:bodyPr rtlCol="0" anchor="ctr"/>
+          <a:lstStyle/>
+          <a:p/>
+        </p:txBody>
+      </p:sp>
+      <p:sp>
+        <p:nvSpPr>
+          <p:cNvPr id="8" name="Rectangle 7"/>
           <p:cNvSpPr/>
           <p:nvPr/>
         </p:nvSpPr>
@@ -13662,20 +14314,20 @@
       </p:sp>
       <p:sp>
         <p:nvSpPr>
-          <p:cNvPr id="7" name="Rectangle 6"/>
+          <p:cNvPr id="9" name="Rectangle 8"/>
           <p:cNvSpPr/>
           <p:nvPr/>
         </p:nvSpPr>
         <p:spPr>
           <a:xfrm>
             <a:off x="0" y="1171346"/>
-            <a:ext cx="12191695" cy="45720"/>
-          </a:xfrm>
-          <a:prstGeom prst="rect">
-            <a:avLst/>
-          </a:prstGeom>
-          <a:solidFill>
-            <a:srgbClr val="14A0B4"/>
+            <a:ext cx="12191695" cy="64008"/>
+          </a:xfrm>
+          <a:prstGeom prst="rect">
+            <a:avLst/>
+          </a:prstGeom>
+          <a:solidFill>
+            <a:srgbClr val="D98A2B"/>
           </a:solidFill>
           <a:ln>
             <a:noFill/>
@@ -13704,7 +14356,7 @@
       </p:sp>
       <p:sp>
         <p:nvSpPr>
-          <p:cNvPr id="8" name="TextBox 7"/>
+          <p:cNvPr id="10" name="TextBox 9"/>
           <p:cNvSpPr txBox="1"/>
           <p:nvPr/>
         </p:nvSpPr>
@@ -13739,14 +14391,14 @@
                 </a:solidFill>
                 <a:latin typeface="Calibri"/>
               </a:rPr>
-              <a:t>KESIMPULAN</a:t>
-            </a:r>
-          </a:p>
-        </p:txBody>
-      </p:sp>
-      <p:sp>
-        <p:nvSpPr>
-          <p:cNvPr id="9" name="TextBox 8"/>
+              <a:t>15  ·  KESIMPULAN</a:t>
+            </a:r>
+          </a:p>
+        </p:txBody>
+      </p:sp>
+      <p:sp>
+        <p:nvSpPr>
+          <p:cNvPr id="11" name="TextBox 10"/>
           <p:cNvSpPr txBox="1"/>
           <p:nvPr/>
         </p:nvSpPr>
@@ -13788,7 +14440,7 @@
       </p:sp>
       <p:sp>
         <p:nvSpPr>
-          <p:cNvPr id="10" name="Rounded Rectangle 9"/>
+          <p:cNvPr id="12" name="Rounded Rectangle 11"/>
           <p:cNvSpPr/>
           <p:nvPr/>
         </p:nvSpPr>
@@ -13834,7 +14486,7 @@
       </p:sp>
       <p:sp>
         <p:nvSpPr>
-          <p:cNvPr id="11" name="Rectangle 10"/>
+          <p:cNvPr id="13" name="Rectangle 12"/>
           <p:cNvSpPr/>
           <p:nvPr/>
         </p:nvSpPr>
@@ -13876,7 +14528,7 @@
       </p:sp>
       <p:sp>
         <p:nvSpPr>
-          <p:cNvPr id="12" name="TextBox 11"/>
+          <p:cNvPr id="14" name="TextBox 13"/>
           <p:cNvSpPr txBox="1"/>
           <p:nvPr/>
         </p:nvSpPr>
@@ -13918,7 +14570,7 @@
       </p:sp>
       <p:sp>
         <p:nvSpPr>
-          <p:cNvPr id="13" name="Rounded Rectangle 12"/>
+          <p:cNvPr id="15" name="Rounded Rectangle 14"/>
           <p:cNvSpPr/>
           <p:nvPr/>
         </p:nvSpPr>
@@ -13962,7 +14614,7 @@
       </p:sp>
       <p:sp>
         <p:nvSpPr>
-          <p:cNvPr id="14" name="TextBox 13"/>
+          <p:cNvPr id="16" name="TextBox 15"/>
           <p:cNvSpPr txBox="1"/>
           <p:nvPr/>
         </p:nvSpPr>
@@ -14004,7 +14656,7 @@
       </p:sp>
       <p:sp>
         <p:nvSpPr>
-          <p:cNvPr id="15" name="TextBox 14"/>
+          <p:cNvPr id="17" name="TextBox 16"/>
           <p:cNvSpPr txBox="1"/>
           <p:nvPr/>
         </p:nvSpPr>
@@ -14046,7 +14698,7 @@
       </p:sp>
       <p:sp>
         <p:nvSpPr>
-          <p:cNvPr id="16" name="TextBox 15"/>
+          <p:cNvPr id="18" name="TextBox 17"/>
           <p:cNvSpPr txBox="1"/>
           <p:nvPr/>
         </p:nvSpPr>
@@ -14088,7 +14740,7 @@
       </p:sp>
       <p:sp>
         <p:nvSpPr>
-          <p:cNvPr id="17" name="Rounded Rectangle 16"/>
+          <p:cNvPr id="19" name="Rounded Rectangle 18"/>
           <p:cNvSpPr/>
           <p:nvPr/>
         </p:nvSpPr>
@@ -14132,7 +14784,7 @@
       </p:sp>
       <p:sp>
         <p:nvSpPr>
-          <p:cNvPr id="18" name="TextBox 17"/>
+          <p:cNvPr id="20" name="TextBox 19"/>
           <p:cNvSpPr txBox="1"/>
           <p:nvPr/>
         </p:nvSpPr>
@@ -14174,7 +14826,7 @@
       </p:sp>
       <p:sp>
         <p:nvSpPr>
-          <p:cNvPr id="19" name="TextBox 18"/>
+          <p:cNvPr id="21" name="TextBox 20"/>
           <p:cNvSpPr txBox="1"/>
           <p:nvPr/>
         </p:nvSpPr>
@@ -14216,7 +14868,7 @@
       </p:sp>
       <p:sp>
         <p:nvSpPr>
-          <p:cNvPr id="20" name="TextBox 19"/>
+          <p:cNvPr id="22" name="TextBox 21"/>
           <p:cNvSpPr txBox="1"/>
           <p:nvPr/>
         </p:nvSpPr>
@@ -14258,7 +14910,7 @@
       </p:sp>
       <p:sp>
         <p:nvSpPr>
-          <p:cNvPr id="21" name="Rounded Rectangle 20"/>
+          <p:cNvPr id="23" name="Rounded Rectangle 22"/>
           <p:cNvSpPr/>
           <p:nvPr/>
         </p:nvSpPr>
@@ -14302,7 +14954,7 @@
       </p:sp>
       <p:sp>
         <p:nvSpPr>
-          <p:cNvPr id="22" name="TextBox 21"/>
+          <p:cNvPr id="24" name="TextBox 23"/>
           <p:cNvSpPr txBox="1"/>
           <p:nvPr/>
         </p:nvSpPr>
@@ -14344,7 +14996,7 @@
       </p:sp>
       <p:sp>
         <p:nvSpPr>
-          <p:cNvPr id="23" name="TextBox 22"/>
+          <p:cNvPr id="25" name="TextBox 24"/>
           <p:cNvSpPr txBox="1"/>
           <p:nvPr/>
         </p:nvSpPr>
@@ -14386,7 +15038,7 @@
       </p:sp>
       <p:sp>
         <p:nvSpPr>
-          <p:cNvPr id="24" name="TextBox 23"/>
+          <p:cNvPr id="26" name="TextBox 25"/>
           <p:cNvSpPr txBox="1"/>
           <p:nvPr/>
         </p:nvSpPr>
@@ -14428,7 +15080,7 @@
       </p:sp>
       <p:sp>
         <p:nvSpPr>
-          <p:cNvPr id="25" name="Rounded Rectangle 24"/>
+          <p:cNvPr id="27" name="Rounded Rectangle 26"/>
           <p:cNvSpPr/>
           <p:nvPr/>
         </p:nvSpPr>
@@ -14472,7 +15124,7 @@
       </p:sp>
       <p:sp>
         <p:nvSpPr>
-          <p:cNvPr id="26" name="TextBox 25"/>
+          <p:cNvPr id="28" name="TextBox 27"/>
           <p:cNvSpPr txBox="1"/>
           <p:nvPr/>
         </p:nvSpPr>
@@ -14514,7 +15166,7 @@
       </p:sp>
       <p:sp>
         <p:nvSpPr>
-          <p:cNvPr id="27" name="TextBox 26"/>
+          <p:cNvPr id="29" name="TextBox 28"/>
           <p:cNvSpPr txBox="1"/>
           <p:nvPr/>
         </p:nvSpPr>
@@ -14556,7 +15208,7 @@
       </p:sp>
       <p:sp>
         <p:nvSpPr>
-          <p:cNvPr id="28" name="TextBox 27"/>
+          <p:cNvPr id="30" name="TextBox 29"/>
           <p:cNvSpPr txBox="1"/>
           <p:nvPr/>
         </p:nvSpPr>
@@ -14598,7 +15250,7 @@
       </p:sp>
       <p:sp>
         <p:nvSpPr>
-          <p:cNvPr id="29" name="TextBox 28"/>
+          <p:cNvPr id="31" name="TextBox 30"/>
           <p:cNvSpPr txBox="1"/>
           <p:nvPr/>
         </p:nvSpPr>
@@ -14640,7 +15292,7 @@
       </p:sp>
       <p:sp>
         <p:nvSpPr>
-          <p:cNvPr id="30" name="TextBox 29"/>
+          <p:cNvPr id="32" name="TextBox 31"/>
           <p:cNvSpPr txBox="1"/>
           <p:nvPr/>
         </p:nvSpPr>
@@ -14682,20 +15334,20 @@
       </p:sp>
       <p:sp>
         <p:nvSpPr>
-          <p:cNvPr id="31" name="Rectangle 30"/>
+          <p:cNvPr id="33" name="Rectangle 32"/>
           <p:cNvSpPr/>
           <p:nvPr/>
         </p:nvSpPr>
         <p:spPr>
           <a:xfrm>
-            <a:off x="530352" y="6254496"/>
-            <a:ext cx="11130991" cy="12801"/>
-          </a:xfrm>
-          <a:prstGeom prst="rect">
-            <a:avLst/>
-          </a:prstGeom>
-          <a:solidFill>
-            <a:srgbClr val="D7E3E6"/>
+            <a:off x="0" y="6163056"/>
+            <a:ext cx="12191695" cy="694944"/>
+          </a:xfrm>
+          <a:prstGeom prst="rect">
+            <a:avLst/>
+          </a:prstGeom>
+          <a:solidFill>
+            <a:srgbClr val="0B4A5A"/>
           </a:solidFill>
           <a:ln>
             <a:noFill/>
@@ -14724,64 +15376,20 @@
       </p:sp>
       <p:sp>
         <p:nvSpPr>
-          <p:cNvPr id="32" name="TextBox 31"/>
-          <p:cNvSpPr txBox="1"/>
-          <p:nvPr/>
-        </p:nvSpPr>
-        <p:spPr>
-          <a:xfrm>
-            <a:off x="530352" y="6291072"/>
-            <a:ext cx="8595360" cy="256032"/>
-          </a:xfrm>
-          <a:prstGeom prst="rect">
-            <a:avLst/>
-          </a:prstGeom>
-          <a:noFill/>
-        </p:spPr>
-        <p:txBody>
-          <a:bodyPr wrap="square" lIns="0" rIns="0" tIns="0" bIns="0" anchor="t">
-            <a:noAutofit/>
-          </a:bodyPr>
-          <a:lstStyle/>
-          <a:p>
-            <a:pPr algn="l">
-              <a:spcBef>
-                <a:spcPts val="0"/>
-              </a:spcBef>
-              <a:spcAft>
-                <a:spcPts val="0"/>
-              </a:spcAft>
-            </a:pPr>
-            <a:r>
-              <a:rPr sz="900" b="0" i="0" lang="id-ID">
-                <a:solidFill>
-                  <a:srgbClr val="5C757C"/>
-                </a:solidFill>
-                <a:latin typeface="Calibri"/>
-              </a:rPr>
-              <a:t>Lopes dkk., Sci Rep 2021;11:22405 · DOI 10.1038/s41598-021-01541-7 · CC BY 4.0</a:t>
-            </a:r>
-          </a:p>
-        </p:txBody>
-      </p:sp>
-      <p:sp>
-        <p:nvSpPr>
-          <p:cNvPr id="33" name="Rounded Rectangle 32"/>
+          <p:cNvPr id="34" name="Rectangle 33"/>
           <p:cNvSpPr/>
           <p:nvPr/>
         </p:nvSpPr>
         <p:spPr>
           <a:xfrm>
-            <a:off x="11259007" y="6227064"/>
-            <a:ext cx="402336" cy="256032"/>
-          </a:xfrm>
-          <a:prstGeom prst="roundRect">
-            <a:avLst>
-              <a:gd name="adj" fmla="val 17857"/>
-            </a:avLst>
-          </a:prstGeom>
-          <a:solidFill>
-            <a:srgbClr val="0B4A5A"/>
+            <a:off x="0" y="6163056"/>
+            <a:ext cx="12191695" cy="41148"/>
+          </a:xfrm>
+          <a:prstGeom prst="rect">
+            <a:avLst/>
+          </a:prstGeom>
+          <a:solidFill>
+            <a:srgbClr val="D98A2B"/>
           </a:solidFill>
           <a:ln>
             <a:noFill/>
@@ -14810,14 +15418,14 @@
       </p:sp>
       <p:sp>
         <p:nvSpPr>
-          <p:cNvPr id="34" name="TextBox 33"/>
+          <p:cNvPr id="35" name="TextBox 34"/>
           <p:cNvSpPr txBox="1"/>
           <p:nvPr/>
         </p:nvSpPr>
         <p:spPr>
           <a:xfrm>
-            <a:off x="11259007" y="6286500"/>
-            <a:ext cx="402336" cy="182880"/>
+            <a:off x="530352" y="6327648"/>
+            <a:ext cx="8595360" cy="256032"/>
           </a:xfrm>
           <a:prstGeom prst="rect">
             <a:avLst/>
@@ -14830,6 +15438,92 @@
           </a:bodyPr>
           <a:lstStyle/>
           <a:p>
+            <a:pPr algn="l">
+              <a:spcBef>
+                <a:spcPts val="0"/>
+              </a:spcBef>
+              <a:spcAft>
+                <a:spcPts val="0"/>
+              </a:spcAft>
+            </a:pPr>
+            <a:r>
+              <a:rPr sz="850" b="0" i="0" lang="id-ID">
+                <a:solidFill>
+                  <a:srgbClr val="9FC7CF"/>
+                </a:solidFill>
+                <a:latin typeface="Calibri"/>
+              </a:rPr>
+              <a:t>Lopes dkk., Sci Rep 2021;11:22405 · DOI 10.1038/s41598-021-01541-7 · CC BY 4.0</a:t>
+            </a:r>
+          </a:p>
+        </p:txBody>
+      </p:sp>
+      <p:sp>
+        <p:nvSpPr>
+          <p:cNvPr id="36" name="Rounded Rectangle 35"/>
+          <p:cNvSpPr/>
+          <p:nvPr/>
+        </p:nvSpPr>
+        <p:spPr>
+          <a:xfrm>
+            <a:off x="11204143" y="6291072"/>
+            <a:ext cx="457200" cy="256032"/>
+          </a:xfrm>
+          <a:prstGeom prst="roundRect">
+            <a:avLst>
+              <a:gd name="adj" fmla="val 17857"/>
+            </a:avLst>
+          </a:prstGeom>
+          <a:solidFill>
+            <a:srgbClr val="E8F4F6"/>
+          </a:solidFill>
+          <a:ln>
+            <a:noFill/>
+          </a:ln>
+          <a:effectLst/>
+        </p:spPr>
+        <p:style>
+          <a:lnRef idx="1">
+            <a:schemeClr val="accent1"/>
+          </a:lnRef>
+          <a:fillRef idx="3">
+            <a:schemeClr val="accent1"/>
+          </a:fillRef>
+          <a:effectRef idx="2">
+            <a:schemeClr val="accent1"/>
+          </a:effectRef>
+          <a:fontRef idx="minor">
+            <a:schemeClr val="lt1"/>
+          </a:fontRef>
+        </p:style>
+        <p:txBody>
+          <a:bodyPr rtlCol="0" anchor="ctr"/>
+          <a:lstStyle/>
+          <a:p/>
+        </p:txBody>
+      </p:sp>
+      <p:sp>
+        <p:nvSpPr>
+          <p:cNvPr id="37" name="TextBox 36"/>
+          <p:cNvSpPr txBox="1"/>
+          <p:nvPr/>
+        </p:nvSpPr>
+        <p:spPr>
+          <a:xfrm>
+            <a:off x="11204143" y="6332220"/>
+            <a:ext cx="457200" cy="182880"/>
+          </a:xfrm>
+          <a:prstGeom prst="rect">
+            <a:avLst/>
+          </a:prstGeom>
+          <a:noFill/>
+        </p:spPr>
+        <p:txBody>
+          <a:bodyPr wrap="square" lIns="0" rIns="0" tIns="0" bIns="0" anchor="t">
+            <a:noAutofit/>
+          </a:bodyPr>
+          <a:lstStyle/>
+          <a:p>
             <a:pPr algn="ctr">
               <a:spcBef>
                 <a:spcPts val="0"/>
@@ -14841,7 +15535,7 @@
             <a:r>
               <a:rPr sz="950" b="1" i="0" lang="id-ID">
                 <a:solidFill>
-                  <a:srgbClr val="FFFFFF"/>
+                  <a:srgbClr val="0B4A5A"/>
                 </a:solidFill>
                 <a:latin typeface="Calibri"/>
               </a:rPr>
@@ -14882,17 +15576,9 @@
           <a:prstGeom prst="rect">
             <a:avLst/>
           </a:prstGeom>
-          <a:gradFill rotWithShape="1">
-            <a:gsLst>
-              <a:gs pos="0">
-                <a:srgbClr val="F9F7F3"/>
-              </a:gs>
-              <a:gs pos="100000">
-                <a:srgbClr val="E6EFF2"/>
-              </a:gs>
-            </a:gsLst>
-            <a:lin scaled="0" ang="19200000"/>
-          </a:gradFill>
+          <a:solidFill>
+            <a:srgbClr val="DCEAEF"/>
+          </a:solidFill>
           <a:ln>
             <a:noFill/>
           </a:ln>
@@ -14926,14 +15612,14 @@
         </p:nvSpPr>
         <p:spPr>
           <a:xfrm>
-            <a:off x="9098280" y="-2240280"/>
-            <a:ext cx="4480560" cy="4480560"/>
+            <a:off x="8732520" y="3520440"/>
+            <a:ext cx="5760720" cy="5760720"/>
           </a:xfrm>
           <a:prstGeom prst="ellipse">
             <a:avLst/>
           </a:prstGeom>
           <a:solidFill>
-            <a:srgbClr val="E4EFF1"/>
+            <a:srgbClr val="D0E1E7"/>
           </a:solidFill>
           <a:ln>
             <a:noFill/>
@@ -14962,20 +15648,20 @@
       </p:sp>
       <p:sp>
         <p:nvSpPr>
-          <p:cNvPr id="4" name="Oval 3"/>
+          <p:cNvPr id="4" name="Rectangle 3"/>
           <p:cNvSpPr/>
           <p:nvPr/>
         </p:nvSpPr>
         <p:spPr>
           <a:xfrm>
-            <a:off x="-1600200" y="4160520"/>
-            <a:ext cx="3931920" cy="3931920"/>
-          </a:xfrm>
-          <a:prstGeom prst="ellipse">
-            <a:avLst/>
-          </a:prstGeom>
-          <a:solidFill>
-            <a:srgbClr val="EAF3F4"/>
+            <a:off x="3309213" y="1417320"/>
+            <a:ext cx="7315" cy="4663440"/>
+          </a:xfrm>
+          <a:prstGeom prst="rect">
+            <a:avLst/>
+          </a:prstGeom>
+          <a:solidFill>
+            <a:srgbClr val="C7DCE1"/>
           </a:solidFill>
           <a:ln>
             <a:noFill/>
@@ -15010,16 +15696,14 @@
         </p:nvSpPr>
         <p:spPr>
           <a:xfrm>
-            <a:off x="0" y="6455664"/>
-            <a:ext cx="12191695" cy="402336"/>
-          </a:xfrm>
-          <a:prstGeom prst="rect">
-            <a:avLst/>
-          </a:prstGeom>
-          <a:solidFill>
-            <a:srgbClr val="DCE7EA">
-              <a:alpha val="85000"/>
-            </a:srgbClr>
+            <a:off x="6092647" y="1417320"/>
+            <a:ext cx="7315" cy="4663440"/>
+          </a:xfrm>
+          <a:prstGeom prst="rect">
+            <a:avLst/>
+          </a:prstGeom>
+          <a:solidFill>
+            <a:srgbClr val="C7DCE1"/>
           </a:solidFill>
           <a:ln>
             <a:noFill/>
@@ -15049,6 +15733,90 @@
       <p:sp>
         <p:nvSpPr>
           <p:cNvPr id="6" name="Rectangle 5"/>
+          <p:cNvSpPr/>
+          <p:nvPr/>
+        </p:nvSpPr>
+        <p:spPr>
+          <a:xfrm>
+            <a:off x="8875166" y="1417320"/>
+            <a:ext cx="7315" cy="4663440"/>
+          </a:xfrm>
+          <a:prstGeom prst="rect">
+            <a:avLst/>
+          </a:prstGeom>
+          <a:solidFill>
+            <a:srgbClr val="C7DCE1"/>
+          </a:solidFill>
+          <a:ln>
+            <a:noFill/>
+          </a:ln>
+          <a:effectLst/>
+        </p:spPr>
+        <p:style>
+          <a:lnRef idx="1">
+            <a:schemeClr val="accent1"/>
+          </a:lnRef>
+          <a:fillRef idx="3">
+            <a:schemeClr val="accent1"/>
+          </a:fillRef>
+          <a:effectRef idx="2">
+            <a:schemeClr val="accent1"/>
+          </a:effectRef>
+          <a:fontRef idx="minor">
+            <a:schemeClr val="lt1"/>
+          </a:fontRef>
+        </p:style>
+        <p:txBody>
+          <a:bodyPr rtlCol="0" anchor="ctr"/>
+          <a:lstStyle/>
+          <a:p/>
+        </p:txBody>
+      </p:sp>
+      <p:sp>
+        <p:nvSpPr>
+          <p:cNvPr id="7" name="Rectangle 6"/>
+          <p:cNvSpPr/>
+          <p:nvPr/>
+        </p:nvSpPr>
+        <p:spPr>
+          <a:xfrm>
+            <a:off x="0" y="0"/>
+            <a:ext cx="201168" cy="6858000"/>
+          </a:xfrm>
+          <a:prstGeom prst="rect">
+            <a:avLst/>
+          </a:prstGeom>
+          <a:solidFill>
+            <a:srgbClr val="0B4A5A"/>
+          </a:solidFill>
+          <a:ln>
+            <a:noFill/>
+          </a:ln>
+          <a:effectLst/>
+        </p:spPr>
+        <p:style>
+          <a:lnRef idx="1">
+            <a:schemeClr val="accent1"/>
+          </a:lnRef>
+          <a:fillRef idx="3">
+            <a:schemeClr val="accent1"/>
+          </a:fillRef>
+          <a:effectRef idx="2">
+            <a:schemeClr val="accent1"/>
+          </a:effectRef>
+          <a:fontRef idx="minor">
+            <a:schemeClr val="lt1"/>
+          </a:fontRef>
+        </p:style>
+        <p:txBody>
+          <a:bodyPr rtlCol="0" anchor="ctr"/>
+          <a:lstStyle/>
+          <a:p/>
+        </p:txBody>
+      </p:sp>
+      <p:sp>
+        <p:nvSpPr>
+          <p:cNvPr id="8" name="Rectangle 7"/>
           <p:cNvSpPr/>
           <p:nvPr/>
         </p:nvSpPr>
@@ -15098,20 +15866,20 @@
       </p:sp>
       <p:sp>
         <p:nvSpPr>
-          <p:cNvPr id="7" name="Rectangle 6"/>
+          <p:cNvPr id="9" name="Rectangle 8"/>
           <p:cNvSpPr/>
           <p:nvPr/>
         </p:nvSpPr>
         <p:spPr>
           <a:xfrm>
             <a:off x="0" y="1171346"/>
-            <a:ext cx="12191695" cy="45720"/>
-          </a:xfrm>
-          <a:prstGeom prst="rect">
-            <a:avLst/>
-          </a:prstGeom>
-          <a:solidFill>
-            <a:srgbClr val="14A0B4"/>
+            <a:ext cx="12191695" cy="64008"/>
+          </a:xfrm>
+          <a:prstGeom prst="rect">
+            <a:avLst/>
+          </a:prstGeom>
+          <a:solidFill>
+            <a:srgbClr val="D98A2B"/>
           </a:solidFill>
           <a:ln>
             <a:noFill/>
@@ -15140,7 +15908,7 @@
       </p:sp>
       <p:sp>
         <p:nvSpPr>
-          <p:cNvPr id="8" name="TextBox 7"/>
+          <p:cNvPr id="10" name="TextBox 9"/>
           <p:cNvSpPr txBox="1"/>
           <p:nvPr/>
         </p:nvSpPr>
@@ -15175,14 +15943,14 @@
                 </a:solidFill>
                 <a:latin typeface="Calibri"/>
               </a:rPr>
-              <a:t>RINGKASAN</a:t>
-            </a:r>
-          </a:p>
-        </p:txBody>
-      </p:sp>
-      <p:sp>
-        <p:nvSpPr>
-          <p:cNvPr id="9" name="TextBox 8"/>
+              <a:t>02  ·  RINGKASAN</a:t>
+            </a:r>
+          </a:p>
+        </p:txBody>
+      </p:sp>
+      <p:sp>
+        <p:nvSpPr>
+          <p:cNvPr id="11" name="TextBox 10"/>
           <p:cNvSpPr txBox="1"/>
           <p:nvPr/>
         </p:nvSpPr>
@@ -15224,7 +15992,7 @@
       </p:sp>
       <p:sp>
         <p:nvSpPr>
-          <p:cNvPr id="10" name="Rounded Rectangle 9"/>
+          <p:cNvPr id="12" name="Rounded Rectangle 11"/>
           <p:cNvSpPr/>
           <p:nvPr/>
         </p:nvSpPr>
@@ -15270,7 +16038,7 @@
       </p:sp>
       <p:sp>
         <p:nvSpPr>
-          <p:cNvPr id="11" name="Rectangle 10"/>
+          <p:cNvPr id="13" name="Rectangle 12"/>
           <p:cNvSpPr/>
           <p:nvPr/>
         </p:nvSpPr>
@@ -15312,7 +16080,7 @@
       </p:sp>
       <p:sp>
         <p:nvSpPr>
-          <p:cNvPr id="12" name="TextBox 11"/>
+          <p:cNvPr id="14" name="TextBox 13"/>
           <p:cNvSpPr txBox="1"/>
           <p:nvPr/>
         </p:nvSpPr>
@@ -15354,7 +16122,7 @@
       </p:sp>
       <p:sp>
         <p:nvSpPr>
-          <p:cNvPr id="13" name="Rounded Rectangle 12"/>
+          <p:cNvPr id="15" name="Rounded Rectangle 14"/>
           <p:cNvSpPr/>
           <p:nvPr/>
         </p:nvSpPr>
@@ -15398,7 +16166,7 @@
       </p:sp>
       <p:sp>
         <p:nvSpPr>
-          <p:cNvPr id="14" name="TextBox 13"/>
+          <p:cNvPr id="16" name="TextBox 15"/>
           <p:cNvSpPr txBox="1"/>
           <p:nvPr/>
         </p:nvSpPr>
@@ -15440,7 +16208,7 @@
       </p:sp>
       <p:sp>
         <p:nvSpPr>
-          <p:cNvPr id="15" name="TextBox 14"/>
+          <p:cNvPr id="17" name="TextBox 16"/>
           <p:cNvSpPr txBox="1"/>
           <p:nvPr/>
         </p:nvSpPr>
@@ -15482,7 +16250,7 @@
       </p:sp>
       <p:sp>
         <p:nvSpPr>
-          <p:cNvPr id="16" name="TextBox 15"/>
+          <p:cNvPr id="18" name="TextBox 17"/>
           <p:cNvSpPr txBox="1"/>
           <p:nvPr/>
         </p:nvSpPr>
@@ -15543,7 +16311,7 @@
       </p:sp>
       <p:sp>
         <p:nvSpPr>
-          <p:cNvPr id="17" name="TextBox 16"/>
+          <p:cNvPr id="19" name="TextBox 18"/>
           <p:cNvSpPr txBox="1"/>
           <p:nvPr/>
         </p:nvSpPr>
@@ -15585,7 +16353,7 @@
       </p:sp>
       <p:sp>
         <p:nvSpPr>
-          <p:cNvPr id="18" name="TextBox 17"/>
+          <p:cNvPr id="20" name="TextBox 19"/>
           <p:cNvSpPr txBox="1"/>
           <p:nvPr/>
         </p:nvSpPr>
@@ -15627,7 +16395,7 @@
       </p:sp>
       <p:sp>
         <p:nvSpPr>
-          <p:cNvPr id="19" name="TextBox 18"/>
+          <p:cNvPr id="21" name="TextBox 20"/>
           <p:cNvSpPr txBox="1"/>
           <p:nvPr/>
         </p:nvSpPr>
@@ -15669,7 +16437,7 @@
       </p:sp>
       <p:sp>
         <p:nvSpPr>
-          <p:cNvPr id="20" name="Rectangle 19"/>
+          <p:cNvPr id="22" name="Rectangle 21"/>
           <p:cNvSpPr/>
           <p:nvPr/>
         </p:nvSpPr>
@@ -15711,7 +16479,7 @@
       </p:sp>
       <p:sp>
         <p:nvSpPr>
-          <p:cNvPr id="21" name="TextBox 20"/>
+          <p:cNvPr id="23" name="TextBox 22"/>
           <p:cNvSpPr txBox="1"/>
           <p:nvPr/>
         </p:nvSpPr>
@@ -15753,7 +16521,7 @@
       </p:sp>
       <p:sp>
         <p:nvSpPr>
-          <p:cNvPr id="22" name="TextBox 21"/>
+          <p:cNvPr id="24" name="TextBox 23"/>
           <p:cNvSpPr txBox="1"/>
           <p:nvPr/>
         </p:nvSpPr>
@@ -15795,7 +16563,7 @@
       </p:sp>
       <p:sp>
         <p:nvSpPr>
-          <p:cNvPr id="23" name="TextBox 22"/>
+          <p:cNvPr id="25" name="TextBox 24"/>
           <p:cNvSpPr txBox="1"/>
           <p:nvPr/>
         </p:nvSpPr>
@@ -15837,7 +16605,7 @@
       </p:sp>
       <p:sp>
         <p:nvSpPr>
-          <p:cNvPr id="24" name="Rectangle 23"/>
+          <p:cNvPr id="26" name="Rectangle 25"/>
           <p:cNvSpPr/>
           <p:nvPr/>
         </p:nvSpPr>
@@ -15879,7 +16647,7 @@
       </p:sp>
       <p:sp>
         <p:nvSpPr>
-          <p:cNvPr id="25" name="TextBox 24"/>
+          <p:cNvPr id="27" name="TextBox 26"/>
           <p:cNvSpPr txBox="1"/>
           <p:nvPr/>
         </p:nvSpPr>
@@ -15921,7 +16689,7 @@
       </p:sp>
       <p:sp>
         <p:nvSpPr>
-          <p:cNvPr id="26" name="TextBox 25"/>
+          <p:cNvPr id="28" name="TextBox 27"/>
           <p:cNvSpPr txBox="1"/>
           <p:nvPr/>
         </p:nvSpPr>
@@ -15963,7 +16731,7 @@
       </p:sp>
       <p:sp>
         <p:nvSpPr>
-          <p:cNvPr id="27" name="TextBox 26"/>
+          <p:cNvPr id="29" name="TextBox 28"/>
           <p:cNvSpPr txBox="1"/>
           <p:nvPr/>
         </p:nvSpPr>
@@ -16005,7 +16773,7 @@
       </p:sp>
       <p:sp>
         <p:nvSpPr>
-          <p:cNvPr id="28" name="Rectangle 27"/>
+          <p:cNvPr id="30" name="Rectangle 29"/>
           <p:cNvSpPr/>
           <p:nvPr/>
         </p:nvSpPr>
@@ -16047,7 +16815,7 @@
       </p:sp>
       <p:sp>
         <p:nvSpPr>
-          <p:cNvPr id="29" name="TextBox 28"/>
+          <p:cNvPr id="31" name="TextBox 30"/>
           <p:cNvSpPr txBox="1"/>
           <p:nvPr/>
         </p:nvSpPr>
@@ -16089,7 +16857,7 @@
       </p:sp>
       <p:sp>
         <p:nvSpPr>
-          <p:cNvPr id="30" name="TextBox 29"/>
+          <p:cNvPr id="32" name="TextBox 31"/>
           <p:cNvSpPr txBox="1"/>
           <p:nvPr/>
         </p:nvSpPr>
@@ -16131,7 +16899,7 @@
       </p:sp>
       <p:sp>
         <p:nvSpPr>
-          <p:cNvPr id="31" name="TextBox 30"/>
+          <p:cNvPr id="33" name="TextBox 32"/>
           <p:cNvSpPr txBox="1"/>
           <p:nvPr/>
         </p:nvSpPr>
@@ -16173,7 +16941,7 @@
       </p:sp>
       <p:sp>
         <p:nvSpPr>
-          <p:cNvPr id="32" name="Rounded Rectangle 31"/>
+          <p:cNvPr id="34" name="Rounded Rectangle 33"/>
           <p:cNvSpPr/>
           <p:nvPr/>
         </p:nvSpPr>
@@ -16217,7 +16985,7 @@
       </p:sp>
       <p:sp>
         <p:nvSpPr>
-          <p:cNvPr id="33" name="TextBox 32"/>
+          <p:cNvPr id="35" name="TextBox 34"/>
           <p:cNvSpPr txBox="1"/>
           <p:nvPr/>
         </p:nvSpPr>
@@ -16259,7 +17027,7 @@
       </p:sp>
       <p:sp>
         <p:nvSpPr>
-          <p:cNvPr id="34" name="TextBox 33"/>
+          <p:cNvPr id="36" name="TextBox 35"/>
           <p:cNvSpPr txBox="1"/>
           <p:nvPr/>
         </p:nvSpPr>
@@ -16301,20 +17069,20 @@
       </p:sp>
       <p:sp>
         <p:nvSpPr>
-          <p:cNvPr id="35" name="Rectangle 34"/>
+          <p:cNvPr id="37" name="Rectangle 36"/>
           <p:cNvSpPr/>
           <p:nvPr/>
         </p:nvSpPr>
         <p:spPr>
           <a:xfrm>
-            <a:off x="530352" y="6254496"/>
-            <a:ext cx="11130991" cy="12801"/>
-          </a:xfrm>
-          <a:prstGeom prst="rect">
-            <a:avLst/>
-          </a:prstGeom>
-          <a:solidFill>
-            <a:srgbClr val="D7E3E6"/>
+            <a:off x="0" y="6163056"/>
+            <a:ext cx="12191695" cy="694944"/>
+          </a:xfrm>
+          <a:prstGeom prst="rect">
+            <a:avLst/>
+          </a:prstGeom>
+          <a:solidFill>
+            <a:srgbClr val="0B4A5A"/>
           </a:solidFill>
           <a:ln>
             <a:noFill/>
@@ -16343,64 +17111,20 @@
       </p:sp>
       <p:sp>
         <p:nvSpPr>
-          <p:cNvPr id="36" name="TextBox 35"/>
-          <p:cNvSpPr txBox="1"/>
-          <p:nvPr/>
-        </p:nvSpPr>
-        <p:spPr>
-          <a:xfrm>
-            <a:off x="530352" y="6291072"/>
-            <a:ext cx="8595360" cy="256032"/>
-          </a:xfrm>
-          <a:prstGeom prst="rect">
-            <a:avLst/>
-          </a:prstGeom>
-          <a:noFill/>
-        </p:spPr>
-        <p:txBody>
-          <a:bodyPr wrap="square" lIns="0" rIns="0" tIns="0" bIns="0" anchor="t">
-            <a:noAutofit/>
-          </a:bodyPr>
-          <a:lstStyle/>
-          <a:p>
-            <a:pPr algn="l">
-              <a:spcBef>
-                <a:spcPts val="0"/>
-              </a:spcBef>
-              <a:spcAft>
-                <a:spcPts val="0"/>
-              </a:spcAft>
-            </a:pPr>
-            <a:r>
-              <a:rPr sz="900" b="0" i="0" lang="id-ID">
-                <a:solidFill>
-                  <a:srgbClr val="5C757C"/>
-                </a:solidFill>
-                <a:latin typeface="Calibri"/>
-              </a:rPr>
-              <a:t>Lopes dkk., Sci Rep 2021;11:22405 · DOI 10.1038/s41598-021-01541-7 · CC BY 4.0</a:t>
-            </a:r>
-          </a:p>
-        </p:txBody>
-      </p:sp>
-      <p:sp>
-        <p:nvSpPr>
-          <p:cNvPr id="37" name="Rounded Rectangle 36"/>
+          <p:cNvPr id="38" name="Rectangle 37"/>
           <p:cNvSpPr/>
           <p:nvPr/>
         </p:nvSpPr>
         <p:spPr>
           <a:xfrm>
-            <a:off x="11259007" y="6227064"/>
-            <a:ext cx="402336" cy="256032"/>
-          </a:xfrm>
-          <a:prstGeom prst="roundRect">
-            <a:avLst>
-              <a:gd name="adj" fmla="val 17857"/>
-            </a:avLst>
-          </a:prstGeom>
-          <a:solidFill>
-            <a:srgbClr val="0B4A5A"/>
+            <a:off x="0" y="6163056"/>
+            <a:ext cx="12191695" cy="41148"/>
+          </a:xfrm>
+          <a:prstGeom prst="rect">
+            <a:avLst/>
+          </a:prstGeom>
+          <a:solidFill>
+            <a:srgbClr val="D98A2B"/>
           </a:solidFill>
           <a:ln>
             <a:noFill/>
@@ -16429,14 +17153,14 @@
       </p:sp>
       <p:sp>
         <p:nvSpPr>
-          <p:cNvPr id="38" name="TextBox 37"/>
+          <p:cNvPr id="39" name="TextBox 38"/>
           <p:cNvSpPr txBox="1"/>
           <p:nvPr/>
         </p:nvSpPr>
         <p:spPr>
           <a:xfrm>
-            <a:off x="11259007" y="6286500"/>
-            <a:ext cx="402336" cy="182880"/>
+            <a:off x="530352" y="6327648"/>
+            <a:ext cx="8595360" cy="256032"/>
           </a:xfrm>
           <a:prstGeom prst="rect">
             <a:avLst/>
@@ -16449,6 +17173,92 @@
           </a:bodyPr>
           <a:lstStyle/>
           <a:p>
+            <a:pPr algn="l">
+              <a:spcBef>
+                <a:spcPts val="0"/>
+              </a:spcBef>
+              <a:spcAft>
+                <a:spcPts val="0"/>
+              </a:spcAft>
+            </a:pPr>
+            <a:r>
+              <a:rPr sz="850" b="0" i="0" lang="id-ID">
+                <a:solidFill>
+                  <a:srgbClr val="9FC7CF"/>
+                </a:solidFill>
+                <a:latin typeface="Calibri"/>
+              </a:rPr>
+              <a:t>Lopes dkk., Sci Rep 2021;11:22405 · DOI 10.1038/s41598-021-01541-7 · CC BY 4.0</a:t>
+            </a:r>
+          </a:p>
+        </p:txBody>
+      </p:sp>
+      <p:sp>
+        <p:nvSpPr>
+          <p:cNvPr id="40" name="Rounded Rectangle 39"/>
+          <p:cNvSpPr/>
+          <p:nvPr/>
+        </p:nvSpPr>
+        <p:spPr>
+          <a:xfrm>
+            <a:off x="11204143" y="6291072"/>
+            <a:ext cx="457200" cy="256032"/>
+          </a:xfrm>
+          <a:prstGeom prst="roundRect">
+            <a:avLst>
+              <a:gd name="adj" fmla="val 17857"/>
+            </a:avLst>
+          </a:prstGeom>
+          <a:solidFill>
+            <a:srgbClr val="E8F4F6"/>
+          </a:solidFill>
+          <a:ln>
+            <a:noFill/>
+          </a:ln>
+          <a:effectLst/>
+        </p:spPr>
+        <p:style>
+          <a:lnRef idx="1">
+            <a:schemeClr val="accent1"/>
+          </a:lnRef>
+          <a:fillRef idx="3">
+            <a:schemeClr val="accent1"/>
+          </a:fillRef>
+          <a:effectRef idx="2">
+            <a:schemeClr val="accent1"/>
+          </a:effectRef>
+          <a:fontRef idx="minor">
+            <a:schemeClr val="lt1"/>
+          </a:fontRef>
+        </p:style>
+        <p:txBody>
+          <a:bodyPr rtlCol="0" anchor="ctr"/>
+          <a:lstStyle/>
+          <a:p/>
+        </p:txBody>
+      </p:sp>
+      <p:sp>
+        <p:nvSpPr>
+          <p:cNvPr id="41" name="TextBox 40"/>
+          <p:cNvSpPr txBox="1"/>
+          <p:nvPr/>
+        </p:nvSpPr>
+        <p:spPr>
+          <a:xfrm>
+            <a:off x="11204143" y="6332220"/>
+            <a:ext cx="457200" cy="182880"/>
+          </a:xfrm>
+          <a:prstGeom prst="rect">
+            <a:avLst/>
+          </a:prstGeom>
+          <a:noFill/>
+        </p:spPr>
+        <p:txBody>
+          <a:bodyPr wrap="square" lIns="0" rIns="0" tIns="0" bIns="0" anchor="t">
+            <a:noAutofit/>
+          </a:bodyPr>
+          <a:lstStyle/>
+          <a:p>
             <a:pPr algn="ctr">
               <a:spcBef>
                 <a:spcPts val="0"/>
@@ -16460,7 +17270,7 @@
             <a:r>
               <a:rPr sz="950" b="1" i="0" lang="id-ID">
                 <a:solidFill>
-                  <a:srgbClr val="FFFFFF"/>
+                  <a:srgbClr val="0B4A5A"/>
                 </a:solidFill>
                 <a:latin typeface="Calibri"/>
               </a:rPr>
@@ -16501,17 +17311,9 @@
           <a:prstGeom prst="rect">
             <a:avLst/>
           </a:prstGeom>
-          <a:gradFill rotWithShape="1">
-            <a:gsLst>
-              <a:gs pos="0">
-                <a:srgbClr val="F9F7F3"/>
-              </a:gs>
-              <a:gs pos="100000">
-                <a:srgbClr val="E6EFF2"/>
-              </a:gs>
-            </a:gsLst>
-            <a:lin scaled="0" ang="19200000"/>
-          </a:gradFill>
+          <a:solidFill>
+            <a:srgbClr val="DFE9EC"/>
+          </a:solidFill>
           <a:ln>
             <a:noFill/>
           </a:ln>
@@ -16545,14 +17347,14 @@
         </p:nvSpPr>
         <p:spPr>
           <a:xfrm>
-            <a:off x="9098280" y="-2240280"/>
-            <a:ext cx="4480560" cy="4480560"/>
+            <a:off x="8732520" y="3520440"/>
+            <a:ext cx="5760720" cy="5760720"/>
           </a:xfrm>
           <a:prstGeom prst="ellipse">
             <a:avLst/>
           </a:prstGeom>
           <a:solidFill>
-            <a:srgbClr val="E4EFF1"/>
+            <a:srgbClr val="D2E1E4"/>
           </a:solidFill>
           <a:ln>
             <a:noFill/>
@@ -16581,20 +17383,20 @@
       </p:sp>
       <p:sp>
         <p:nvSpPr>
-          <p:cNvPr id="4" name="Oval 3"/>
+          <p:cNvPr id="4" name="Rectangle 3"/>
           <p:cNvSpPr/>
           <p:nvPr/>
         </p:nvSpPr>
         <p:spPr>
           <a:xfrm>
-            <a:off x="-1600200" y="4160520"/>
-            <a:ext cx="3931920" cy="3931920"/>
-          </a:xfrm>
-          <a:prstGeom prst="ellipse">
-            <a:avLst/>
-          </a:prstGeom>
-          <a:solidFill>
-            <a:srgbClr val="EAF3F4"/>
+            <a:off x="3309213" y="1417320"/>
+            <a:ext cx="7315" cy="4663440"/>
+          </a:xfrm>
+          <a:prstGeom prst="rect">
+            <a:avLst/>
+          </a:prstGeom>
+          <a:solidFill>
+            <a:srgbClr val="C7DCE1"/>
           </a:solidFill>
           <a:ln>
             <a:noFill/>
@@ -16629,16 +17431,14 @@
         </p:nvSpPr>
         <p:spPr>
           <a:xfrm>
-            <a:off x="0" y="6455664"/>
-            <a:ext cx="12191695" cy="402336"/>
-          </a:xfrm>
-          <a:prstGeom prst="rect">
-            <a:avLst/>
-          </a:prstGeom>
-          <a:solidFill>
-            <a:srgbClr val="DCE7EA">
-              <a:alpha val="85000"/>
-            </a:srgbClr>
+            <a:off x="6092647" y="1417320"/>
+            <a:ext cx="7315" cy="4663440"/>
+          </a:xfrm>
+          <a:prstGeom prst="rect">
+            <a:avLst/>
+          </a:prstGeom>
+          <a:solidFill>
+            <a:srgbClr val="C7DCE1"/>
           </a:solidFill>
           <a:ln>
             <a:noFill/>
@@ -16668,6 +17468,90 @@
       <p:sp>
         <p:nvSpPr>
           <p:cNvPr id="6" name="Rectangle 5"/>
+          <p:cNvSpPr/>
+          <p:nvPr/>
+        </p:nvSpPr>
+        <p:spPr>
+          <a:xfrm>
+            <a:off x="8875166" y="1417320"/>
+            <a:ext cx="7315" cy="4663440"/>
+          </a:xfrm>
+          <a:prstGeom prst="rect">
+            <a:avLst/>
+          </a:prstGeom>
+          <a:solidFill>
+            <a:srgbClr val="C7DCE1"/>
+          </a:solidFill>
+          <a:ln>
+            <a:noFill/>
+          </a:ln>
+          <a:effectLst/>
+        </p:spPr>
+        <p:style>
+          <a:lnRef idx="1">
+            <a:schemeClr val="accent1"/>
+          </a:lnRef>
+          <a:fillRef idx="3">
+            <a:schemeClr val="accent1"/>
+          </a:fillRef>
+          <a:effectRef idx="2">
+            <a:schemeClr val="accent1"/>
+          </a:effectRef>
+          <a:fontRef idx="minor">
+            <a:schemeClr val="lt1"/>
+          </a:fontRef>
+        </p:style>
+        <p:txBody>
+          <a:bodyPr rtlCol="0" anchor="ctr"/>
+          <a:lstStyle/>
+          <a:p/>
+        </p:txBody>
+      </p:sp>
+      <p:sp>
+        <p:nvSpPr>
+          <p:cNvPr id="7" name="Rectangle 6"/>
+          <p:cNvSpPr/>
+          <p:nvPr/>
+        </p:nvSpPr>
+        <p:spPr>
+          <a:xfrm>
+            <a:off x="0" y="0"/>
+            <a:ext cx="201168" cy="6858000"/>
+          </a:xfrm>
+          <a:prstGeom prst="rect">
+            <a:avLst/>
+          </a:prstGeom>
+          <a:solidFill>
+            <a:srgbClr val="0B4A5A"/>
+          </a:solidFill>
+          <a:ln>
+            <a:noFill/>
+          </a:ln>
+          <a:effectLst/>
+        </p:spPr>
+        <p:style>
+          <a:lnRef idx="1">
+            <a:schemeClr val="accent1"/>
+          </a:lnRef>
+          <a:fillRef idx="3">
+            <a:schemeClr val="accent1"/>
+          </a:fillRef>
+          <a:effectRef idx="2">
+            <a:schemeClr val="accent1"/>
+          </a:effectRef>
+          <a:fontRef idx="minor">
+            <a:schemeClr val="lt1"/>
+          </a:fontRef>
+        </p:style>
+        <p:txBody>
+          <a:bodyPr rtlCol="0" anchor="ctr"/>
+          <a:lstStyle/>
+          <a:p/>
+        </p:txBody>
+      </p:sp>
+      <p:sp>
+        <p:nvSpPr>
+          <p:cNvPr id="8" name="Rectangle 7"/>
           <p:cNvSpPr/>
           <p:nvPr/>
         </p:nvSpPr>
@@ -16717,20 +17601,20 @@
       </p:sp>
       <p:sp>
         <p:nvSpPr>
-          <p:cNvPr id="7" name="Rectangle 6"/>
+          <p:cNvPr id="9" name="Rectangle 8"/>
           <p:cNvSpPr/>
           <p:nvPr/>
         </p:nvSpPr>
         <p:spPr>
           <a:xfrm>
             <a:off x="0" y="1171346"/>
-            <a:ext cx="12191695" cy="45720"/>
-          </a:xfrm>
-          <a:prstGeom prst="rect">
-            <a:avLst/>
-          </a:prstGeom>
-          <a:solidFill>
-            <a:srgbClr val="14A0B4"/>
+            <a:ext cx="12191695" cy="64008"/>
+          </a:xfrm>
+          <a:prstGeom prst="rect">
+            <a:avLst/>
+          </a:prstGeom>
+          <a:solidFill>
+            <a:srgbClr val="D98A2B"/>
           </a:solidFill>
           <a:ln>
             <a:noFill/>
@@ -16759,7 +17643,7 @@
       </p:sp>
       <p:sp>
         <p:nvSpPr>
-          <p:cNvPr id="8" name="TextBox 7"/>
+          <p:cNvPr id="10" name="TextBox 9"/>
           <p:cNvSpPr txBox="1"/>
           <p:nvPr/>
         </p:nvSpPr>
@@ -16794,14 +17678,14 @@
                 </a:solidFill>
                 <a:latin typeface="Calibri"/>
               </a:rPr>
-              <a:t>LATAR BELAKANG</a:t>
-            </a:r>
-          </a:p>
-        </p:txBody>
-      </p:sp>
-      <p:sp>
-        <p:nvSpPr>
-          <p:cNvPr id="9" name="TextBox 8"/>
+              <a:t>03  ·  LATAR BELAKANG</a:t>
+            </a:r>
+          </a:p>
+        </p:txBody>
+      </p:sp>
+      <p:sp>
+        <p:nvSpPr>
+          <p:cNvPr id="11" name="TextBox 10"/>
           <p:cNvSpPr txBox="1"/>
           <p:nvPr/>
         </p:nvSpPr>
@@ -16843,7 +17727,7 @@
       </p:sp>
       <p:sp>
         <p:nvSpPr>
-          <p:cNvPr id="10" name="Rounded Rectangle 9"/>
+          <p:cNvPr id="12" name="Rounded Rectangle 11"/>
           <p:cNvSpPr/>
           <p:nvPr/>
         </p:nvSpPr>
@@ -16889,7 +17773,7 @@
       </p:sp>
       <p:sp>
         <p:nvSpPr>
-          <p:cNvPr id="11" name="Rectangle 10"/>
+          <p:cNvPr id="13" name="Rectangle 12"/>
           <p:cNvSpPr/>
           <p:nvPr/>
         </p:nvSpPr>
@@ -16931,7 +17815,7 @@
       </p:sp>
       <p:sp>
         <p:nvSpPr>
-          <p:cNvPr id="12" name="TextBox 11"/>
+          <p:cNvPr id="14" name="TextBox 13"/>
           <p:cNvSpPr txBox="1"/>
           <p:nvPr/>
         </p:nvSpPr>
@@ -16973,7 +17857,7 @@
       </p:sp>
       <p:sp>
         <p:nvSpPr>
-          <p:cNvPr id="13" name="Rounded Rectangle 12"/>
+          <p:cNvPr id="15" name="Rounded Rectangle 14"/>
           <p:cNvSpPr/>
           <p:nvPr/>
         </p:nvSpPr>
@@ -17017,7 +17901,7 @@
       </p:sp>
       <p:sp>
         <p:nvSpPr>
-          <p:cNvPr id="14" name="TextBox 13"/>
+          <p:cNvPr id="16" name="TextBox 15"/>
           <p:cNvSpPr txBox="1"/>
           <p:nvPr/>
         </p:nvSpPr>
@@ -17059,7 +17943,7 @@
       </p:sp>
       <p:sp>
         <p:nvSpPr>
-          <p:cNvPr id="15" name="TextBox 14"/>
+          <p:cNvPr id="17" name="TextBox 16"/>
           <p:cNvSpPr txBox="1"/>
           <p:nvPr/>
         </p:nvSpPr>
@@ -17104,7 +17988,7 @@
       </p:sp>
       <p:sp>
         <p:nvSpPr>
-          <p:cNvPr id="16" name="Rounded Rectangle 15"/>
+          <p:cNvPr id="18" name="Rounded Rectangle 17"/>
           <p:cNvSpPr/>
           <p:nvPr/>
         </p:nvSpPr>
@@ -17148,7 +18032,7 @@
       </p:sp>
       <p:sp>
         <p:nvSpPr>
-          <p:cNvPr id="17" name="TextBox 16"/>
+          <p:cNvPr id="19" name="TextBox 18"/>
           <p:cNvSpPr txBox="1"/>
           <p:nvPr/>
         </p:nvSpPr>
@@ -17190,7 +18074,7 @@
       </p:sp>
       <p:sp>
         <p:nvSpPr>
-          <p:cNvPr id="18" name="TextBox 17"/>
+          <p:cNvPr id="20" name="TextBox 19"/>
           <p:cNvSpPr txBox="1"/>
           <p:nvPr/>
         </p:nvSpPr>
@@ -17235,7 +18119,7 @@
       </p:sp>
       <p:sp>
         <p:nvSpPr>
-          <p:cNvPr id="19" name="Rounded Rectangle 18"/>
+          <p:cNvPr id="21" name="Rounded Rectangle 20"/>
           <p:cNvSpPr/>
           <p:nvPr/>
         </p:nvSpPr>
@@ -17279,7 +18163,7 @@
       </p:sp>
       <p:sp>
         <p:nvSpPr>
-          <p:cNvPr id="20" name="TextBox 19"/>
+          <p:cNvPr id="22" name="TextBox 21"/>
           <p:cNvSpPr txBox="1"/>
           <p:nvPr/>
         </p:nvSpPr>
@@ -17321,7 +18205,7 @@
       </p:sp>
       <p:sp>
         <p:nvSpPr>
-          <p:cNvPr id="21" name="TextBox 20"/>
+          <p:cNvPr id="23" name="TextBox 22"/>
           <p:cNvSpPr txBox="1"/>
           <p:nvPr/>
         </p:nvSpPr>
@@ -17366,7 +18250,7 @@
       </p:sp>
       <p:sp>
         <p:nvSpPr>
-          <p:cNvPr id="22" name="Rounded Rectangle 21"/>
+          <p:cNvPr id="24" name="Rounded Rectangle 23"/>
           <p:cNvSpPr/>
           <p:nvPr/>
         </p:nvSpPr>
@@ -17410,7 +18294,7 @@
       </p:sp>
       <p:sp>
         <p:nvSpPr>
-          <p:cNvPr id="23" name="Rounded Rectangle 22"/>
+          <p:cNvPr id="25" name="Rounded Rectangle 24"/>
           <p:cNvSpPr/>
           <p:nvPr/>
         </p:nvSpPr>
@@ -17456,7 +18340,7 @@
       </p:sp>
       <p:pic>
         <p:nvPicPr>
-          <p:cNvPr id="24" name="Potongan molar pertama permanen dengan lesi hipomineralisasi pada email" descr="molar-mih-crop.png"/>
+          <p:cNvPr id="26" name="Potongan molar pertama permanen dengan lesi hipomineralisasi pada email" descr="molar-mih-crop.png"/>
           <p:cNvPicPr>
             <a:picLocks noChangeAspect="1"/>
           </p:cNvPicPr>
@@ -17480,7 +18364,7 @@
       </p:pic>
       <p:sp>
         <p:nvSpPr>
-          <p:cNvPr id="25" name="Rounded Rectangle 24"/>
+          <p:cNvPr id="27" name="Rounded Rectangle 26"/>
           <p:cNvSpPr/>
           <p:nvPr/>
         </p:nvSpPr>
@@ -17524,7 +18408,7 @@
       </p:sp>
       <p:sp>
         <p:nvSpPr>
-          <p:cNvPr id="26" name="TextBox 25"/>
+          <p:cNvPr id="28" name="TextBox 27"/>
           <p:cNvSpPr txBox="1"/>
           <p:nvPr/>
         </p:nvSpPr>
@@ -17566,7 +18450,7 @@
       </p:sp>
       <p:sp>
         <p:nvSpPr>
-          <p:cNvPr id="27" name="Rounded Rectangle 26"/>
+          <p:cNvPr id="29" name="Rounded Rectangle 28"/>
           <p:cNvSpPr/>
           <p:nvPr/>
         </p:nvSpPr>
@@ -17610,7 +18494,7 @@
       </p:sp>
       <p:sp>
         <p:nvSpPr>
-          <p:cNvPr id="28" name="TextBox 27"/>
+          <p:cNvPr id="30" name="TextBox 29"/>
           <p:cNvSpPr txBox="1"/>
           <p:nvPr/>
         </p:nvSpPr>
@@ -17652,7 +18536,7 @@
       </p:sp>
       <p:sp>
         <p:nvSpPr>
-          <p:cNvPr id="29" name="Rounded Rectangle 28"/>
+          <p:cNvPr id="31" name="Rounded Rectangle 30"/>
           <p:cNvSpPr/>
           <p:nvPr/>
         </p:nvSpPr>
@@ -17696,7 +18580,7 @@
       </p:sp>
       <p:sp>
         <p:nvSpPr>
-          <p:cNvPr id="30" name="TextBox 29"/>
+          <p:cNvPr id="32" name="TextBox 31"/>
           <p:cNvSpPr txBox="1"/>
           <p:nvPr/>
         </p:nvSpPr>
@@ -17738,7 +18622,7 @@
       </p:sp>
       <p:sp>
         <p:nvSpPr>
-          <p:cNvPr id="31" name="Rounded Rectangle 30"/>
+          <p:cNvPr id="33" name="Rounded Rectangle 32"/>
           <p:cNvSpPr/>
           <p:nvPr/>
         </p:nvSpPr>
@@ -17782,7 +18666,7 @@
       </p:sp>
       <p:sp>
         <p:nvSpPr>
-          <p:cNvPr id="32" name="TextBox 31"/>
+          <p:cNvPr id="34" name="TextBox 33"/>
           <p:cNvSpPr txBox="1"/>
           <p:nvPr/>
         </p:nvSpPr>
@@ -17824,7 +18708,7 @@
       </p:sp>
       <p:sp>
         <p:nvSpPr>
-          <p:cNvPr id="33" name="TextBox 32"/>
+          <p:cNvPr id="35" name="TextBox 34"/>
           <p:cNvSpPr txBox="1"/>
           <p:nvPr/>
         </p:nvSpPr>
@@ -17866,7 +18750,7 @@
       </p:sp>
       <p:sp>
         <p:nvSpPr>
-          <p:cNvPr id="34" name="TextBox 33"/>
+          <p:cNvPr id="36" name="TextBox 35"/>
           <p:cNvSpPr txBox="1"/>
           <p:nvPr/>
         </p:nvSpPr>
@@ -17908,20 +18792,20 @@
       </p:sp>
       <p:sp>
         <p:nvSpPr>
-          <p:cNvPr id="35" name="Rectangle 34"/>
+          <p:cNvPr id="37" name="Rectangle 36"/>
           <p:cNvSpPr/>
           <p:nvPr/>
         </p:nvSpPr>
         <p:spPr>
           <a:xfrm>
-            <a:off x="530352" y="6254496"/>
-            <a:ext cx="11130991" cy="12801"/>
-          </a:xfrm>
-          <a:prstGeom prst="rect">
-            <a:avLst/>
-          </a:prstGeom>
-          <a:solidFill>
-            <a:srgbClr val="D7E3E6"/>
+            <a:off x="0" y="6163056"/>
+            <a:ext cx="12191695" cy="694944"/>
+          </a:xfrm>
+          <a:prstGeom prst="rect">
+            <a:avLst/>
+          </a:prstGeom>
+          <a:solidFill>
+            <a:srgbClr val="0B4A5A"/>
           </a:solidFill>
           <a:ln>
             <a:noFill/>
@@ -17950,64 +18834,20 @@
       </p:sp>
       <p:sp>
         <p:nvSpPr>
-          <p:cNvPr id="36" name="TextBox 35"/>
-          <p:cNvSpPr txBox="1"/>
-          <p:nvPr/>
-        </p:nvSpPr>
-        <p:spPr>
-          <a:xfrm>
-            <a:off x="530352" y="6291072"/>
-            <a:ext cx="8595360" cy="256032"/>
-          </a:xfrm>
-          <a:prstGeom prst="rect">
-            <a:avLst/>
-          </a:prstGeom>
-          <a:noFill/>
-        </p:spPr>
-        <p:txBody>
-          <a:bodyPr wrap="square" lIns="0" rIns="0" tIns="0" bIns="0" anchor="t">
-            <a:noAutofit/>
-          </a:bodyPr>
-          <a:lstStyle/>
-          <a:p>
-            <a:pPr algn="l">
-              <a:spcBef>
-                <a:spcPts val="0"/>
-              </a:spcBef>
-              <a:spcAft>
-                <a:spcPts val="0"/>
-              </a:spcAft>
-            </a:pPr>
-            <a:r>
-              <a:rPr sz="900" b="0" i="0" lang="id-ID">
-                <a:solidFill>
-                  <a:srgbClr val="5C757C"/>
-                </a:solidFill>
-                <a:latin typeface="Calibri"/>
-              </a:rPr>
-              <a:t>Lopes dkk., Sci Rep 2021;11:22405 · DOI 10.1038/s41598-021-01541-7 · CC BY 4.0</a:t>
-            </a:r>
-          </a:p>
-        </p:txBody>
-      </p:sp>
-      <p:sp>
-        <p:nvSpPr>
-          <p:cNvPr id="37" name="Rounded Rectangle 36"/>
+          <p:cNvPr id="38" name="Rectangle 37"/>
           <p:cNvSpPr/>
           <p:nvPr/>
         </p:nvSpPr>
         <p:spPr>
           <a:xfrm>
-            <a:off x="11259007" y="6227064"/>
-            <a:ext cx="402336" cy="256032"/>
-          </a:xfrm>
-          <a:prstGeom prst="roundRect">
-            <a:avLst>
-              <a:gd name="adj" fmla="val 17857"/>
-            </a:avLst>
-          </a:prstGeom>
-          <a:solidFill>
-            <a:srgbClr val="0B4A5A"/>
+            <a:off x="0" y="6163056"/>
+            <a:ext cx="12191695" cy="41148"/>
+          </a:xfrm>
+          <a:prstGeom prst="rect">
+            <a:avLst/>
+          </a:prstGeom>
+          <a:solidFill>
+            <a:srgbClr val="D98A2B"/>
           </a:solidFill>
           <a:ln>
             <a:noFill/>
@@ -18036,14 +18876,14 @@
       </p:sp>
       <p:sp>
         <p:nvSpPr>
-          <p:cNvPr id="38" name="TextBox 37"/>
+          <p:cNvPr id="39" name="TextBox 38"/>
           <p:cNvSpPr txBox="1"/>
           <p:nvPr/>
         </p:nvSpPr>
         <p:spPr>
           <a:xfrm>
-            <a:off x="11259007" y="6286500"/>
-            <a:ext cx="402336" cy="182880"/>
+            <a:off x="530352" y="6327648"/>
+            <a:ext cx="8595360" cy="256032"/>
           </a:xfrm>
           <a:prstGeom prst="rect">
             <a:avLst/>
@@ -18056,6 +18896,92 @@
           </a:bodyPr>
           <a:lstStyle/>
           <a:p>
+            <a:pPr algn="l">
+              <a:spcBef>
+                <a:spcPts val="0"/>
+              </a:spcBef>
+              <a:spcAft>
+                <a:spcPts val="0"/>
+              </a:spcAft>
+            </a:pPr>
+            <a:r>
+              <a:rPr sz="850" b="0" i="0" lang="id-ID">
+                <a:solidFill>
+                  <a:srgbClr val="9FC7CF"/>
+                </a:solidFill>
+                <a:latin typeface="Calibri"/>
+              </a:rPr>
+              <a:t>Lopes dkk., Sci Rep 2021;11:22405 · DOI 10.1038/s41598-021-01541-7 · CC BY 4.0</a:t>
+            </a:r>
+          </a:p>
+        </p:txBody>
+      </p:sp>
+      <p:sp>
+        <p:nvSpPr>
+          <p:cNvPr id="40" name="Rounded Rectangle 39"/>
+          <p:cNvSpPr/>
+          <p:nvPr/>
+        </p:nvSpPr>
+        <p:spPr>
+          <a:xfrm>
+            <a:off x="11204143" y="6291072"/>
+            <a:ext cx="457200" cy="256032"/>
+          </a:xfrm>
+          <a:prstGeom prst="roundRect">
+            <a:avLst>
+              <a:gd name="adj" fmla="val 17857"/>
+            </a:avLst>
+          </a:prstGeom>
+          <a:solidFill>
+            <a:srgbClr val="E8F4F6"/>
+          </a:solidFill>
+          <a:ln>
+            <a:noFill/>
+          </a:ln>
+          <a:effectLst/>
+        </p:spPr>
+        <p:style>
+          <a:lnRef idx="1">
+            <a:schemeClr val="accent1"/>
+          </a:lnRef>
+          <a:fillRef idx="3">
+            <a:schemeClr val="accent1"/>
+          </a:fillRef>
+          <a:effectRef idx="2">
+            <a:schemeClr val="accent1"/>
+          </a:effectRef>
+          <a:fontRef idx="minor">
+            <a:schemeClr val="lt1"/>
+          </a:fontRef>
+        </p:style>
+        <p:txBody>
+          <a:bodyPr rtlCol="0" anchor="ctr"/>
+          <a:lstStyle/>
+          <a:p/>
+        </p:txBody>
+      </p:sp>
+      <p:sp>
+        <p:nvSpPr>
+          <p:cNvPr id="41" name="TextBox 40"/>
+          <p:cNvSpPr txBox="1"/>
+          <p:nvPr/>
+        </p:nvSpPr>
+        <p:spPr>
+          <a:xfrm>
+            <a:off x="11204143" y="6332220"/>
+            <a:ext cx="457200" cy="182880"/>
+          </a:xfrm>
+          <a:prstGeom prst="rect">
+            <a:avLst/>
+          </a:prstGeom>
+          <a:noFill/>
+        </p:spPr>
+        <p:txBody>
+          <a:bodyPr wrap="square" lIns="0" rIns="0" tIns="0" bIns="0" anchor="t">
+            <a:noAutofit/>
+          </a:bodyPr>
+          <a:lstStyle/>
+          <a:p>
             <a:pPr algn="ctr">
               <a:spcBef>
                 <a:spcPts val="0"/>
@@ -18067,7 +18993,7 @@
             <a:r>
               <a:rPr sz="950" b="1" i="0" lang="id-ID">
                 <a:solidFill>
-                  <a:srgbClr val="FFFFFF"/>
+                  <a:srgbClr val="0B4A5A"/>
                 </a:solidFill>
                 <a:latin typeface="Calibri"/>
               </a:rPr>
@@ -18108,17 +19034,9 @@
           <a:prstGeom prst="rect">
             <a:avLst/>
           </a:prstGeom>
-          <a:gradFill rotWithShape="1">
-            <a:gsLst>
-              <a:gs pos="0">
-                <a:srgbClr val="F9F7F3"/>
-              </a:gs>
-              <a:gs pos="100000">
-                <a:srgbClr val="E6EFF2"/>
-              </a:gs>
-            </a:gsLst>
-            <a:lin scaled="0" ang="19200000"/>
-          </a:gradFill>
+          <a:solidFill>
+            <a:srgbClr val="DFE9EC"/>
+          </a:solidFill>
           <a:ln>
             <a:noFill/>
           </a:ln>
@@ -18152,14 +19070,14 @@
         </p:nvSpPr>
         <p:spPr>
           <a:xfrm>
-            <a:off x="9098280" y="-2240280"/>
-            <a:ext cx="4480560" cy="4480560"/>
+            <a:off x="8732520" y="3520440"/>
+            <a:ext cx="5760720" cy="5760720"/>
           </a:xfrm>
           <a:prstGeom prst="ellipse">
             <a:avLst/>
           </a:prstGeom>
           <a:solidFill>
-            <a:srgbClr val="E4EFF1"/>
+            <a:srgbClr val="D2E1E4"/>
           </a:solidFill>
           <a:ln>
             <a:noFill/>
@@ -18188,20 +19106,20 @@
       </p:sp>
       <p:sp>
         <p:nvSpPr>
-          <p:cNvPr id="4" name="Oval 3"/>
+          <p:cNvPr id="4" name="Rectangle 3"/>
           <p:cNvSpPr/>
           <p:nvPr/>
         </p:nvSpPr>
         <p:spPr>
           <a:xfrm>
-            <a:off x="-1600200" y="4160520"/>
-            <a:ext cx="3931920" cy="3931920"/>
-          </a:xfrm>
-          <a:prstGeom prst="ellipse">
-            <a:avLst/>
-          </a:prstGeom>
-          <a:solidFill>
-            <a:srgbClr val="EAF3F4"/>
+            <a:off x="3309213" y="1417320"/>
+            <a:ext cx="7315" cy="4663440"/>
+          </a:xfrm>
+          <a:prstGeom prst="rect">
+            <a:avLst/>
+          </a:prstGeom>
+          <a:solidFill>
+            <a:srgbClr val="C7DCE1"/>
           </a:solidFill>
           <a:ln>
             <a:noFill/>
@@ -18236,16 +19154,14 @@
         </p:nvSpPr>
         <p:spPr>
           <a:xfrm>
-            <a:off x="0" y="6455664"/>
-            <a:ext cx="12191695" cy="402336"/>
-          </a:xfrm>
-          <a:prstGeom prst="rect">
-            <a:avLst/>
-          </a:prstGeom>
-          <a:solidFill>
-            <a:srgbClr val="DCE7EA">
-              <a:alpha val="85000"/>
-            </a:srgbClr>
+            <a:off x="6092647" y="1417320"/>
+            <a:ext cx="7315" cy="4663440"/>
+          </a:xfrm>
+          <a:prstGeom prst="rect">
+            <a:avLst/>
+          </a:prstGeom>
+          <a:solidFill>
+            <a:srgbClr val="C7DCE1"/>
           </a:solidFill>
           <a:ln>
             <a:noFill/>
@@ -18275,6 +19191,90 @@
       <p:sp>
         <p:nvSpPr>
           <p:cNvPr id="6" name="Rectangle 5"/>
+          <p:cNvSpPr/>
+          <p:nvPr/>
+        </p:nvSpPr>
+        <p:spPr>
+          <a:xfrm>
+            <a:off x="8875166" y="1417320"/>
+            <a:ext cx="7315" cy="4663440"/>
+          </a:xfrm>
+          <a:prstGeom prst="rect">
+            <a:avLst/>
+          </a:prstGeom>
+          <a:solidFill>
+            <a:srgbClr val="C7DCE1"/>
+          </a:solidFill>
+          <a:ln>
+            <a:noFill/>
+          </a:ln>
+          <a:effectLst/>
+        </p:spPr>
+        <p:style>
+          <a:lnRef idx="1">
+            <a:schemeClr val="accent1"/>
+          </a:lnRef>
+          <a:fillRef idx="3">
+            <a:schemeClr val="accent1"/>
+          </a:fillRef>
+          <a:effectRef idx="2">
+            <a:schemeClr val="accent1"/>
+          </a:effectRef>
+          <a:fontRef idx="minor">
+            <a:schemeClr val="lt1"/>
+          </a:fontRef>
+        </p:style>
+        <p:txBody>
+          <a:bodyPr rtlCol="0" anchor="ctr"/>
+          <a:lstStyle/>
+          <a:p/>
+        </p:txBody>
+      </p:sp>
+      <p:sp>
+        <p:nvSpPr>
+          <p:cNvPr id="7" name="Rectangle 6"/>
+          <p:cNvSpPr/>
+          <p:nvPr/>
+        </p:nvSpPr>
+        <p:spPr>
+          <a:xfrm>
+            <a:off x="0" y="0"/>
+            <a:ext cx="201168" cy="6858000"/>
+          </a:xfrm>
+          <a:prstGeom prst="rect">
+            <a:avLst/>
+          </a:prstGeom>
+          <a:solidFill>
+            <a:srgbClr val="0B4A5A"/>
+          </a:solidFill>
+          <a:ln>
+            <a:noFill/>
+          </a:ln>
+          <a:effectLst/>
+        </p:spPr>
+        <p:style>
+          <a:lnRef idx="1">
+            <a:schemeClr val="accent1"/>
+          </a:lnRef>
+          <a:fillRef idx="3">
+            <a:schemeClr val="accent1"/>
+          </a:fillRef>
+          <a:effectRef idx="2">
+            <a:schemeClr val="accent1"/>
+          </a:effectRef>
+          <a:fontRef idx="minor">
+            <a:schemeClr val="lt1"/>
+          </a:fontRef>
+        </p:style>
+        <p:txBody>
+          <a:bodyPr rtlCol="0" anchor="ctr"/>
+          <a:lstStyle/>
+          <a:p/>
+        </p:txBody>
+      </p:sp>
+      <p:sp>
+        <p:nvSpPr>
+          <p:cNvPr id="8" name="Rectangle 7"/>
           <p:cNvSpPr/>
           <p:nvPr/>
         </p:nvSpPr>
@@ -18324,20 +19324,20 @@
       </p:sp>
       <p:sp>
         <p:nvSpPr>
-          <p:cNvPr id="7" name="Rectangle 6"/>
+          <p:cNvPr id="9" name="Rectangle 8"/>
           <p:cNvSpPr/>
           <p:nvPr/>
         </p:nvSpPr>
         <p:spPr>
           <a:xfrm>
             <a:off x="0" y="1171346"/>
-            <a:ext cx="12191695" cy="45720"/>
-          </a:xfrm>
-          <a:prstGeom prst="rect">
-            <a:avLst/>
-          </a:prstGeom>
-          <a:solidFill>
-            <a:srgbClr val="14A0B4"/>
+            <a:ext cx="12191695" cy="64008"/>
+          </a:xfrm>
+          <a:prstGeom prst="rect">
+            <a:avLst/>
+          </a:prstGeom>
+          <a:solidFill>
+            <a:srgbClr val="D98A2B"/>
           </a:solidFill>
           <a:ln>
             <a:noFill/>
@@ -18366,7 +19366,7 @@
       </p:sp>
       <p:sp>
         <p:nvSpPr>
-          <p:cNvPr id="8" name="TextBox 7"/>
+          <p:cNvPr id="10" name="TextBox 9"/>
           <p:cNvSpPr txBox="1"/>
           <p:nvPr/>
         </p:nvSpPr>
@@ -18401,14 +19401,14 @@
                 </a:solidFill>
                 <a:latin typeface="Calibri"/>
               </a:rPr>
-              <a:t>LATAR BELAKANG</a:t>
-            </a:r>
-          </a:p>
-        </p:txBody>
-      </p:sp>
-      <p:sp>
-        <p:nvSpPr>
-          <p:cNvPr id="9" name="TextBox 8"/>
+              <a:t>04  ·  LATAR BELAKANG</a:t>
+            </a:r>
+          </a:p>
+        </p:txBody>
+      </p:sp>
+      <p:sp>
+        <p:nvSpPr>
+          <p:cNvPr id="11" name="TextBox 10"/>
           <p:cNvSpPr txBox="1"/>
           <p:nvPr/>
         </p:nvSpPr>
@@ -18450,7 +19450,7 @@
       </p:sp>
       <p:sp>
         <p:nvSpPr>
-          <p:cNvPr id="10" name="Rounded Rectangle 9"/>
+          <p:cNvPr id="12" name="Rounded Rectangle 11"/>
           <p:cNvSpPr/>
           <p:nvPr/>
         </p:nvSpPr>
@@ -18496,7 +19496,7 @@
       </p:sp>
       <p:sp>
         <p:nvSpPr>
-          <p:cNvPr id="11" name="Rectangle 10"/>
+          <p:cNvPr id="13" name="Rectangle 12"/>
           <p:cNvSpPr/>
           <p:nvPr/>
         </p:nvSpPr>
@@ -18538,7 +19538,7 @@
       </p:sp>
       <p:sp>
         <p:nvSpPr>
-          <p:cNvPr id="12" name="TextBox 11"/>
+          <p:cNvPr id="14" name="TextBox 13"/>
           <p:cNvSpPr txBox="1"/>
           <p:nvPr/>
         </p:nvSpPr>
@@ -18580,7 +19580,7 @@
       </p:sp>
       <p:sp>
         <p:nvSpPr>
-          <p:cNvPr id="13" name="Rounded Rectangle 12"/>
+          <p:cNvPr id="15" name="Rounded Rectangle 14"/>
           <p:cNvSpPr/>
           <p:nvPr/>
         </p:nvSpPr>
@@ -18624,7 +19624,7 @@
       </p:sp>
       <p:sp>
         <p:nvSpPr>
-          <p:cNvPr id="14" name="TextBox 13"/>
+          <p:cNvPr id="16" name="TextBox 15"/>
           <p:cNvSpPr txBox="1"/>
           <p:nvPr/>
         </p:nvSpPr>
@@ -18666,7 +19666,7 @@
       </p:sp>
       <p:sp>
         <p:nvSpPr>
-          <p:cNvPr id="15" name="Rounded Rectangle 14"/>
+          <p:cNvPr id="17" name="Rounded Rectangle 16"/>
           <p:cNvSpPr/>
           <p:nvPr/>
         </p:nvSpPr>
@@ -18710,7 +19710,7 @@
       </p:sp>
       <p:sp>
         <p:nvSpPr>
-          <p:cNvPr id="16" name="Rectangle 15"/>
+          <p:cNvPr id="18" name="Rectangle 17"/>
           <p:cNvSpPr/>
           <p:nvPr/>
         </p:nvSpPr>
@@ -18752,7 +19752,7 @@
       </p:sp>
       <p:sp>
         <p:nvSpPr>
-          <p:cNvPr id="17" name="Rounded Rectangle 16"/>
+          <p:cNvPr id="19" name="Rounded Rectangle 18"/>
           <p:cNvSpPr/>
           <p:nvPr/>
         </p:nvSpPr>
@@ -18796,7 +19796,7 @@
       </p:sp>
       <p:sp>
         <p:nvSpPr>
-          <p:cNvPr id="18" name="TextBox 17"/>
+          <p:cNvPr id="20" name="TextBox 19"/>
           <p:cNvSpPr txBox="1"/>
           <p:nvPr/>
         </p:nvSpPr>
@@ -18838,7 +19838,7 @@
       </p:sp>
       <p:sp>
         <p:nvSpPr>
-          <p:cNvPr id="19" name="TextBox 18"/>
+          <p:cNvPr id="21" name="TextBox 20"/>
           <p:cNvSpPr txBox="1"/>
           <p:nvPr/>
         </p:nvSpPr>
@@ -18880,7 +19880,7 @@
       </p:sp>
       <p:sp>
         <p:nvSpPr>
-          <p:cNvPr id="20" name="TextBox 19"/>
+          <p:cNvPr id="22" name="TextBox 21"/>
           <p:cNvSpPr txBox="1"/>
           <p:nvPr/>
         </p:nvSpPr>
@@ -18922,7 +19922,7 @@
       </p:sp>
       <p:sp>
         <p:nvSpPr>
-          <p:cNvPr id="21" name="Rounded Rectangle 20"/>
+          <p:cNvPr id="23" name="Rounded Rectangle 22"/>
           <p:cNvSpPr/>
           <p:nvPr/>
         </p:nvSpPr>
@@ -18966,7 +19966,7 @@
       </p:sp>
       <p:sp>
         <p:nvSpPr>
-          <p:cNvPr id="22" name="Rectangle 21"/>
+          <p:cNvPr id="24" name="Rectangle 23"/>
           <p:cNvSpPr/>
           <p:nvPr/>
         </p:nvSpPr>
@@ -19008,7 +20008,7 @@
       </p:sp>
       <p:sp>
         <p:nvSpPr>
-          <p:cNvPr id="23" name="TextBox 22"/>
+          <p:cNvPr id="25" name="TextBox 24"/>
           <p:cNvSpPr txBox="1"/>
           <p:nvPr/>
         </p:nvSpPr>
@@ -19050,7 +20050,7 @@
       </p:sp>
       <p:sp>
         <p:nvSpPr>
-          <p:cNvPr id="24" name="TextBox 23"/>
+          <p:cNvPr id="26" name="TextBox 25"/>
           <p:cNvSpPr txBox="1"/>
           <p:nvPr/>
         </p:nvSpPr>
@@ -19095,7 +20095,7 @@
       </p:sp>
       <p:sp>
         <p:nvSpPr>
-          <p:cNvPr id="25" name="TextBox 24"/>
+          <p:cNvPr id="27" name="TextBox 26"/>
           <p:cNvSpPr txBox="1"/>
           <p:nvPr/>
         </p:nvSpPr>
@@ -19137,7 +20137,7 @@
       </p:sp>
       <p:sp>
         <p:nvSpPr>
-          <p:cNvPr id="26" name="Rounded Rectangle 25"/>
+          <p:cNvPr id="28" name="Rounded Rectangle 27"/>
           <p:cNvSpPr/>
           <p:nvPr/>
         </p:nvSpPr>
@@ -19181,7 +20181,7 @@
       </p:sp>
       <p:sp>
         <p:nvSpPr>
-          <p:cNvPr id="27" name="Rectangle 26"/>
+          <p:cNvPr id="29" name="Rectangle 28"/>
           <p:cNvSpPr/>
           <p:nvPr/>
         </p:nvSpPr>
@@ -19223,7 +20223,7 @@
       </p:sp>
       <p:sp>
         <p:nvSpPr>
-          <p:cNvPr id="28" name="TextBox 27"/>
+          <p:cNvPr id="30" name="TextBox 29"/>
           <p:cNvSpPr txBox="1"/>
           <p:nvPr/>
         </p:nvSpPr>
@@ -19265,7 +20265,7 @@
       </p:sp>
       <p:sp>
         <p:nvSpPr>
-          <p:cNvPr id="29" name="TextBox 28"/>
+          <p:cNvPr id="31" name="TextBox 30"/>
           <p:cNvSpPr txBox="1"/>
           <p:nvPr/>
         </p:nvSpPr>
@@ -19310,7 +20310,7 @@
       </p:sp>
       <p:sp>
         <p:nvSpPr>
-          <p:cNvPr id="30" name="TextBox 29"/>
+          <p:cNvPr id="32" name="TextBox 31"/>
           <p:cNvSpPr txBox="1"/>
           <p:nvPr/>
         </p:nvSpPr>
@@ -19352,7 +20352,7 @@
       </p:sp>
       <p:sp>
         <p:nvSpPr>
-          <p:cNvPr id="31" name="Rounded Rectangle 30"/>
+          <p:cNvPr id="33" name="Rounded Rectangle 32"/>
           <p:cNvSpPr/>
           <p:nvPr/>
         </p:nvSpPr>
@@ -19396,7 +20396,7 @@
       </p:sp>
       <p:sp>
         <p:nvSpPr>
-          <p:cNvPr id="32" name="Rectangle 31"/>
+          <p:cNvPr id="34" name="Rectangle 33"/>
           <p:cNvSpPr/>
           <p:nvPr/>
         </p:nvSpPr>
@@ -19438,7 +20438,7 @@
       </p:sp>
       <p:sp>
         <p:nvSpPr>
-          <p:cNvPr id="33" name="TextBox 32"/>
+          <p:cNvPr id="35" name="TextBox 34"/>
           <p:cNvSpPr txBox="1"/>
           <p:nvPr/>
         </p:nvSpPr>
@@ -19480,7 +20480,7 @@
       </p:sp>
       <p:sp>
         <p:nvSpPr>
-          <p:cNvPr id="34" name="TextBox 33"/>
+          <p:cNvPr id="36" name="TextBox 35"/>
           <p:cNvSpPr txBox="1"/>
           <p:nvPr/>
         </p:nvSpPr>
@@ -19525,7 +20525,7 @@
       </p:sp>
       <p:sp>
         <p:nvSpPr>
-          <p:cNvPr id="35" name="TextBox 34"/>
+          <p:cNvPr id="37" name="TextBox 36"/>
           <p:cNvSpPr txBox="1"/>
           <p:nvPr/>
         </p:nvSpPr>
@@ -19567,7 +20567,7 @@
       </p:sp>
       <p:sp>
         <p:nvSpPr>
-          <p:cNvPr id="36" name="Rounded Rectangle 35"/>
+          <p:cNvPr id="38" name="Rounded Rectangle 37"/>
           <p:cNvSpPr/>
           <p:nvPr/>
         </p:nvSpPr>
@@ -19611,7 +20611,7 @@
       </p:sp>
       <p:sp>
         <p:nvSpPr>
-          <p:cNvPr id="37" name="TextBox 36"/>
+          <p:cNvPr id="39" name="TextBox 38"/>
           <p:cNvSpPr txBox="1"/>
           <p:nvPr/>
         </p:nvSpPr>
@@ -19653,20 +20653,20 @@
       </p:sp>
       <p:sp>
         <p:nvSpPr>
-          <p:cNvPr id="38" name="Rectangle 37"/>
+          <p:cNvPr id="40" name="Rectangle 39"/>
           <p:cNvSpPr/>
           <p:nvPr/>
         </p:nvSpPr>
         <p:spPr>
           <a:xfrm>
-            <a:off x="530352" y="6254496"/>
-            <a:ext cx="11130991" cy="12801"/>
-          </a:xfrm>
-          <a:prstGeom prst="rect">
-            <a:avLst/>
-          </a:prstGeom>
-          <a:solidFill>
-            <a:srgbClr val="D7E3E6"/>
+            <a:off x="0" y="6163056"/>
+            <a:ext cx="12191695" cy="694944"/>
+          </a:xfrm>
+          <a:prstGeom prst="rect">
+            <a:avLst/>
+          </a:prstGeom>
+          <a:solidFill>
+            <a:srgbClr val="0B4A5A"/>
           </a:solidFill>
           <a:ln>
             <a:noFill/>
@@ -19695,64 +20695,20 @@
       </p:sp>
       <p:sp>
         <p:nvSpPr>
-          <p:cNvPr id="39" name="TextBox 38"/>
-          <p:cNvSpPr txBox="1"/>
-          <p:nvPr/>
-        </p:nvSpPr>
-        <p:spPr>
-          <a:xfrm>
-            <a:off x="530352" y="6291072"/>
-            <a:ext cx="8595360" cy="256032"/>
-          </a:xfrm>
-          <a:prstGeom prst="rect">
-            <a:avLst/>
-          </a:prstGeom>
-          <a:noFill/>
-        </p:spPr>
-        <p:txBody>
-          <a:bodyPr wrap="square" lIns="0" rIns="0" tIns="0" bIns="0" anchor="t">
-            <a:noAutofit/>
-          </a:bodyPr>
-          <a:lstStyle/>
-          <a:p>
-            <a:pPr algn="l">
-              <a:spcBef>
-                <a:spcPts val="0"/>
-              </a:spcBef>
-              <a:spcAft>
-                <a:spcPts val="0"/>
-              </a:spcAft>
-            </a:pPr>
-            <a:r>
-              <a:rPr sz="900" b="0" i="0" lang="id-ID">
-                <a:solidFill>
-                  <a:srgbClr val="5C757C"/>
-                </a:solidFill>
-                <a:latin typeface="Calibri"/>
-              </a:rPr>
-              <a:t>Lopes dkk., Sci Rep 2021;11:22405 · DOI 10.1038/s41598-021-01541-7 · CC BY 4.0</a:t>
-            </a:r>
-          </a:p>
-        </p:txBody>
-      </p:sp>
-      <p:sp>
-        <p:nvSpPr>
-          <p:cNvPr id="40" name="Rounded Rectangle 39"/>
+          <p:cNvPr id="41" name="Rectangle 40"/>
           <p:cNvSpPr/>
           <p:nvPr/>
         </p:nvSpPr>
         <p:spPr>
           <a:xfrm>
-            <a:off x="11259007" y="6227064"/>
-            <a:ext cx="402336" cy="256032"/>
-          </a:xfrm>
-          <a:prstGeom prst="roundRect">
-            <a:avLst>
-              <a:gd name="adj" fmla="val 17857"/>
-            </a:avLst>
-          </a:prstGeom>
-          <a:solidFill>
-            <a:srgbClr val="0B4A5A"/>
+            <a:off x="0" y="6163056"/>
+            <a:ext cx="12191695" cy="41148"/>
+          </a:xfrm>
+          <a:prstGeom prst="rect">
+            <a:avLst/>
+          </a:prstGeom>
+          <a:solidFill>
+            <a:srgbClr val="D98A2B"/>
           </a:solidFill>
           <a:ln>
             <a:noFill/>
@@ -19781,14 +20737,14 @@
       </p:sp>
       <p:sp>
         <p:nvSpPr>
-          <p:cNvPr id="41" name="TextBox 40"/>
+          <p:cNvPr id="42" name="TextBox 41"/>
           <p:cNvSpPr txBox="1"/>
           <p:nvPr/>
         </p:nvSpPr>
         <p:spPr>
           <a:xfrm>
-            <a:off x="11259007" y="6286500"/>
-            <a:ext cx="402336" cy="182880"/>
+            <a:off x="530352" y="6327648"/>
+            <a:ext cx="8595360" cy="256032"/>
           </a:xfrm>
           <a:prstGeom prst="rect">
             <a:avLst/>
@@ -19801,6 +20757,92 @@
           </a:bodyPr>
           <a:lstStyle/>
           <a:p>
+            <a:pPr algn="l">
+              <a:spcBef>
+                <a:spcPts val="0"/>
+              </a:spcBef>
+              <a:spcAft>
+                <a:spcPts val="0"/>
+              </a:spcAft>
+            </a:pPr>
+            <a:r>
+              <a:rPr sz="850" b="0" i="0" lang="id-ID">
+                <a:solidFill>
+                  <a:srgbClr val="9FC7CF"/>
+                </a:solidFill>
+                <a:latin typeface="Calibri"/>
+              </a:rPr>
+              <a:t>Lopes dkk., Sci Rep 2021;11:22405 · DOI 10.1038/s41598-021-01541-7 · CC BY 4.0</a:t>
+            </a:r>
+          </a:p>
+        </p:txBody>
+      </p:sp>
+      <p:sp>
+        <p:nvSpPr>
+          <p:cNvPr id="43" name="Rounded Rectangle 42"/>
+          <p:cNvSpPr/>
+          <p:nvPr/>
+        </p:nvSpPr>
+        <p:spPr>
+          <a:xfrm>
+            <a:off x="11204143" y="6291072"/>
+            <a:ext cx="457200" cy="256032"/>
+          </a:xfrm>
+          <a:prstGeom prst="roundRect">
+            <a:avLst>
+              <a:gd name="adj" fmla="val 17857"/>
+            </a:avLst>
+          </a:prstGeom>
+          <a:solidFill>
+            <a:srgbClr val="E8F4F6"/>
+          </a:solidFill>
+          <a:ln>
+            <a:noFill/>
+          </a:ln>
+          <a:effectLst/>
+        </p:spPr>
+        <p:style>
+          <a:lnRef idx="1">
+            <a:schemeClr val="accent1"/>
+          </a:lnRef>
+          <a:fillRef idx="3">
+            <a:schemeClr val="accent1"/>
+          </a:fillRef>
+          <a:effectRef idx="2">
+            <a:schemeClr val="accent1"/>
+          </a:effectRef>
+          <a:fontRef idx="minor">
+            <a:schemeClr val="lt1"/>
+          </a:fontRef>
+        </p:style>
+        <p:txBody>
+          <a:bodyPr rtlCol="0" anchor="ctr"/>
+          <a:lstStyle/>
+          <a:p/>
+        </p:txBody>
+      </p:sp>
+      <p:sp>
+        <p:nvSpPr>
+          <p:cNvPr id="44" name="TextBox 43"/>
+          <p:cNvSpPr txBox="1"/>
+          <p:nvPr/>
+        </p:nvSpPr>
+        <p:spPr>
+          <a:xfrm>
+            <a:off x="11204143" y="6332220"/>
+            <a:ext cx="457200" cy="182880"/>
+          </a:xfrm>
+          <a:prstGeom prst="rect">
+            <a:avLst/>
+          </a:prstGeom>
+          <a:noFill/>
+        </p:spPr>
+        <p:txBody>
+          <a:bodyPr wrap="square" lIns="0" rIns="0" tIns="0" bIns="0" anchor="t">
+            <a:noAutofit/>
+          </a:bodyPr>
+          <a:lstStyle/>
+          <a:p>
             <a:pPr algn="ctr">
               <a:spcBef>
                 <a:spcPts val="0"/>
@@ -19812,7 +20854,7 @@
             <a:r>
               <a:rPr sz="950" b="1" i="0" lang="id-ID">
                 <a:solidFill>
-                  <a:srgbClr val="FFFFFF"/>
+                  <a:srgbClr val="0B4A5A"/>
                 </a:solidFill>
                 <a:latin typeface="Calibri"/>
               </a:rPr>
@@ -19853,17 +20895,9 @@
           <a:prstGeom prst="rect">
             <a:avLst/>
           </a:prstGeom>
-          <a:gradFill rotWithShape="1">
-            <a:gsLst>
-              <a:gs pos="0">
-                <a:srgbClr val="F9F7F3"/>
-              </a:gs>
-              <a:gs pos="100000">
-                <a:srgbClr val="E6EFF2"/>
-              </a:gs>
-            </a:gsLst>
-            <a:lin scaled="0" ang="19200000"/>
-          </a:gradFill>
+          <a:solidFill>
+            <a:srgbClr val="DBE8EF"/>
+          </a:solidFill>
           <a:ln>
             <a:noFill/>
           </a:ln>
@@ -19897,14 +20931,14 @@
         </p:nvSpPr>
         <p:spPr>
           <a:xfrm>
-            <a:off x="9098280" y="-2240280"/>
-            <a:ext cx="4480560" cy="4480560"/>
+            <a:off x="8732520" y="3520440"/>
+            <a:ext cx="5760720" cy="5760720"/>
           </a:xfrm>
           <a:prstGeom prst="ellipse">
             <a:avLst/>
           </a:prstGeom>
           <a:solidFill>
-            <a:srgbClr val="E4EFF1"/>
+            <a:srgbClr val="CFE0E7"/>
           </a:solidFill>
           <a:ln>
             <a:noFill/>
@@ -19933,20 +20967,20 @@
       </p:sp>
       <p:sp>
         <p:nvSpPr>
-          <p:cNvPr id="4" name="Oval 3"/>
+          <p:cNvPr id="4" name="Rectangle 3"/>
           <p:cNvSpPr/>
           <p:nvPr/>
         </p:nvSpPr>
         <p:spPr>
           <a:xfrm>
-            <a:off x="-1600200" y="4160520"/>
-            <a:ext cx="3931920" cy="3931920"/>
-          </a:xfrm>
-          <a:prstGeom prst="ellipse">
-            <a:avLst/>
-          </a:prstGeom>
-          <a:solidFill>
-            <a:srgbClr val="EAF3F4"/>
+            <a:off x="3309213" y="1417320"/>
+            <a:ext cx="7315" cy="4663440"/>
+          </a:xfrm>
+          <a:prstGeom prst="rect">
+            <a:avLst/>
+          </a:prstGeom>
+          <a:solidFill>
+            <a:srgbClr val="C7DCE1"/>
           </a:solidFill>
           <a:ln>
             <a:noFill/>
@@ -19981,16 +21015,14 @@
         </p:nvSpPr>
         <p:spPr>
           <a:xfrm>
-            <a:off x="0" y="6455664"/>
-            <a:ext cx="12191695" cy="402336"/>
-          </a:xfrm>
-          <a:prstGeom prst="rect">
-            <a:avLst/>
-          </a:prstGeom>
-          <a:solidFill>
-            <a:srgbClr val="DCE7EA">
-              <a:alpha val="85000"/>
-            </a:srgbClr>
+            <a:off x="6092647" y="1417320"/>
+            <a:ext cx="7315" cy="4663440"/>
+          </a:xfrm>
+          <a:prstGeom prst="rect">
+            <a:avLst/>
+          </a:prstGeom>
+          <a:solidFill>
+            <a:srgbClr val="C7DCE1"/>
           </a:solidFill>
           <a:ln>
             <a:noFill/>
@@ -20020,6 +21052,90 @@
       <p:sp>
         <p:nvSpPr>
           <p:cNvPr id="6" name="Rectangle 5"/>
+          <p:cNvSpPr/>
+          <p:nvPr/>
+        </p:nvSpPr>
+        <p:spPr>
+          <a:xfrm>
+            <a:off x="8875166" y="1417320"/>
+            <a:ext cx="7315" cy="4663440"/>
+          </a:xfrm>
+          <a:prstGeom prst="rect">
+            <a:avLst/>
+          </a:prstGeom>
+          <a:solidFill>
+            <a:srgbClr val="C7DCE1"/>
+          </a:solidFill>
+          <a:ln>
+            <a:noFill/>
+          </a:ln>
+          <a:effectLst/>
+        </p:spPr>
+        <p:style>
+          <a:lnRef idx="1">
+            <a:schemeClr val="accent1"/>
+          </a:lnRef>
+          <a:fillRef idx="3">
+            <a:schemeClr val="accent1"/>
+          </a:fillRef>
+          <a:effectRef idx="2">
+            <a:schemeClr val="accent1"/>
+          </a:effectRef>
+          <a:fontRef idx="minor">
+            <a:schemeClr val="lt1"/>
+          </a:fontRef>
+        </p:style>
+        <p:txBody>
+          <a:bodyPr rtlCol="0" anchor="ctr"/>
+          <a:lstStyle/>
+          <a:p/>
+        </p:txBody>
+      </p:sp>
+      <p:sp>
+        <p:nvSpPr>
+          <p:cNvPr id="7" name="Rectangle 6"/>
+          <p:cNvSpPr/>
+          <p:nvPr/>
+        </p:nvSpPr>
+        <p:spPr>
+          <a:xfrm>
+            <a:off x="0" y="0"/>
+            <a:ext cx="201168" cy="6858000"/>
+          </a:xfrm>
+          <a:prstGeom prst="rect">
+            <a:avLst/>
+          </a:prstGeom>
+          <a:solidFill>
+            <a:srgbClr val="0B4A5A"/>
+          </a:solidFill>
+          <a:ln>
+            <a:noFill/>
+          </a:ln>
+          <a:effectLst/>
+        </p:spPr>
+        <p:style>
+          <a:lnRef idx="1">
+            <a:schemeClr val="accent1"/>
+          </a:lnRef>
+          <a:fillRef idx="3">
+            <a:schemeClr val="accent1"/>
+          </a:fillRef>
+          <a:effectRef idx="2">
+            <a:schemeClr val="accent1"/>
+          </a:effectRef>
+          <a:fontRef idx="minor">
+            <a:schemeClr val="lt1"/>
+          </a:fontRef>
+        </p:style>
+        <p:txBody>
+          <a:bodyPr rtlCol="0" anchor="ctr"/>
+          <a:lstStyle/>
+          <a:p/>
+        </p:txBody>
+      </p:sp>
+      <p:sp>
+        <p:nvSpPr>
+          <p:cNvPr id="8" name="Rectangle 7"/>
           <p:cNvSpPr/>
           <p:nvPr/>
         </p:nvSpPr>
@@ -20069,20 +21185,20 @@
       </p:sp>
       <p:sp>
         <p:nvSpPr>
-          <p:cNvPr id="7" name="Rectangle 6"/>
+          <p:cNvPr id="9" name="Rectangle 8"/>
           <p:cNvSpPr/>
           <p:nvPr/>
         </p:nvSpPr>
         <p:spPr>
           <a:xfrm>
             <a:off x="0" y="1171346"/>
-            <a:ext cx="12191695" cy="45720"/>
-          </a:xfrm>
-          <a:prstGeom prst="rect">
-            <a:avLst/>
-          </a:prstGeom>
-          <a:solidFill>
-            <a:srgbClr val="14A0B4"/>
+            <a:ext cx="12191695" cy="64008"/>
+          </a:xfrm>
+          <a:prstGeom prst="rect">
+            <a:avLst/>
+          </a:prstGeom>
+          <a:solidFill>
+            <a:srgbClr val="D98A2B"/>
           </a:solidFill>
           <a:ln>
             <a:noFill/>
@@ -20111,7 +21227,7 @@
       </p:sp>
       <p:sp>
         <p:nvSpPr>
-          <p:cNvPr id="8" name="TextBox 7"/>
+          <p:cNvPr id="10" name="TextBox 9"/>
           <p:cNvSpPr txBox="1"/>
           <p:nvPr/>
         </p:nvSpPr>
@@ -20146,14 +21262,14 @@
                 </a:solidFill>
                 <a:latin typeface="Calibri"/>
               </a:rPr>
-              <a:t>TUJUAN</a:t>
-            </a:r>
-          </a:p>
-        </p:txBody>
-      </p:sp>
-      <p:sp>
-        <p:nvSpPr>
-          <p:cNvPr id="9" name="TextBox 8"/>
+              <a:t>05  ·  TUJUAN</a:t>
+            </a:r>
+          </a:p>
+        </p:txBody>
+      </p:sp>
+      <p:sp>
+        <p:nvSpPr>
+          <p:cNvPr id="11" name="TextBox 10"/>
           <p:cNvSpPr txBox="1"/>
           <p:nvPr/>
         </p:nvSpPr>
@@ -20195,7 +21311,7 @@
       </p:sp>
       <p:sp>
         <p:nvSpPr>
-          <p:cNvPr id="10" name="Rounded Rectangle 9"/>
+          <p:cNvPr id="12" name="Rounded Rectangle 11"/>
           <p:cNvSpPr/>
           <p:nvPr/>
         </p:nvSpPr>
@@ -20210,12 +21326,10 @@
             </a:avLst>
           </a:prstGeom>
           <a:solidFill>
-            <a:srgbClr val="FFFFFF"/>
-          </a:solidFill>
-          <a:ln w="9525">
-            <a:solidFill>
-              <a:srgbClr val="D7E3E6"/>
-            </a:solidFill>
+            <a:srgbClr val="08262E"/>
+          </a:solidFill>
+          <a:ln>
+            <a:noFill/>
           </a:ln>
           <a:effectLst/>
         </p:spPr>
@@ -20241,7 +21355,7 @@
       </p:sp>
       <p:sp>
         <p:nvSpPr>
-          <p:cNvPr id="11" name="Rectangle 10"/>
+          <p:cNvPr id="13" name="Rectangle 12"/>
           <p:cNvSpPr/>
           <p:nvPr/>
         </p:nvSpPr>
@@ -20254,7 +21368,7 @@
             <a:avLst/>
           </a:prstGeom>
           <a:solidFill>
-            <a:srgbClr val="FFFFFF"/>
+            <a:srgbClr val="D98A2B"/>
           </a:solidFill>
           <a:ln>
             <a:noFill/>
@@ -20283,7 +21397,7 @@
       </p:sp>
       <p:sp>
         <p:nvSpPr>
-          <p:cNvPr id="12" name="TextBox 11"/>
+          <p:cNvPr id="14" name="TextBox 13"/>
           <p:cNvSpPr txBox="1"/>
           <p:nvPr/>
         </p:nvSpPr>
@@ -20325,7 +21439,7 @@
       </p:sp>
       <p:sp>
         <p:nvSpPr>
-          <p:cNvPr id="13" name="Rounded Rectangle 12"/>
+          <p:cNvPr id="15" name="Rounded Rectangle 14"/>
           <p:cNvSpPr/>
           <p:nvPr/>
         </p:nvSpPr>
@@ -20369,7 +21483,7 @@
       </p:sp>
       <p:sp>
         <p:nvSpPr>
-          <p:cNvPr id="14" name="TextBox 13"/>
+          <p:cNvPr id="16" name="TextBox 15"/>
           <p:cNvSpPr txBox="1"/>
           <p:nvPr/>
         </p:nvSpPr>
@@ -20411,7 +21525,7 @@
       </p:sp>
       <p:sp>
         <p:nvSpPr>
-          <p:cNvPr id="15" name="TextBox 14"/>
+          <p:cNvPr id="17" name="TextBox 16"/>
           <p:cNvSpPr txBox="1"/>
           <p:nvPr/>
         </p:nvSpPr>
@@ -20453,7 +21567,7 @@
       </p:sp>
       <p:sp>
         <p:nvSpPr>
-          <p:cNvPr id="16" name="TextBox 15"/>
+          <p:cNvPr id="18" name="TextBox 17"/>
           <p:cNvSpPr txBox="1"/>
           <p:nvPr/>
         </p:nvSpPr>
@@ -20498,7 +21612,7 @@
       </p:sp>
       <p:sp>
         <p:nvSpPr>
-          <p:cNvPr id="17" name="Rounded Rectangle 16"/>
+          <p:cNvPr id="19" name="Rounded Rectangle 18"/>
           <p:cNvSpPr/>
           <p:nvPr/>
         </p:nvSpPr>
@@ -20542,7 +21656,7 @@
       </p:sp>
       <p:sp>
         <p:nvSpPr>
-          <p:cNvPr id="18" name="TextBox 17"/>
+          <p:cNvPr id="20" name="TextBox 19"/>
           <p:cNvSpPr txBox="1"/>
           <p:nvPr/>
         </p:nvSpPr>
@@ -20584,7 +21698,7 @@
       </p:sp>
       <p:sp>
         <p:nvSpPr>
-          <p:cNvPr id="19" name="TextBox 18"/>
+          <p:cNvPr id="21" name="TextBox 20"/>
           <p:cNvSpPr txBox="1"/>
           <p:nvPr/>
         </p:nvSpPr>
@@ -20626,7 +21740,7 @@
       </p:sp>
       <p:sp>
         <p:nvSpPr>
-          <p:cNvPr id="20" name="TextBox 19"/>
+          <p:cNvPr id="22" name="TextBox 21"/>
           <p:cNvSpPr txBox="1"/>
           <p:nvPr/>
         </p:nvSpPr>
@@ -20671,7 +21785,7 @@
       </p:sp>
       <p:sp>
         <p:nvSpPr>
-          <p:cNvPr id="21" name="Rounded Rectangle 20"/>
+          <p:cNvPr id="23" name="Rounded Rectangle 22"/>
           <p:cNvSpPr/>
           <p:nvPr/>
         </p:nvSpPr>
@@ -20715,7 +21829,7 @@
       </p:sp>
       <p:sp>
         <p:nvSpPr>
-          <p:cNvPr id="22" name="TextBox 21"/>
+          <p:cNvPr id="24" name="TextBox 23"/>
           <p:cNvSpPr txBox="1"/>
           <p:nvPr/>
         </p:nvSpPr>
@@ -20757,7 +21871,7 @@
       </p:sp>
       <p:sp>
         <p:nvSpPr>
-          <p:cNvPr id="23" name="TextBox 22"/>
+          <p:cNvPr id="25" name="TextBox 24"/>
           <p:cNvSpPr txBox="1"/>
           <p:nvPr/>
         </p:nvSpPr>
@@ -20799,7 +21913,7 @@
       </p:sp>
       <p:sp>
         <p:nvSpPr>
-          <p:cNvPr id="24" name="TextBox 23"/>
+          <p:cNvPr id="26" name="TextBox 25"/>
           <p:cNvSpPr txBox="1"/>
           <p:nvPr/>
         </p:nvSpPr>
@@ -20844,7 +21958,7 @@
       </p:sp>
       <p:sp>
         <p:nvSpPr>
-          <p:cNvPr id="25" name="Rounded Rectangle 24"/>
+          <p:cNvPr id="27" name="Rounded Rectangle 26"/>
           <p:cNvSpPr/>
           <p:nvPr/>
         </p:nvSpPr>
@@ -20888,7 +22002,7 @@
       </p:sp>
       <p:sp>
         <p:nvSpPr>
-          <p:cNvPr id="26" name="TextBox 25"/>
+          <p:cNvPr id="28" name="TextBox 27"/>
           <p:cNvSpPr txBox="1"/>
           <p:nvPr/>
         </p:nvSpPr>
@@ -20930,7 +22044,7 @@
       </p:sp>
       <p:sp>
         <p:nvSpPr>
-          <p:cNvPr id="27" name="TextBox 26"/>
+          <p:cNvPr id="29" name="TextBox 28"/>
           <p:cNvSpPr txBox="1"/>
           <p:nvPr/>
         </p:nvSpPr>
@@ -20972,7 +22086,7 @@
       </p:sp>
       <p:sp>
         <p:nvSpPr>
-          <p:cNvPr id="28" name="TextBox 27"/>
+          <p:cNvPr id="30" name="TextBox 29"/>
           <p:cNvSpPr txBox="1"/>
           <p:nvPr/>
         </p:nvSpPr>
@@ -21017,7 +22131,7 @@
       </p:sp>
       <p:sp>
         <p:nvSpPr>
-          <p:cNvPr id="29" name="Rounded Rectangle 28"/>
+          <p:cNvPr id="31" name="Rounded Rectangle 30"/>
           <p:cNvSpPr/>
           <p:nvPr/>
         </p:nvSpPr>
@@ -21061,7 +22175,7 @@
       </p:sp>
       <p:sp>
         <p:nvSpPr>
-          <p:cNvPr id="30" name="TextBox 29"/>
+          <p:cNvPr id="32" name="TextBox 31"/>
           <p:cNvSpPr txBox="1"/>
           <p:nvPr/>
         </p:nvSpPr>
@@ -21103,7 +22217,7 @@
       </p:sp>
       <p:sp>
         <p:nvSpPr>
-          <p:cNvPr id="31" name="Rounded Rectangle 30"/>
+          <p:cNvPr id="33" name="Rounded Rectangle 32"/>
           <p:cNvSpPr/>
           <p:nvPr/>
         </p:nvSpPr>
@@ -21147,7 +22261,7 @@
       </p:sp>
       <p:sp>
         <p:nvSpPr>
-          <p:cNvPr id="32" name="TextBox 31"/>
+          <p:cNvPr id="34" name="TextBox 33"/>
           <p:cNvSpPr txBox="1"/>
           <p:nvPr/>
         </p:nvSpPr>
@@ -21189,7 +22303,7 @@
       </p:sp>
       <p:sp>
         <p:nvSpPr>
-          <p:cNvPr id="33" name="TextBox 32"/>
+          <p:cNvPr id="35" name="TextBox 34"/>
           <p:cNvSpPr txBox="1"/>
           <p:nvPr/>
         </p:nvSpPr>
@@ -21231,7 +22345,7 @@
       </p:sp>
       <p:sp>
         <p:nvSpPr>
-          <p:cNvPr id="34" name="Rounded Rectangle 33"/>
+          <p:cNvPr id="36" name="Rounded Rectangle 35"/>
           <p:cNvSpPr/>
           <p:nvPr/>
         </p:nvSpPr>
@@ -21275,7 +22389,7 @@
       </p:sp>
       <p:sp>
         <p:nvSpPr>
-          <p:cNvPr id="35" name="TextBox 34"/>
+          <p:cNvPr id="37" name="TextBox 36"/>
           <p:cNvSpPr txBox="1"/>
           <p:nvPr/>
         </p:nvSpPr>
@@ -21317,7 +22431,7 @@
       </p:sp>
       <p:sp>
         <p:nvSpPr>
-          <p:cNvPr id="36" name="TextBox 35"/>
+          <p:cNvPr id="38" name="TextBox 37"/>
           <p:cNvSpPr txBox="1"/>
           <p:nvPr/>
         </p:nvSpPr>
@@ -21359,7 +22473,7 @@
       </p:sp>
       <p:sp>
         <p:nvSpPr>
-          <p:cNvPr id="37" name="Rounded Rectangle 36"/>
+          <p:cNvPr id="39" name="Rounded Rectangle 38"/>
           <p:cNvSpPr/>
           <p:nvPr/>
         </p:nvSpPr>
@@ -21403,7 +22517,7 @@
       </p:sp>
       <p:sp>
         <p:nvSpPr>
-          <p:cNvPr id="38" name="TextBox 37"/>
+          <p:cNvPr id="40" name="TextBox 39"/>
           <p:cNvSpPr txBox="1"/>
           <p:nvPr/>
         </p:nvSpPr>
@@ -21445,7 +22559,7 @@
       </p:sp>
       <p:sp>
         <p:nvSpPr>
-          <p:cNvPr id="39" name="TextBox 38"/>
+          <p:cNvPr id="41" name="TextBox 40"/>
           <p:cNvSpPr txBox="1"/>
           <p:nvPr/>
         </p:nvSpPr>
@@ -21487,7 +22601,7 @@
       </p:sp>
       <p:sp>
         <p:nvSpPr>
-          <p:cNvPr id="40" name="Rounded Rectangle 39"/>
+          <p:cNvPr id="42" name="Rounded Rectangle 41"/>
           <p:cNvSpPr/>
           <p:nvPr/>
         </p:nvSpPr>
@@ -21531,7 +22645,7 @@
       </p:sp>
       <p:sp>
         <p:nvSpPr>
-          <p:cNvPr id="41" name="TextBox 40"/>
+          <p:cNvPr id="43" name="TextBox 42"/>
           <p:cNvSpPr txBox="1"/>
           <p:nvPr/>
         </p:nvSpPr>
@@ -21573,7 +22687,7 @@
       </p:sp>
       <p:sp>
         <p:nvSpPr>
-          <p:cNvPr id="42" name="TextBox 41"/>
+          <p:cNvPr id="44" name="TextBox 43"/>
           <p:cNvSpPr txBox="1"/>
           <p:nvPr/>
         </p:nvSpPr>
@@ -21615,20 +22729,20 @@
       </p:sp>
       <p:sp>
         <p:nvSpPr>
-          <p:cNvPr id="43" name="Rectangle 42"/>
+          <p:cNvPr id="45" name="Rectangle 44"/>
           <p:cNvSpPr/>
           <p:nvPr/>
         </p:nvSpPr>
         <p:spPr>
           <a:xfrm>
-            <a:off x="530352" y="6254496"/>
-            <a:ext cx="11130991" cy="12801"/>
-          </a:xfrm>
-          <a:prstGeom prst="rect">
-            <a:avLst/>
-          </a:prstGeom>
-          <a:solidFill>
-            <a:srgbClr val="D7E3E6"/>
+            <a:off x="0" y="6163056"/>
+            <a:ext cx="12191695" cy="694944"/>
+          </a:xfrm>
+          <a:prstGeom prst="rect">
+            <a:avLst/>
+          </a:prstGeom>
+          <a:solidFill>
+            <a:srgbClr val="0B4A5A"/>
           </a:solidFill>
           <a:ln>
             <a:noFill/>
@@ -21657,64 +22771,20 @@
       </p:sp>
       <p:sp>
         <p:nvSpPr>
-          <p:cNvPr id="44" name="TextBox 43"/>
-          <p:cNvSpPr txBox="1"/>
-          <p:nvPr/>
-        </p:nvSpPr>
-        <p:spPr>
-          <a:xfrm>
-            <a:off x="530352" y="6291072"/>
-            <a:ext cx="8595360" cy="256032"/>
-          </a:xfrm>
-          <a:prstGeom prst="rect">
-            <a:avLst/>
-          </a:prstGeom>
-          <a:noFill/>
-        </p:spPr>
-        <p:txBody>
-          <a:bodyPr wrap="square" lIns="0" rIns="0" tIns="0" bIns="0" anchor="t">
-            <a:noAutofit/>
-          </a:bodyPr>
-          <a:lstStyle/>
-          <a:p>
-            <a:pPr algn="l">
-              <a:spcBef>
-                <a:spcPts val="0"/>
-              </a:spcBef>
-              <a:spcAft>
-                <a:spcPts val="0"/>
-              </a:spcAft>
-            </a:pPr>
-            <a:r>
-              <a:rPr sz="900" b="0" i="0" lang="id-ID">
-                <a:solidFill>
-                  <a:srgbClr val="5C757C"/>
-                </a:solidFill>
-                <a:latin typeface="Calibri"/>
-              </a:rPr>
-              <a:t>Lopes dkk., Sci Rep 2021;11:22405 · DOI 10.1038/s41598-021-01541-7 · CC BY 4.0</a:t>
-            </a:r>
-          </a:p>
-        </p:txBody>
-      </p:sp>
-      <p:sp>
-        <p:nvSpPr>
-          <p:cNvPr id="45" name="Rounded Rectangle 44"/>
+          <p:cNvPr id="46" name="Rectangle 45"/>
           <p:cNvSpPr/>
           <p:nvPr/>
         </p:nvSpPr>
         <p:spPr>
           <a:xfrm>
-            <a:off x="11259007" y="6227064"/>
-            <a:ext cx="402336" cy="256032"/>
-          </a:xfrm>
-          <a:prstGeom prst="roundRect">
-            <a:avLst>
-              <a:gd name="adj" fmla="val 17857"/>
-            </a:avLst>
-          </a:prstGeom>
-          <a:solidFill>
-            <a:srgbClr val="0B4A5A"/>
+            <a:off x="0" y="6163056"/>
+            <a:ext cx="12191695" cy="41148"/>
+          </a:xfrm>
+          <a:prstGeom prst="rect">
+            <a:avLst/>
+          </a:prstGeom>
+          <a:solidFill>
+            <a:srgbClr val="D98A2B"/>
           </a:solidFill>
           <a:ln>
             <a:noFill/>
@@ -21743,14 +22813,14 @@
       </p:sp>
       <p:sp>
         <p:nvSpPr>
-          <p:cNvPr id="46" name="TextBox 45"/>
+          <p:cNvPr id="47" name="TextBox 46"/>
           <p:cNvSpPr txBox="1"/>
           <p:nvPr/>
         </p:nvSpPr>
         <p:spPr>
           <a:xfrm>
-            <a:off x="11259007" y="6286500"/>
-            <a:ext cx="402336" cy="182880"/>
+            <a:off x="530352" y="6327648"/>
+            <a:ext cx="8595360" cy="256032"/>
           </a:xfrm>
           <a:prstGeom prst="rect">
             <a:avLst/>
@@ -21763,6 +22833,92 @@
           </a:bodyPr>
           <a:lstStyle/>
           <a:p>
+            <a:pPr algn="l">
+              <a:spcBef>
+                <a:spcPts val="0"/>
+              </a:spcBef>
+              <a:spcAft>
+                <a:spcPts val="0"/>
+              </a:spcAft>
+            </a:pPr>
+            <a:r>
+              <a:rPr sz="850" b="0" i="0" lang="id-ID">
+                <a:solidFill>
+                  <a:srgbClr val="9FC7CF"/>
+                </a:solidFill>
+                <a:latin typeface="Calibri"/>
+              </a:rPr>
+              <a:t>Lopes dkk., Sci Rep 2021;11:22405 · DOI 10.1038/s41598-021-01541-7 · CC BY 4.0</a:t>
+            </a:r>
+          </a:p>
+        </p:txBody>
+      </p:sp>
+      <p:sp>
+        <p:nvSpPr>
+          <p:cNvPr id="48" name="Rounded Rectangle 47"/>
+          <p:cNvSpPr/>
+          <p:nvPr/>
+        </p:nvSpPr>
+        <p:spPr>
+          <a:xfrm>
+            <a:off x="11204143" y="6291072"/>
+            <a:ext cx="457200" cy="256032"/>
+          </a:xfrm>
+          <a:prstGeom prst="roundRect">
+            <a:avLst>
+              <a:gd name="adj" fmla="val 17857"/>
+            </a:avLst>
+          </a:prstGeom>
+          <a:solidFill>
+            <a:srgbClr val="E8F4F6"/>
+          </a:solidFill>
+          <a:ln>
+            <a:noFill/>
+          </a:ln>
+          <a:effectLst/>
+        </p:spPr>
+        <p:style>
+          <a:lnRef idx="1">
+            <a:schemeClr val="accent1"/>
+          </a:lnRef>
+          <a:fillRef idx="3">
+            <a:schemeClr val="accent1"/>
+          </a:fillRef>
+          <a:effectRef idx="2">
+            <a:schemeClr val="accent1"/>
+          </a:effectRef>
+          <a:fontRef idx="minor">
+            <a:schemeClr val="lt1"/>
+          </a:fontRef>
+        </p:style>
+        <p:txBody>
+          <a:bodyPr rtlCol="0" anchor="ctr"/>
+          <a:lstStyle/>
+          <a:p/>
+        </p:txBody>
+      </p:sp>
+      <p:sp>
+        <p:nvSpPr>
+          <p:cNvPr id="49" name="TextBox 48"/>
+          <p:cNvSpPr txBox="1"/>
+          <p:nvPr/>
+        </p:nvSpPr>
+        <p:spPr>
+          <a:xfrm>
+            <a:off x="11204143" y="6332220"/>
+            <a:ext cx="457200" cy="182880"/>
+          </a:xfrm>
+          <a:prstGeom prst="rect">
+            <a:avLst/>
+          </a:prstGeom>
+          <a:noFill/>
+        </p:spPr>
+        <p:txBody>
+          <a:bodyPr wrap="square" lIns="0" rIns="0" tIns="0" bIns="0" anchor="t">
+            <a:noAutofit/>
+          </a:bodyPr>
+          <a:lstStyle/>
+          <a:p>
             <a:pPr algn="ctr">
               <a:spcBef>
                 <a:spcPts val="0"/>
@@ -21774,7 +22930,7 @@
             <a:r>
               <a:rPr sz="950" b="1" i="0" lang="id-ID">
                 <a:solidFill>
-                  <a:srgbClr val="FFFFFF"/>
+                  <a:srgbClr val="0B4A5A"/>
                 </a:solidFill>
                 <a:latin typeface="Calibri"/>
               </a:rPr>
@@ -21815,17 +22971,9 @@
           <a:prstGeom prst="rect">
             <a:avLst/>
           </a:prstGeom>
-          <a:gradFill rotWithShape="1">
-            <a:gsLst>
-              <a:gs pos="0">
-                <a:srgbClr val="F9F7F3"/>
-              </a:gs>
-              <a:gs pos="100000">
-                <a:srgbClr val="E6EFF2"/>
-              </a:gs>
-            </a:gsLst>
-            <a:lin scaled="0" ang="19200000"/>
-          </a:gradFill>
+          <a:solidFill>
+            <a:srgbClr val="D9E8EA"/>
+          </a:solidFill>
           <a:ln>
             <a:noFill/>
           </a:ln>
@@ -21859,14 +23007,14 @@
         </p:nvSpPr>
         <p:spPr>
           <a:xfrm>
-            <a:off x="9098280" y="-2240280"/>
-            <a:ext cx="4480560" cy="4480560"/>
+            <a:off x="8732520" y="3520440"/>
+            <a:ext cx="5760720" cy="5760720"/>
           </a:xfrm>
           <a:prstGeom prst="ellipse">
             <a:avLst/>
           </a:prstGeom>
           <a:solidFill>
-            <a:srgbClr val="E4EFF1"/>
+            <a:srgbClr val="CDE0E3"/>
           </a:solidFill>
           <a:ln>
             <a:noFill/>
@@ -21895,20 +23043,20 @@
       </p:sp>
       <p:sp>
         <p:nvSpPr>
-          <p:cNvPr id="4" name="Oval 3"/>
+          <p:cNvPr id="4" name="Rectangle 3"/>
           <p:cNvSpPr/>
           <p:nvPr/>
         </p:nvSpPr>
         <p:spPr>
           <a:xfrm>
-            <a:off x="-1600200" y="4160520"/>
-            <a:ext cx="3931920" cy="3931920"/>
-          </a:xfrm>
-          <a:prstGeom prst="ellipse">
-            <a:avLst/>
-          </a:prstGeom>
-          <a:solidFill>
-            <a:srgbClr val="EAF3F4"/>
+            <a:off x="3309213" y="1417320"/>
+            <a:ext cx="7315" cy="4663440"/>
+          </a:xfrm>
+          <a:prstGeom prst="rect">
+            <a:avLst/>
+          </a:prstGeom>
+          <a:solidFill>
+            <a:srgbClr val="C7DCE1"/>
           </a:solidFill>
           <a:ln>
             <a:noFill/>
@@ -21943,16 +23091,14 @@
         </p:nvSpPr>
         <p:spPr>
           <a:xfrm>
-            <a:off x="0" y="6455664"/>
-            <a:ext cx="12191695" cy="402336"/>
-          </a:xfrm>
-          <a:prstGeom prst="rect">
-            <a:avLst/>
-          </a:prstGeom>
-          <a:solidFill>
-            <a:srgbClr val="DCE7EA">
-              <a:alpha val="85000"/>
-            </a:srgbClr>
+            <a:off x="6092647" y="1417320"/>
+            <a:ext cx="7315" cy="4663440"/>
+          </a:xfrm>
+          <a:prstGeom prst="rect">
+            <a:avLst/>
+          </a:prstGeom>
+          <a:solidFill>
+            <a:srgbClr val="C7DCE1"/>
           </a:solidFill>
           <a:ln>
             <a:noFill/>
@@ -21982,6 +23128,90 @@
       <p:sp>
         <p:nvSpPr>
           <p:cNvPr id="6" name="Rectangle 5"/>
+          <p:cNvSpPr/>
+          <p:nvPr/>
+        </p:nvSpPr>
+        <p:spPr>
+          <a:xfrm>
+            <a:off x="8875166" y="1417320"/>
+            <a:ext cx="7315" cy="4663440"/>
+          </a:xfrm>
+          <a:prstGeom prst="rect">
+            <a:avLst/>
+          </a:prstGeom>
+          <a:solidFill>
+            <a:srgbClr val="C7DCE1"/>
+          </a:solidFill>
+          <a:ln>
+            <a:noFill/>
+          </a:ln>
+          <a:effectLst/>
+        </p:spPr>
+        <p:style>
+          <a:lnRef idx="1">
+            <a:schemeClr val="accent1"/>
+          </a:lnRef>
+          <a:fillRef idx="3">
+            <a:schemeClr val="accent1"/>
+          </a:fillRef>
+          <a:effectRef idx="2">
+            <a:schemeClr val="accent1"/>
+          </a:effectRef>
+          <a:fontRef idx="minor">
+            <a:schemeClr val="lt1"/>
+          </a:fontRef>
+        </p:style>
+        <p:txBody>
+          <a:bodyPr rtlCol="0" anchor="ctr"/>
+          <a:lstStyle/>
+          <a:p/>
+        </p:txBody>
+      </p:sp>
+      <p:sp>
+        <p:nvSpPr>
+          <p:cNvPr id="7" name="Rectangle 6"/>
+          <p:cNvSpPr/>
+          <p:nvPr/>
+        </p:nvSpPr>
+        <p:spPr>
+          <a:xfrm>
+            <a:off x="0" y="0"/>
+            <a:ext cx="201168" cy="6858000"/>
+          </a:xfrm>
+          <a:prstGeom prst="rect">
+            <a:avLst/>
+          </a:prstGeom>
+          <a:solidFill>
+            <a:srgbClr val="0B4A5A"/>
+          </a:solidFill>
+          <a:ln>
+            <a:noFill/>
+          </a:ln>
+          <a:effectLst/>
+        </p:spPr>
+        <p:style>
+          <a:lnRef idx="1">
+            <a:schemeClr val="accent1"/>
+          </a:lnRef>
+          <a:fillRef idx="3">
+            <a:schemeClr val="accent1"/>
+          </a:fillRef>
+          <a:effectRef idx="2">
+            <a:schemeClr val="accent1"/>
+          </a:effectRef>
+          <a:fontRef idx="minor">
+            <a:schemeClr val="lt1"/>
+          </a:fontRef>
+        </p:style>
+        <p:txBody>
+          <a:bodyPr rtlCol="0" anchor="ctr"/>
+          <a:lstStyle/>
+          <a:p/>
+        </p:txBody>
+      </p:sp>
+      <p:sp>
+        <p:nvSpPr>
+          <p:cNvPr id="8" name="Rectangle 7"/>
           <p:cNvSpPr/>
           <p:nvPr/>
         </p:nvSpPr>
@@ -22031,20 +23261,20 @@
       </p:sp>
       <p:sp>
         <p:nvSpPr>
-          <p:cNvPr id="7" name="Rectangle 6"/>
+          <p:cNvPr id="9" name="Rectangle 8"/>
           <p:cNvSpPr/>
           <p:nvPr/>
         </p:nvSpPr>
         <p:spPr>
           <a:xfrm>
             <a:off x="0" y="1171346"/>
-            <a:ext cx="12191695" cy="45720"/>
-          </a:xfrm>
-          <a:prstGeom prst="rect">
-            <a:avLst/>
-          </a:prstGeom>
-          <a:solidFill>
-            <a:srgbClr val="14A0B4"/>
+            <a:ext cx="12191695" cy="64008"/>
+          </a:xfrm>
+          <a:prstGeom prst="rect">
+            <a:avLst/>
+          </a:prstGeom>
+          <a:solidFill>
+            <a:srgbClr val="D98A2B"/>
           </a:solidFill>
           <a:ln>
             <a:noFill/>
@@ -22073,7 +23303,7 @@
       </p:sp>
       <p:sp>
         <p:nvSpPr>
-          <p:cNvPr id="8" name="TextBox 7"/>
+          <p:cNvPr id="10" name="TextBox 9"/>
           <p:cNvSpPr txBox="1"/>
           <p:nvPr/>
         </p:nvSpPr>
@@ -22108,14 +23338,14 @@
                 </a:solidFill>
                 <a:latin typeface="Calibri"/>
               </a:rPr>
-              <a:t>METODE · PENCARIAN</a:t>
-            </a:r>
-          </a:p>
-        </p:txBody>
-      </p:sp>
-      <p:sp>
-        <p:nvSpPr>
-          <p:cNvPr id="9" name="TextBox 8"/>
+              <a:t>06  ·  METODE · PENCARIAN</a:t>
+            </a:r>
+          </a:p>
+        </p:txBody>
+      </p:sp>
+      <p:sp>
+        <p:nvSpPr>
+          <p:cNvPr id="11" name="TextBox 10"/>
           <p:cNvSpPr txBox="1"/>
           <p:nvPr/>
         </p:nvSpPr>
@@ -22157,7 +23387,7 @@
       </p:sp>
       <p:sp>
         <p:nvSpPr>
-          <p:cNvPr id="10" name="Rounded Rectangle 9"/>
+          <p:cNvPr id="12" name="Rounded Rectangle 11"/>
           <p:cNvSpPr/>
           <p:nvPr/>
         </p:nvSpPr>
@@ -22203,7 +23433,7 @@
       </p:sp>
       <p:sp>
         <p:nvSpPr>
-          <p:cNvPr id="11" name="Rectangle 10"/>
+          <p:cNvPr id="13" name="Rectangle 12"/>
           <p:cNvSpPr/>
           <p:nvPr/>
         </p:nvSpPr>
@@ -22245,7 +23475,7 @@
       </p:sp>
       <p:sp>
         <p:nvSpPr>
-          <p:cNvPr id="12" name="TextBox 11"/>
+          <p:cNvPr id="14" name="TextBox 13"/>
           <p:cNvSpPr txBox="1"/>
           <p:nvPr/>
         </p:nvSpPr>
@@ -22287,7 +23517,7 @@
       </p:sp>
       <p:sp>
         <p:nvSpPr>
-          <p:cNvPr id="13" name="Rounded Rectangle 12"/>
+          <p:cNvPr id="15" name="Rounded Rectangle 14"/>
           <p:cNvSpPr/>
           <p:nvPr/>
         </p:nvSpPr>
@@ -22331,7 +23561,7 @@
       </p:sp>
       <p:sp>
         <p:nvSpPr>
-          <p:cNvPr id="14" name="Rounded Rectangle 13"/>
+          <p:cNvPr id="16" name="Rounded Rectangle 15"/>
           <p:cNvSpPr/>
           <p:nvPr/>
         </p:nvSpPr>
@@ -22375,7 +23605,7 @@
       </p:sp>
       <p:sp>
         <p:nvSpPr>
-          <p:cNvPr id="15" name="TextBox 14"/>
+          <p:cNvPr id="17" name="TextBox 16"/>
           <p:cNvSpPr txBox="1"/>
           <p:nvPr/>
         </p:nvSpPr>
@@ -22417,7 +23647,7 @@
       </p:sp>
       <p:sp>
         <p:nvSpPr>
-          <p:cNvPr id="16" name="TextBox 15"/>
+          <p:cNvPr id="18" name="TextBox 17"/>
           <p:cNvSpPr txBox="1"/>
           <p:nvPr/>
         </p:nvSpPr>
@@ -22459,7 +23689,7 @@
       </p:sp>
       <p:sp>
         <p:nvSpPr>
-          <p:cNvPr id="17" name="TextBox 16"/>
+          <p:cNvPr id="19" name="TextBox 18"/>
           <p:cNvSpPr txBox="1"/>
           <p:nvPr/>
         </p:nvSpPr>
@@ -22501,7 +23731,7 @@
       </p:sp>
       <p:sp>
         <p:nvSpPr>
-          <p:cNvPr id="18" name="Rounded Rectangle 17"/>
+          <p:cNvPr id="20" name="Rounded Rectangle 19"/>
           <p:cNvSpPr/>
           <p:nvPr/>
         </p:nvSpPr>
@@ -22545,7 +23775,7 @@
       </p:sp>
       <p:sp>
         <p:nvSpPr>
-          <p:cNvPr id="19" name="Rounded Rectangle 18"/>
+          <p:cNvPr id="21" name="Rounded Rectangle 20"/>
           <p:cNvSpPr/>
           <p:nvPr/>
         </p:nvSpPr>
@@ -22589,7 +23819,7 @@
       </p:sp>
       <p:sp>
         <p:nvSpPr>
-          <p:cNvPr id="20" name="TextBox 19"/>
+          <p:cNvPr id="22" name="TextBox 21"/>
           <p:cNvSpPr txBox="1"/>
           <p:nvPr/>
         </p:nvSpPr>
@@ -22631,7 +23861,7 @@
       </p:sp>
       <p:sp>
         <p:nvSpPr>
-          <p:cNvPr id="21" name="TextBox 20"/>
+          <p:cNvPr id="23" name="TextBox 22"/>
           <p:cNvSpPr txBox="1"/>
           <p:nvPr/>
         </p:nvSpPr>
@@ -22673,7 +23903,7 @@
       </p:sp>
       <p:sp>
         <p:nvSpPr>
-          <p:cNvPr id="22" name="TextBox 21"/>
+          <p:cNvPr id="24" name="TextBox 23"/>
           <p:cNvSpPr txBox="1"/>
           <p:nvPr/>
         </p:nvSpPr>
@@ -22715,7 +23945,7 @@
       </p:sp>
       <p:sp>
         <p:nvSpPr>
-          <p:cNvPr id="23" name="Rounded Rectangle 22"/>
+          <p:cNvPr id="25" name="Rounded Rectangle 24"/>
           <p:cNvSpPr/>
           <p:nvPr/>
         </p:nvSpPr>
@@ -22759,7 +23989,7 @@
       </p:sp>
       <p:sp>
         <p:nvSpPr>
-          <p:cNvPr id="24" name="Rounded Rectangle 23"/>
+          <p:cNvPr id="26" name="Rounded Rectangle 25"/>
           <p:cNvSpPr/>
           <p:nvPr/>
         </p:nvSpPr>
@@ -22803,7 +24033,7 @@
       </p:sp>
       <p:sp>
         <p:nvSpPr>
-          <p:cNvPr id="25" name="TextBox 24"/>
+          <p:cNvPr id="27" name="TextBox 26"/>
           <p:cNvSpPr txBox="1"/>
           <p:nvPr/>
         </p:nvSpPr>
@@ -22845,7 +24075,7 @@
       </p:sp>
       <p:sp>
         <p:nvSpPr>
-          <p:cNvPr id="26" name="TextBox 25"/>
+          <p:cNvPr id="28" name="TextBox 27"/>
           <p:cNvSpPr txBox="1"/>
           <p:nvPr/>
         </p:nvSpPr>
@@ -22887,7 +24117,7 @@
       </p:sp>
       <p:sp>
         <p:nvSpPr>
-          <p:cNvPr id="27" name="TextBox 26"/>
+          <p:cNvPr id="29" name="TextBox 28"/>
           <p:cNvSpPr txBox="1"/>
           <p:nvPr/>
         </p:nvSpPr>
@@ -22929,7 +24159,7 @@
       </p:sp>
       <p:sp>
         <p:nvSpPr>
-          <p:cNvPr id="28" name="Rounded Rectangle 27"/>
+          <p:cNvPr id="30" name="Rounded Rectangle 29"/>
           <p:cNvSpPr/>
           <p:nvPr/>
         </p:nvSpPr>
@@ -22973,7 +24203,7 @@
       </p:sp>
       <p:sp>
         <p:nvSpPr>
-          <p:cNvPr id="29" name="Rounded Rectangle 28"/>
+          <p:cNvPr id="31" name="Rounded Rectangle 30"/>
           <p:cNvSpPr/>
           <p:nvPr/>
         </p:nvSpPr>
@@ -23017,7 +24247,7 @@
       </p:sp>
       <p:sp>
         <p:nvSpPr>
-          <p:cNvPr id="30" name="TextBox 29"/>
+          <p:cNvPr id="32" name="TextBox 31"/>
           <p:cNvSpPr txBox="1"/>
           <p:nvPr/>
         </p:nvSpPr>
@@ -23059,7 +24289,7 @@
       </p:sp>
       <p:sp>
         <p:nvSpPr>
-          <p:cNvPr id="31" name="TextBox 30"/>
+          <p:cNvPr id="33" name="TextBox 32"/>
           <p:cNvSpPr txBox="1"/>
           <p:nvPr/>
         </p:nvSpPr>
@@ -23101,7 +24331,7 @@
       </p:sp>
       <p:sp>
         <p:nvSpPr>
-          <p:cNvPr id="32" name="TextBox 31"/>
+          <p:cNvPr id="34" name="TextBox 33"/>
           <p:cNvSpPr txBox="1"/>
           <p:nvPr/>
         </p:nvSpPr>
@@ -23143,7 +24373,7 @@
       </p:sp>
       <p:sp>
         <p:nvSpPr>
-          <p:cNvPr id="33" name="Rounded Rectangle 32"/>
+          <p:cNvPr id="35" name="Rounded Rectangle 34"/>
           <p:cNvSpPr/>
           <p:nvPr/>
         </p:nvSpPr>
@@ -23187,7 +24417,7 @@
       </p:sp>
       <p:sp>
         <p:nvSpPr>
-          <p:cNvPr id="34" name="TextBox 33"/>
+          <p:cNvPr id="36" name="TextBox 35"/>
           <p:cNvSpPr txBox="1"/>
           <p:nvPr/>
         </p:nvSpPr>
@@ -23229,7 +24459,7 @@
       </p:sp>
       <p:sp>
         <p:nvSpPr>
-          <p:cNvPr id="35" name="TextBox 34"/>
+          <p:cNvPr id="37" name="TextBox 36"/>
           <p:cNvSpPr txBox="1"/>
           <p:nvPr/>
         </p:nvSpPr>
@@ -23274,7 +24504,7 @@
       </p:sp>
       <p:sp>
         <p:nvSpPr>
-          <p:cNvPr id="36" name="TextBox 35"/>
+          <p:cNvPr id="38" name="TextBox 37"/>
           <p:cNvSpPr txBox="1"/>
           <p:nvPr/>
         </p:nvSpPr>
@@ -23316,20 +24546,20 @@
       </p:sp>
       <p:sp>
         <p:nvSpPr>
-          <p:cNvPr id="37" name="Rectangle 36"/>
+          <p:cNvPr id="39" name="Rectangle 38"/>
           <p:cNvSpPr/>
           <p:nvPr/>
         </p:nvSpPr>
         <p:spPr>
           <a:xfrm>
-            <a:off x="530352" y="6254496"/>
-            <a:ext cx="11130991" cy="12801"/>
-          </a:xfrm>
-          <a:prstGeom prst="rect">
-            <a:avLst/>
-          </a:prstGeom>
-          <a:solidFill>
-            <a:srgbClr val="D7E3E6"/>
+            <a:off x="0" y="6163056"/>
+            <a:ext cx="12191695" cy="694944"/>
+          </a:xfrm>
+          <a:prstGeom prst="rect">
+            <a:avLst/>
+          </a:prstGeom>
+          <a:solidFill>
+            <a:srgbClr val="0B4A5A"/>
           </a:solidFill>
           <a:ln>
             <a:noFill/>
@@ -23358,64 +24588,20 @@
       </p:sp>
       <p:sp>
         <p:nvSpPr>
-          <p:cNvPr id="38" name="TextBox 37"/>
-          <p:cNvSpPr txBox="1"/>
-          <p:nvPr/>
-        </p:nvSpPr>
-        <p:spPr>
-          <a:xfrm>
-            <a:off x="530352" y="6291072"/>
-            <a:ext cx="8595360" cy="256032"/>
-          </a:xfrm>
-          <a:prstGeom prst="rect">
-            <a:avLst/>
-          </a:prstGeom>
-          <a:noFill/>
-        </p:spPr>
-        <p:txBody>
-          <a:bodyPr wrap="square" lIns="0" rIns="0" tIns="0" bIns="0" anchor="t">
-            <a:noAutofit/>
-          </a:bodyPr>
-          <a:lstStyle/>
-          <a:p>
-            <a:pPr algn="l">
-              <a:spcBef>
-                <a:spcPts val="0"/>
-              </a:spcBef>
-              <a:spcAft>
-                <a:spcPts val="0"/>
-              </a:spcAft>
-            </a:pPr>
-            <a:r>
-              <a:rPr sz="900" b="0" i="0" lang="id-ID">
-                <a:solidFill>
-                  <a:srgbClr val="5C757C"/>
-                </a:solidFill>
-                <a:latin typeface="Calibri"/>
-              </a:rPr>
-              <a:t>Lopes dkk., Sci Rep 2021;11:22405 · DOI 10.1038/s41598-021-01541-7 · CC BY 4.0</a:t>
-            </a:r>
-          </a:p>
-        </p:txBody>
-      </p:sp>
-      <p:sp>
-        <p:nvSpPr>
-          <p:cNvPr id="39" name="Rounded Rectangle 38"/>
+          <p:cNvPr id="40" name="Rectangle 39"/>
           <p:cNvSpPr/>
           <p:nvPr/>
         </p:nvSpPr>
         <p:spPr>
           <a:xfrm>
-            <a:off x="11259007" y="6227064"/>
-            <a:ext cx="402336" cy="256032"/>
-          </a:xfrm>
-          <a:prstGeom prst="roundRect">
-            <a:avLst>
-              <a:gd name="adj" fmla="val 17857"/>
-            </a:avLst>
-          </a:prstGeom>
-          <a:solidFill>
-            <a:srgbClr val="0B4A5A"/>
+            <a:off x="0" y="6163056"/>
+            <a:ext cx="12191695" cy="41148"/>
+          </a:xfrm>
+          <a:prstGeom prst="rect">
+            <a:avLst/>
+          </a:prstGeom>
+          <a:solidFill>
+            <a:srgbClr val="D98A2B"/>
           </a:solidFill>
           <a:ln>
             <a:noFill/>
@@ -23444,14 +24630,14 @@
       </p:sp>
       <p:sp>
         <p:nvSpPr>
-          <p:cNvPr id="40" name="TextBox 39"/>
+          <p:cNvPr id="41" name="TextBox 40"/>
           <p:cNvSpPr txBox="1"/>
           <p:nvPr/>
         </p:nvSpPr>
         <p:spPr>
           <a:xfrm>
-            <a:off x="11259007" y="6286500"/>
-            <a:ext cx="402336" cy="182880"/>
+            <a:off x="530352" y="6327648"/>
+            <a:ext cx="8595360" cy="256032"/>
           </a:xfrm>
           <a:prstGeom prst="rect">
             <a:avLst/>
@@ -23464,6 +24650,92 @@
           </a:bodyPr>
           <a:lstStyle/>
           <a:p>
+            <a:pPr algn="l">
+              <a:spcBef>
+                <a:spcPts val="0"/>
+              </a:spcBef>
+              <a:spcAft>
+                <a:spcPts val="0"/>
+              </a:spcAft>
+            </a:pPr>
+            <a:r>
+              <a:rPr sz="850" b="0" i="0" lang="id-ID">
+                <a:solidFill>
+                  <a:srgbClr val="9FC7CF"/>
+                </a:solidFill>
+                <a:latin typeface="Calibri"/>
+              </a:rPr>
+              <a:t>Lopes dkk., Sci Rep 2021;11:22405 · DOI 10.1038/s41598-021-01541-7 · CC BY 4.0</a:t>
+            </a:r>
+          </a:p>
+        </p:txBody>
+      </p:sp>
+      <p:sp>
+        <p:nvSpPr>
+          <p:cNvPr id="42" name="Rounded Rectangle 41"/>
+          <p:cNvSpPr/>
+          <p:nvPr/>
+        </p:nvSpPr>
+        <p:spPr>
+          <a:xfrm>
+            <a:off x="11204143" y="6291072"/>
+            <a:ext cx="457200" cy="256032"/>
+          </a:xfrm>
+          <a:prstGeom prst="roundRect">
+            <a:avLst>
+              <a:gd name="adj" fmla="val 17857"/>
+            </a:avLst>
+          </a:prstGeom>
+          <a:solidFill>
+            <a:srgbClr val="E8F4F6"/>
+          </a:solidFill>
+          <a:ln>
+            <a:noFill/>
+          </a:ln>
+          <a:effectLst/>
+        </p:spPr>
+        <p:style>
+          <a:lnRef idx="1">
+            <a:schemeClr val="accent1"/>
+          </a:lnRef>
+          <a:fillRef idx="3">
+            <a:schemeClr val="accent1"/>
+          </a:fillRef>
+          <a:effectRef idx="2">
+            <a:schemeClr val="accent1"/>
+          </a:effectRef>
+          <a:fontRef idx="minor">
+            <a:schemeClr val="lt1"/>
+          </a:fontRef>
+        </p:style>
+        <p:txBody>
+          <a:bodyPr rtlCol="0" anchor="ctr"/>
+          <a:lstStyle/>
+          <a:p/>
+        </p:txBody>
+      </p:sp>
+      <p:sp>
+        <p:nvSpPr>
+          <p:cNvPr id="43" name="TextBox 42"/>
+          <p:cNvSpPr txBox="1"/>
+          <p:nvPr/>
+        </p:nvSpPr>
+        <p:spPr>
+          <a:xfrm>
+            <a:off x="11204143" y="6332220"/>
+            <a:ext cx="457200" cy="182880"/>
+          </a:xfrm>
+          <a:prstGeom prst="rect">
+            <a:avLst/>
+          </a:prstGeom>
+          <a:noFill/>
+        </p:spPr>
+        <p:txBody>
+          <a:bodyPr wrap="square" lIns="0" rIns="0" tIns="0" bIns="0" anchor="t">
+            <a:noAutofit/>
+          </a:bodyPr>
+          <a:lstStyle/>
+          <a:p>
             <a:pPr algn="ctr">
               <a:spcBef>
                 <a:spcPts val="0"/>
@@ -23475,7 +24747,7 @@
             <a:r>
               <a:rPr sz="950" b="1" i="0" lang="id-ID">
                 <a:solidFill>
-                  <a:srgbClr val="FFFFFF"/>
+                  <a:srgbClr val="0B4A5A"/>
                 </a:solidFill>
                 <a:latin typeface="Calibri"/>
               </a:rPr>
@@ -23516,17 +24788,9 @@
           <a:prstGeom prst="rect">
             <a:avLst/>
           </a:prstGeom>
-          <a:gradFill rotWithShape="1">
-            <a:gsLst>
-              <a:gs pos="0">
-                <a:srgbClr val="F9F7F3"/>
-              </a:gs>
-              <a:gs pos="100000">
-                <a:srgbClr val="E6EFF2"/>
-              </a:gs>
-            </a:gsLst>
-            <a:lin scaled="0" ang="19200000"/>
-          </a:gradFill>
+          <a:solidFill>
+            <a:srgbClr val="D9E8EA"/>
+          </a:solidFill>
           <a:ln>
             <a:noFill/>
           </a:ln>
@@ -23560,14 +24824,14 @@
         </p:nvSpPr>
         <p:spPr>
           <a:xfrm>
-            <a:off x="9098280" y="-2240280"/>
-            <a:ext cx="4480560" cy="4480560"/>
+            <a:off x="8732520" y="3520440"/>
+            <a:ext cx="5760720" cy="5760720"/>
           </a:xfrm>
           <a:prstGeom prst="ellipse">
             <a:avLst/>
           </a:prstGeom>
           <a:solidFill>
-            <a:srgbClr val="E4EFF1"/>
+            <a:srgbClr val="CDE0E3"/>
           </a:solidFill>
           <a:ln>
             <a:noFill/>
@@ -23596,20 +24860,20 @@
       </p:sp>
       <p:sp>
         <p:nvSpPr>
-          <p:cNvPr id="4" name="Oval 3"/>
+          <p:cNvPr id="4" name="Rectangle 3"/>
           <p:cNvSpPr/>
           <p:nvPr/>
         </p:nvSpPr>
         <p:spPr>
           <a:xfrm>
-            <a:off x="-1600200" y="4160520"/>
-            <a:ext cx="3931920" cy="3931920"/>
-          </a:xfrm>
-          <a:prstGeom prst="ellipse">
-            <a:avLst/>
-          </a:prstGeom>
-          <a:solidFill>
-            <a:srgbClr val="EAF3F4"/>
+            <a:off x="3309213" y="1417320"/>
+            <a:ext cx="7315" cy="4663440"/>
+          </a:xfrm>
+          <a:prstGeom prst="rect">
+            <a:avLst/>
+          </a:prstGeom>
+          <a:solidFill>
+            <a:srgbClr val="C7DCE1"/>
           </a:solidFill>
           <a:ln>
             <a:noFill/>
@@ -23644,16 +24908,14 @@
         </p:nvSpPr>
         <p:spPr>
           <a:xfrm>
-            <a:off x="0" y="6455664"/>
-            <a:ext cx="12191695" cy="402336"/>
-          </a:xfrm>
-          <a:prstGeom prst="rect">
-            <a:avLst/>
-          </a:prstGeom>
-          <a:solidFill>
-            <a:srgbClr val="DCE7EA">
-              <a:alpha val="85000"/>
-            </a:srgbClr>
+            <a:off x="6092647" y="1417320"/>
+            <a:ext cx="7315" cy="4663440"/>
+          </a:xfrm>
+          <a:prstGeom prst="rect">
+            <a:avLst/>
+          </a:prstGeom>
+          <a:solidFill>
+            <a:srgbClr val="C7DCE1"/>
           </a:solidFill>
           <a:ln>
             <a:noFill/>
@@ -23683,6 +24945,90 @@
       <p:sp>
         <p:nvSpPr>
           <p:cNvPr id="6" name="Rectangle 5"/>
+          <p:cNvSpPr/>
+          <p:nvPr/>
+        </p:nvSpPr>
+        <p:spPr>
+          <a:xfrm>
+            <a:off x="8875166" y="1417320"/>
+            <a:ext cx="7315" cy="4663440"/>
+          </a:xfrm>
+          <a:prstGeom prst="rect">
+            <a:avLst/>
+          </a:prstGeom>
+          <a:solidFill>
+            <a:srgbClr val="C7DCE1"/>
+          </a:solidFill>
+          <a:ln>
+            <a:noFill/>
+          </a:ln>
+          <a:effectLst/>
+        </p:spPr>
+        <p:style>
+          <a:lnRef idx="1">
+            <a:schemeClr val="accent1"/>
+          </a:lnRef>
+          <a:fillRef idx="3">
+            <a:schemeClr val="accent1"/>
+          </a:fillRef>
+          <a:effectRef idx="2">
+            <a:schemeClr val="accent1"/>
+          </a:effectRef>
+          <a:fontRef idx="minor">
+            <a:schemeClr val="lt1"/>
+          </a:fontRef>
+        </p:style>
+        <p:txBody>
+          <a:bodyPr rtlCol="0" anchor="ctr"/>
+          <a:lstStyle/>
+          <a:p/>
+        </p:txBody>
+      </p:sp>
+      <p:sp>
+        <p:nvSpPr>
+          <p:cNvPr id="7" name="Rectangle 6"/>
+          <p:cNvSpPr/>
+          <p:nvPr/>
+        </p:nvSpPr>
+        <p:spPr>
+          <a:xfrm>
+            <a:off x="0" y="0"/>
+            <a:ext cx="201168" cy="6858000"/>
+          </a:xfrm>
+          <a:prstGeom prst="rect">
+            <a:avLst/>
+          </a:prstGeom>
+          <a:solidFill>
+            <a:srgbClr val="0B4A5A"/>
+          </a:solidFill>
+          <a:ln>
+            <a:noFill/>
+          </a:ln>
+          <a:effectLst/>
+        </p:spPr>
+        <p:style>
+          <a:lnRef idx="1">
+            <a:schemeClr val="accent1"/>
+          </a:lnRef>
+          <a:fillRef idx="3">
+            <a:schemeClr val="accent1"/>
+          </a:fillRef>
+          <a:effectRef idx="2">
+            <a:schemeClr val="accent1"/>
+          </a:effectRef>
+          <a:fontRef idx="minor">
+            <a:schemeClr val="lt1"/>
+          </a:fontRef>
+        </p:style>
+        <p:txBody>
+          <a:bodyPr rtlCol="0" anchor="ctr"/>
+          <a:lstStyle/>
+          <a:p/>
+        </p:txBody>
+      </p:sp>
+      <p:sp>
+        <p:nvSpPr>
+          <p:cNvPr id="8" name="Rectangle 7"/>
           <p:cNvSpPr/>
           <p:nvPr/>
         </p:nvSpPr>
@@ -23732,20 +25078,20 @@
       </p:sp>
       <p:sp>
         <p:nvSpPr>
-          <p:cNvPr id="7" name="Rectangle 6"/>
+          <p:cNvPr id="9" name="Rectangle 8"/>
           <p:cNvSpPr/>
           <p:nvPr/>
         </p:nvSpPr>
         <p:spPr>
           <a:xfrm>
             <a:off x="0" y="1171346"/>
-            <a:ext cx="12191695" cy="45720"/>
-          </a:xfrm>
-          <a:prstGeom prst="rect">
-            <a:avLst/>
-          </a:prstGeom>
-          <a:solidFill>
-            <a:srgbClr val="14A0B4"/>
+            <a:ext cx="12191695" cy="64008"/>
+          </a:xfrm>
+          <a:prstGeom prst="rect">
+            <a:avLst/>
+          </a:prstGeom>
+          <a:solidFill>
+            <a:srgbClr val="D98A2B"/>
           </a:solidFill>
           <a:ln>
             <a:noFill/>
@@ -23774,7 +25120,7 @@
       </p:sp>
       <p:sp>
         <p:nvSpPr>
-          <p:cNvPr id="8" name="TextBox 7"/>
+          <p:cNvPr id="10" name="TextBox 9"/>
           <p:cNvSpPr txBox="1"/>
           <p:nvPr/>
         </p:nvSpPr>
@@ -23809,14 +25155,14 @@
                 </a:solidFill>
                 <a:latin typeface="Calibri"/>
               </a:rPr>
-              <a:t>METODE · PENYARINGAN</a:t>
-            </a:r>
-          </a:p>
-        </p:txBody>
-      </p:sp>
-      <p:sp>
-        <p:nvSpPr>
-          <p:cNvPr id="9" name="TextBox 8"/>
+              <a:t>07  ·  METODE · PENYARINGAN</a:t>
+            </a:r>
+          </a:p>
+        </p:txBody>
+      </p:sp>
+      <p:sp>
+        <p:nvSpPr>
+          <p:cNvPr id="11" name="TextBox 10"/>
           <p:cNvSpPr txBox="1"/>
           <p:nvPr/>
         </p:nvSpPr>
@@ -23858,7 +25204,7 @@
       </p:sp>
       <p:sp>
         <p:nvSpPr>
-          <p:cNvPr id="10" name="Rounded Rectangle 9"/>
+          <p:cNvPr id="12" name="Rounded Rectangle 11"/>
           <p:cNvSpPr/>
           <p:nvPr/>
         </p:nvSpPr>
@@ -23904,7 +25250,7 @@
       </p:sp>
       <p:sp>
         <p:nvSpPr>
-          <p:cNvPr id="11" name="Rectangle 10"/>
+          <p:cNvPr id="13" name="Rectangle 12"/>
           <p:cNvSpPr/>
           <p:nvPr/>
         </p:nvSpPr>
@@ -23946,7 +25292,7 @@
       </p:sp>
       <p:sp>
         <p:nvSpPr>
-          <p:cNvPr id="12" name="TextBox 11"/>
+          <p:cNvPr id="14" name="TextBox 13"/>
           <p:cNvSpPr txBox="1"/>
           <p:nvPr/>
         </p:nvSpPr>
@@ -23988,7 +25334,7 @@
       </p:sp>
       <p:sp>
         <p:nvSpPr>
-          <p:cNvPr id="13" name="Rounded Rectangle 12"/>
+          <p:cNvPr id="15" name="Rounded Rectangle 14"/>
           <p:cNvSpPr/>
           <p:nvPr/>
         </p:nvSpPr>
@@ -24032,7 +25378,7 @@
       </p:sp>
       <p:sp>
         <p:nvSpPr>
-          <p:cNvPr id="14" name="TextBox 13"/>
+          <p:cNvPr id="16" name="TextBox 15"/>
           <p:cNvSpPr txBox="1"/>
           <p:nvPr/>
         </p:nvSpPr>
@@ -24074,7 +25420,7 @@
       </p:sp>
       <p:sp>
         <p:nvSpPr>
-          <p:cNvPr id="15" name="Rounded Rectangle 14"/>
+          <p:cNvPr id="17" name="Rounded Rectangle 16"/>
           <p:cNvSpPr/>
           <p:nvPr/>
         </p:nvSpPr>
@@ -24118,7 +25464,7 @@
       </p:sp>
       <p:sp>
         <p:nvSpPr>
-          <p:cNvPr id="16" name="TextBox 15"/>
+          <p:cNvPr id="18" name="TextBox 17"/>
           <p:cNvSpPr txBox="1"/>
           <p:nvPr/>
         </p:nvSpPr>
@@ -24160,7 +25506,7 @@
       </p:sp>
       <p:sp>
         <p:nvSpPr>
-          <p:cNvPr id="17" name="Rounded Rectangle 16"/>
+          <p:cNvPr id="19" name="Rounded Rectangle 18"/>
           <p:cNvSpPr/>
           <p:nvPr/>
         </p:nvSpPr>
@@ -24204,7 +25550,7 @@
       </p:sp>
       <p:sp>
         <p:nvSpPr>
-          <p:cNvPr id="18" name="TextBox 17"/>
+          <p:cNvPr id="20" name="TextBox 19"/>
           <p:cNvSpPr txBox="1"/>
           <p:nvPr/>
         </p:nvSpPr>
@@ -24246,7 +25592,7 @@
       </p:sp>
       <p:sp>
         <p:nvSpPr>
-          <p:cNvPr id="19" name="Rounded Rectangle 18"/>
+          <p:cNvPr id="21" name="Rounded Rectangle 20"/>
           <p:cNvSpPr/>
           <p:nvPr/>
         </p:nvSpPr>
@@ -24290,7 +25636,7 @@
       </p:sp>
       <p:sp>
         <p:nvSpPr>
-          <p:cNvPr id="20" name="TextBox 19"/>
+          <p:cNvPr id="22" name="TextBox 21"/>
           <p:cNvSpPr txBox="1"/>
           <p:nvPr/>
         </p:nvSpPr>
@@ -24332,7 +25678,7 @@
       </p:sp>
       <p:sp>
         <p:nvSpPr>
-          <p:cNvPr id="21" name="Rounded Rectangle 20"/>
+          <p:cNvPr id="23" name="Rounded Rectangle 22"/>
           <p:cNvSpPr/>
           <p:nvPr/>
         </p:nvSpPr>
@@ -24376,7 +25722,7 @@
       </p:sp>
       <p:sp>
         <p:nvSpPr>
-          <p:cNvPr id="22" name="TextBox 21"/>
+          <p:cNvPr id="24" name="TextBox 23"/>
           <p:cNvSpPr txBox="1"/>
           <p:nvPr/>
         </p:nvSpPr>
@@ -24418,7 +25764,7 @@
       </p:sp>
       <p:sp>
         <p:nvSpPr>
-          <p:cNvPr id="23" name="Rounded Rectangle 22"/>
+          <p:cNvPr id="25" name="Rounded Rectangle 24"/>
           <p:cNvSpPr/>
           <p:nvPr/>
         </p:nvSpPr>
@@ -24462,7 +25808,7 @@
       </p:sp>
       <p:sp>
         <p:nvSpPr>
-          <p:cNvPr id="24" name="TextBox 23"/>
+          <p:cNvPr id="26" name="TextBox 25"/>
           <p:cNvSpPr txBox="1"/>
           <p:nvPr/>
         </p:nvSpPr>
@@ -24504,7 +25850,7 @@
       </p:sp>
       <p:sp>
         <p:nvSpPr>
-          <p:cNvPr id="25" name="Rounded Rectangle 24"/>
+          <p:cNvPr id="27" name="Rounded Rectangle 26"/>
           <p:cNvSpPr/>
           <p:nvPr/>
         </p:nvSpPr>
@@ -24548,7 +25894,7 @@
       </p:sp>
       <p:sp>
         <p:nvSpPr>
-          <p:cNvPr id="26" name="TextBox 25"/>
+          <p:cNvPr id="28" name="TextBox 27"/>
           <p:cNvSpPr txBox="1"/>
           <p:nvPr/>
         </p:nvSpPr>
@@ -24590,7 +25936,7 @@
       </p:sp>
       <p:sp>
         <p:nvSpPr>
-          <p:cNvPr id="27" name="Rounded Rectangle 26"/>
+          <p:cNvPr id="29" name="Rounded Rectangle 28"/>
           <p:cNvSpPr/>
           <p:nvPr/>
         </p:nvSpPr>
@@ -24634,7 +25980,7 @@
       </p:sp>
       <p:sp>
         <p:nvSpPr>
-          <p:cNvPr id="28" name="TextBox 27"/>
+          <p:cNvPr id="30" name="TextBox 29"/>
           <p:cNvSpPr txBox="1"/>
           <p:nvPr/>
         </p:nvSpPr>
@@ -24676,7 +26022,7 @@
       </p:sp>
       <p:sp>
         <p:nvSpPr>
-          <p:cNvPr id="29" name="Rounded Rectangle 28"/>
+          <p:cNvPr id="31" name="Rounded Rectangle 30"/>
           <p:cNvSpPr/>
           <p:nvPr/>
         </p:nvSpPr>
@@ -24720,7 +26066,7 @@
       </p:sp>
       <p:sp>
         <p:nvSpPr>
-          <p:cNvPr id="30" name="TextBox 29"/>
+          <p:cNvPr id="32" name="TextBox 31"/>
           <p:cNvSpPr txBox="1"/>
           <p:nvPr/>
         </p:nvSpPr>
@@ -24762,7 +26108,7 @@
       </p:sp>
       <p:sp>
         <p:nvSpPr>
-          <p:cNvPr id="31" name="TextBox 30"/>
+          <p:cNvPr id="33" name="TextBox 32"/>
           <p:cNvSpPr txBox="1"/>
           <p:nvPr/>
         </p:nvSpPr>
@@ -24804,7 +26150,7 @@
       </p:sp>
       <p:sp>
         <p:nvSpPr>
-          <p:cNvPr id="32" name="TextBox 31"/>
+          <p:cNvPr id="34" name="TextBox 33"/>
           <p:cNvSpPr txBox="1"/>
           <p:nvPr/>
         </p:nvSpPr>
@@ -24846,20 +26192,20 @@
       </p:sp>
       <p:sp>
         <p:nvSpPr>
-          <p:cNvPr id="33" name="Rectangle 32"/>
+          <p:cNvPr id="35" name="Rectangle 34"/>
           <p:cNvSpPr/>
           <p:nvPr/>
         </p:nvSpPr>
         <p:spPr>
           <a:xfrm>
-            <a:off x="530352" y="6254496"/>
-            <a:ext cx="11130991" cy="12801"/>
-          </a:xfrm>
-          <a:prstGeom prst="rect">
-            <a:avLst/>
-          </a:prstGeom>
-          <a:solidFill>
-            <a:srgbClr val="D7E3E6"/>
+            <a:off x="0" y="6163056"/>
+            <a:ext cx="12191695" cy="694944"/>
+          </a:xfrm>
+          <a:prstGeom prst="rect">
+            <a:avLst/>
+          </a:prstGeom>
+          <a:solidFill>
+            <a:srgbClr val="0B4A5A"/>
           </a:solidFill>
           <a:ln>
             <a:noFill/>
@@ -24888,64 +26234,20 @@
       </p:sp>
       <p:sp>
         <p:nvSpPr>
-          <p:cNvPr id="34" name="TextBox 33"/>
-          <p:cNvSpPr txBox="1"/>
-          <p:nvPr/>
-        </p:nvSpPr>
-        <p:spPr>
-          <a:xfrm>
-            <a:off x="530352" y="6291072"/>
-            <a:ext cx="8595360" cy="256032"/>
-          </a:xfrm>
-          <a:prstGeom prst="rect">
-            <a:avLst/>
-          </a:prstGeom>
-          <a:noFill/>
-        </p:spPr>
-        <p:txBody>
-          <a:bodyPr wrap="square" lIns="0" rIns="0" tIns="0" bIns="0" anchor="t">
-            <a:noAutofit/>
-          </a:bodyPr>
-          <a:lstStyle/>
-          <a:p>
-            <a:pPr algn="l">
-              <a:spcBef>
-                <a:spcPts val="0"/>
-              </a:spcBef>
-              <a:spcAft>
-                <a:spcPts val="0"/>
-              </a:spcAft>
-            </a:pPr>
-            <a:r>
-              <a:rPr sz="900" b="0" i="0" lang="id-ID">
-                <a:solidFill>
-                  <a:srgbClr val="5C757C"/>
-                </a:solidFill>
-                <a:latin typeface="Calibri"/>
-              </a:rPr>
-              <a:t>Lopes dkk., Sci Rep 2021;11:22405 · DOI 10.1038/s41598-021-01541-7 · CC BY 4.0</a:t>
-            </a:r>
-          </a:p>
-        </p:txBody>
-      </p:sp>
-      <p:sp>
-        <p:nvSpPr>
-          <p:cNvPr id="35" name="Rounded Rectangle 34"/>
+          <p:cNvPr id="36" name="Rectangle 35"/>
           <p:cNvSpPr/>
           <p:nvPr/>
         </p:nvSpPr>
         <p:spPr>
           <a:xfrm>
-            <a:off x="11259007" y="6227064"/>
-            <a:ext cx="402336" cy="256032"/>
-          </a:xfrm>
-          <a:prstGeom prst="roundRect">
-            <a:avLst>
-              <a:gd name="adj" fmla="val 17857"/>
-            </a:avLst>
-          </a:prstGeom>
-          <a:solidFill>
-            <a:srgbClr val="0B4A5A"/>
+            <a:off x="0" y="6163056"/>
+            <a:ext cx="12191695" cy="41148"/>
+          </a:xfrm>
+          <a:prstGeom prst="rect">
+            <a:avLst/>
+          </a:prstGeom>
+          <a:solidFill>
+            <a:srgbClr val="D98A2B"/>
           </a:solidFill>
           <a:ln>
             <a:noFill/>
@@ -24974,14 +26276,14 @@
       </p:sp>
       <p:sp>
         <p:nvSpPr>
-          <p:cNvPr id="36" name="TextBox 35"/>
+          <p:cNvPr id="37" name="TextBox 36"/>
           <p:cNvSpPr txBox="1"/>
           <p:nvPr/>
         </p:nvSpPr>
         <p:spPr>
           <a:xfrm>
-            <a:off x="11259007" y="6286500"/>
-            <a:ext cx="402336" cy="182880"/>
+            <a:off x="530352" y="6327648"/>
+            <a:ext cx="8595360" cy="256032"/>
           </a:xfrm>
           <a:prstGeom prst="rect">
             <a:avLst/>
@@ -24994,6 +26296,92 @@
           </a:bodyPr>
           <a:lstStyle/>
           <a:p>
+            <a:pPr algn="l">
+              <a:spcBef>
+                <a:spcPts val="0"/>
+              </a:spcBef>
+              <a:spcAft>
+                <a:spcPts val="0"/>
+              </a:spcAft>
+            </a:pPr>
+            <a:r>
+              <a:rPr sz="850" b="0" i="0" lang="id-ID">
+                <a:solidFill>
+                  <a:srgbClr val="9FC7CF"/>
+                </a:solidFill>
+                <a:latin typeface="Calibri"/>
+              </a:rPr>
+              <a:t>Lopes dkk., Sci Rep 2021;11:22405 · DOI 10.1038/s41598-021-01541-7 · CC BY 4.0</a:t>
+            </a:r>
+          </a:p>
+        </p:txBody>
+      </p:sp>
+      <p:sp>
+        <p:nvSpPr>
+          <p:cNvPr id="38" name="Rounded Rectangle 37"/>
+          <p:cNvSpPr/>
+          <p:nvPr/>
+        </p:nvSpPr>
+        <p:spPr>
+          <a:xfrm>
+            <a:off x="11204143" y="6291072"/>
+            <a:ext cx="457200" cy="256032"/>
+          </a:xfrm>
+          <a:prstGeom prst="roundRect">
+            <a:avLst>
+              <a:gd name="adj" fmla="val 17857"/>
+            </a:avLst>
+          </a:prstGeom>
+          <a:solidFill>
+            <a:srgbClr val="E8F4F6"/>
+          </a:solidFill>
+          <a:ln>
+            <a:noFill/>
+          </a:ln>
+          <a:effectLst/>
+        </p:spPr>
+        <p:style>
+          <a:lnRef idx="1">
+            <a:schemeClr val="accent1"/>
+          </a:lnRef>
+          <a:fillRef idx="3">
+            <a:schemeClr val="accent1"/>
+          </a:fillRef>
+          <a:effectRef idx="2">
+            <a:schemeClr val="accent1"/>
+          </a:effectRef>
+          <a:fontRef idx="minor">
+            <a:schemeClr val="lt1"/>
+          </a:fontRef>
+        </p:style>
+        <p:txBody>
+          <a:bodyPr rtlCol="0" anchor="ctr"/>
+          <a:lstStyle/>
+          <a:p/>
+        </p:txBody>
+      </p:sp>
+      <p:sp>
+        <p:nvSpPr>
+          <p:cNvPr id="39" name="TextBox 38"/>
+          <p:cNvSpPr txBox="1"/>
+          <p:nvPr/>
+        </p:nvSpPr>
+        <p:spPr>
+          <a:xfrm>
+            <a:off x="11204143" y="6332220"/>
+            <a:ext cx="457200" cy="182880"/>
+          </a:xfrm>
+          <a:prstGeom prst="rect">
+            <a:avLst/>
+          </a:prstGeom>
+          <a:noFill/>
+        </p:spPr>
+        <p:txBody>
+          <a:bodyPr wrap="square" lIns="0" rIns="0" tIns="0" bIns="0" anchor="t">
+            <a:noAutofit/>
+          </a:bodyPr>
+          <a:lstStyle/>
+          <a:p>
             <a:pPr algn="ctr">
               <a:spcBef>
                 <a:spcPts val="0"/>
@@ -25005,7 +26393,7 @@
             <a:r>
               <a:rPr sz="950" b="1" i="0" lang="id-ID">
                 <a:solidFill>
-                  <a:srgbClr val="FFFFFF"/>
+                  <a:srgbClr val="0B4A5A"/>
                 </a:solidFill>
                 <a:latin typeface="Calibri"/>
               </a:rPr>
@@ -25046,17 +26434,9 @@
           <a:prstGeom prst="rect">
             <a:avLst/>
           </a:prstGeom>
-          <a:gradFill rotWithShape="1">
-            <a:gsLst>
-              <a:gs pos="0">
-                <a:srgbClr val="F9F7F3"/>
-              </a:gs>
-              <a:gs pos="100000">
-                <a:srgbClr val="E6EFF2"/>
-              </a:gs>
-            </a:gsLst>
-            <a:lin scaled="0" ang="19200000"/>
-          </a:gradFill>
+          <a:solidFill>
+            <a:srgbClr val="D8EAE5"/>
+          </a:solidFill>
           <a:ln>
             <a:noFill/>
           </a:ln>
@@ -25090,14 +26470,14 @@
         </p:nvSpPr>
         <p:spPr>
           <a:xfrm>
-            <a:off x="9098280" y="-2240280"/>
-            <a:ext cx="4480560" cy="4480560"/>
+            <a:off x="8732520" y="3520440"/>
+            <a:ext cx="5760720" cy="5760720"/>
           </a:xfrm>
           <a:prstGeom prst="ellipse">
             <a:avLst/>
           </a:prstGeom>
           <a:solidFill>
-            <a:srgbClr val="E4EFF1"/>
+            <a:srgbClr val="CCE1DF"/>
           </a:solidFill>
           <a:ln>
             <a:noFill/>
@@ -25126,20 +26506,20 @@
       </p:sp>
       <p:sp>
         <p:nvSpPr>
-          <p:cNvPr id="4" name="Oval 3"/>
+          <p:cNvPr id="4" name="Rectangle 3"/>
           <p:cNvSpPr/>
           <p:nvPr/>
         </p:nvSpPr>
         <p:spPr>
           <a:xfrm>
-            <a:off x="-1600200" y="4160520"/>
-            <a:ext cx="3931920" cy="3931920"/>
-          </a:xfrm>
-          <a:prstGeom prst="ellipse">
-            <a:avLst/>
-          </a:prstGeom>
-          <a:solidFill>
-            <a:srgbClr val="EAF3F4"/>
+            <a:off x="3309213" y="1417320"/>
+            <a:ext cx="7315" cy="4663440"/>
+          </a:xfrm>
+          <a:prstGeom prst="rect">
+            <a:avLst/>
+          </a:prstGeom>
+          <a:solidFill>
+            <a:srgbClr val="C7DCE1"/>
           </a:solidFill>
           <a:ln>
             <a:noFill/>
@@ -25174,16 +26554,14 @@
         </p:nvSpPr>
         <p:spPr>
           <a:xfrm>
-            <a:off x="0" y="6455664"/>
-            <a:ext cx="12191695" cy="402336"/>
-          </a:xfrm>
-          <a:prstGeom prst="rect">
-            <a:avLst/>
-          </a:prstGeom>
-          <a:solidFill>
-            <a:srgbClr val="DCE7EA">
-              <a:alpha val="85000"/>
-            </a:srgbClr>
+            <a:off x="6092647" y="1417320"/>
+            <a:ext cx="7315" cy="4663440"/>
+          </a:xfrm>
+          <a:prstGeom prst="rect">
+            <a:avLst/>
+          </a:prstGeom>
+          <a:solidFill>
+            <a:srgbClr val="C7DCE1"/>
           </a:solidFill>
           <a:ln>
             <a:noFill/>
@@ -25213,6 +26591,90 @@
       <p:sp>
         <p:nvSpPr>
           <p:cNvPr id="6" name="Rectangle 5"/>
+          <p:cNvSpPr/>
+          <p:nvPr/>
+        </p:nvSpPr>
+        <p:spPr>
+          <a:xfrm>
+            <a:off x="8875166" y="1417320"/>
+            <a:ext cx="7315" cy="4663440"/>
+          </a:xfrm>
+          <a:prstGeom prst="rect">
+            <a:avLst/>
+          </a:prstGeom>
+          <a:solidFill>
+            <a:srgbClr val="C7DCE1"/>
+          </a:solidFill>
+          <a:ln>
+            <a:noFill/>
+          </a:ln>
+          <a:effectLst/>
+        </p:spPr>
+        <p:style>
+          <a:lnRef idx="1">
+            <a:schemeClr val="accent1"/>
+          </a:lnRef>
+          <a:fillRef idx="3">
+            <a:schemeClr val="accent1"/>
+          </a:fillRef>
+          <a:effectRef idx="2">
+            <a:schemeClr val="accent1"/>
+          </a:effectRef>
+          <a:fontRef idx="minor">
+            <a:schemeClr val="lt1"/>
+          </a:fontRef>
+        </p:style>
+        <p:txBody>
+          <a:bodyPr rtlCol="0" anchor="ctr"/>
+          <a:lstStyle/>
+          <a:p/>
+        </p:txBody>
+      </p:sp>
+      <p:sp>
+        <p:nvSpPr>
+          <p:cNvPr id="7" name="Rectangle 6"/>
+          <p:cNvSpPr/>
+          <p:nvPr/>
+        </p:nvSpPr>
+        <p:spPr>
+          <a:xfrm>
+            <a:off x="0" y="0"/>
+            <a:ext cx="201168" cy="6858000"/>
+          </a:xfrm>
+          <a:prstGeom prst="rect">
+            <a:avLst/>
+          </a:prstGeom>
+          <a:solidFill>
+            <a:srgbClr val="0B4A5A"/>
+          </a:solidFill>
+          <a:ln>
+            <a:noFill/>
+          </a:ln>
+          <a:effectLst/>
+        </p:spPr>
+        <p:style>
+          <a:lnRef idx="1">
+            <a:schemeClr val="accent1"/>
+          </a:lnRef>
+          <a:fillRef idx="3">
+            <a:schemeClr val="accent1"/>
+          </a:fillRef>
+          <a:effectRef idx="2">
+            <a:schemeClr val="accent1"/>
+          </a:effectRef>
+          <a:fontRef idx="minor">
+            <a:schemeClr val="lt1"/>
+          </a:fontRef>
+        </p:style>
+        <p:txBody>
+          <a:bodyPr rtlCol="0" anchor="ctr"/>
+          <a:lstStyle/>
+          <a:p/>
+        </p:txBody>
+      </p:sp>
+      <p:sp>
+        <p:nvSpPr>
+          <p:cNvPr id="8" name="Rectangle 7"/>
           <p:cNvSpPr/>
           <p:nvPr/>
         </p:nvSpPr>
@@ -25262,20 +26724,20 @@
       </p:sp>
       <p:sp>
         <p:nvSpPr>
-          <p:cNvPr id="7" name="Rectangle 6"/>
+          <p:cNvPr id="9" name="Rectangle 8"/>
           <p:cNvSpPr/>
           <p:nvPr/>
         </p:nvSpPr>
         <p:spPr>
           <a:xfrm>
             <a:off x="0" y="1171346"/>
-            <a:ext cx="12191695" cy="45720"/>
-          </a:xfrm>
-          <a:prstGeom prst="rect">
-            <a:avLst/>
-          </a:prstGeom>
-          <a:solidFill>
-            <a:srgbClr val="14A0B4"/>
+            <a:ext cx="12191695" cy="64008"/>
+          </a:xfrm>
+          <a:prstGeom prst="rect">
+            <a:avLst/>
+          </a:prstGeom>
+          <a:solidFill>
+            <a:srgbClr val="D98A2B"/>
           </a:solidFill>
           <a:ln>
             <a:noFill/>
@@ -25304,7 +26766,7 @@
       </p:sp>
       <p:sp>
         <p:nvSpPr>
-          <p:cNvPr id="8" name="TextBox 7"/>
+          <p:cNvPr id="10" name="TextBox 9"/>
           <p:cNvSpPr txBox="1"/>
           <p:nvPr/>
         </p:nvSpPr>
@@ -25339,14 +26801,14 @@
                 </a:solidFill>
                 <a:latin typeface="Calibri"/>
               </a:rPr>
-              <a:t>HASIL · 1</a:t>
-            </a:r>
-          </a:p>
-        </p:txBody>
-      </p:sp>
-      <p:sp>
-        <p:nvSpPr>
-          <p:cNvPr id="9" name="TextBox 8"/>
+              <a:t>08  ·  HASIL · 1</a:t>
+            </a:r>
+          </a:p>
+        </p:txBody>
+      </p:sp>
+      <p:sp>
+        <p:nvSpPr>
+          <p:cNvPr id="11" name="TextBox 10"/>
           <p:cNvSpPr txBox="1"/>
           <p:nvPr/>
         </p:nvSpPr>
@@ -25388,7 +26850,7 @@
       </p:sp>
       <p:sp>
         <p:nvSpPr>
-          <p:cNvPr id="10" name="Rounded Rectangle 9"/>
+          <p:cNvPr id="12" name="Rounded Rectangle 11"/>
           <p:cNvSpPr/>
           <p:nvPr/>
         </p:nvSpPr>
@@ -25434,7 +26896,7 @@
       </p:sp>
       <p:sp>
         <p:nvSpPr>
-          <p:cNvPr id="11" name="Rectangle 10"/>
+          <p:cNvPr id="13" name="Rectangle 12"/>
           <p:cNvSpPr/>
           <p:nvPr/>
         </p:nvSpPr>
@@ -25476,7 +26938,7 @@
       </p:sp>
       <p:sp>
         <p:nvSpPr>
-          <p:cNvPr id="12" name="TextBox 11"/>
+          <p:cNvPr id="14" name="TextBox 13"/>
           <p:cNvSpPr txBox="1"/>
           <p:nvPr/>
         </p:nvSpPr>
@@ -25518,7 +26980,7 @@
       </p:sp>
       <p:sp>
         <p:nvSpPr>
-          <p:cNvPr id="13" name="Rounded Rectangle 12"/>
+          <p:cNvPr id="15" name="Rounded Rectangle 14"/>
           <p:cNvSpPr/>
           <p:nvPr/>
         </p:nvSpPr>
@@ -25562,7 +27024,7 @@
       </p:sp>
       <p:graphicFrame>
         <p:nvGraphicFramePr>
-          <p:cNvPr id="14" name="Chart 13"/>
+          <p:cNvPr id="16" name="Chart 15"/>
           <p:cNvGraphicFramePr>
             <a:graphicFrameLocks noGrp="1"/>
           </p:cNvGraphicFramePr>
@@ -25580,7 +27042,7 @@
       </p:graphicFrame>
       <p:sp>
         <p:nvSpPr>
-          <p:cNvPr id="15" name="TextBox 14"/>
+          <p:cNvPr id="17" name="TextBox 16"/>
           <p:cNvSpPr txBox="1"/>
           <p:nvPr/>
         </p:nvSpPr>
@@ -25622,7 +27084,7 @@
       </p:sp>
       <p:sp>
         <p:nvSpPr>
-          <p:cNvPr id="16" name="Rounded Rectangle 15"/>
+          <p:cNvPr id="18" name="Rounded Rectangle 17"/>
           <p:cNvSpPr/>
           <p:nvPr/>
         </p:nvSpPr>
@@ -25666,7 +27128,7 @@
       </p:sp>
       <p:sp>
         <p:nvSpPr>
-          <p:cNvPr id="17" name="TextBox 16"/>
+          <p:cNvPr id="19" name="TextBox 18"/>
           <p:cNvSpPr txBox="1"/>
           <p:nvPr/>
         </p:nvSpPr>
@@ -25708,7 +27170,7 @@
       </p:sp>
       <p:sp>
         <p:nvSpPr>
-          <p:cNvPr id="18" name="TextBox 17"/>
+          <p:cNvPr id="20" name="TextBox 19"/>
           <p:cNvSpPr txBox="1"/>
           <p:nvPr/>
         </p:nvSpPr>
@@ -25750,7 +27212,7 @@
       </p:sp>
       <p:sp>
         <p:nvSpPr>
-          <p:cNvPr id="19" name="TextBox 18"/>
+          <p:cNvPr id="21" name="TextBox 20"/>
           <p:cNvSpPr txBox="1"/>
           <p:nvPr/>
         </p:nvSpPr>
@@ -25792,7 +27254,7 @@
       </p:sp>
       <p:sp>
         <p:nvSpPr>
-          <p:cNvPr id="20" name="TextBox 19"/>
+          <p:cNvPr id="22" name="TextBox 21"/>
           <p:cNvSpPr txBox="1"/>
           <p:nvPr/>
         </p:nvSpPr>
@@ -25834,7 +27296,7 @@
       </p:sp>
       <p:sp>
         <p:nvSpPr>
-          <p:cNvPr id="21" name="TextBox 20"/>
+          <p:cNvPr id="23" name="TextBox 22"/>
           <p:cNvSpPr txBox="1"/>
           <p:nvPr/>
         </p:nvSpPr>
@@ -25876,7 +27338,7 @@
       </p:sp>
       <p:sp>
         <p:nvSpPr>
-          <p:cNvPr id="22" name="TextBox 21"/>
+          <p:cNvPr id="24" name="TextBox 23"/>
           <p:cNvSpPr txBox="1"/>
           <p:nvPr/>
         </p:nvSpPr>
@@ -25918,7 +27380,7 @@
       </p:sp>
       <p:sp>
         <p:nvSpPr>
-          <p:cNvPr id="23" name="TextBox 22"/>
+          <p:cNvPr id="25" name="TextBox 24"/>
           <p:cNvSpPr txBox="1"/>
           <p:nvPr/>
         </p:nvSpPr>
@@ -25960,7 +27422,7 @@
       </p:sp>
       <p:sp>
         <p:nvSpPr>
-          <p:cNvPr id="24" name="Rounded Rectangle 23"/>
+          <p:cNvPr id="26" name="Rounded Rectangle 25"/>
           <p:cNvSpPr/>
           <p:nvPr/>
         </p:nvSpPr>
@@ -26004,7 +27466,7 @@
       </p:sp>
       <p:sp>
         <p:nvSpPr>
-          <p:cNvPr id="25" name="TextBox 24"/>
+          <p:cNvPr id="27" name="TextBox 26"/>
           <p:cNvSpPr txBox="1"/>
           <p:nvPr/>
         </p:nvSpPr>
@@ -26046,20 +27508,20 @@
       </p:sp>
       <p:sp>
         <p:nvSpPr>
-          <p:cNvPr id="26" name="Rectangle 25"/>
+          <p:cNvPr id="28" name="Rectangle 27"/>
           <p:cNvSpPr/>
           <p:nvPr/>
         </p:nvSpPr>
         <p:spPr>
           <a:xfrm>
-            <a:off x="530352" y="6254496"/>
-            <a:ext cx="11130991" cy="12801"/>
-          </a:xfrm>
-          <a:prstGeom prst="rect">
-            <a:avLst/>
-          </a:prstGeom>
-          <a:solidFill>
-            <a:srgbClr val="D7E3E6"/>
+            <a:off x="0" y="6163056"/>
+            <a:ext cx="12191695" cy="694944"/>
+          </a:xfrm>
+          <a:prstGeom prst="rect">
+            <a:avLst/>
+          </a:prstGeom>
+          <a:solidFill>
+            <a:srgbClr val="0B4A5A"/>
           </a:solidFill>
           <a:ln>
             <a:noFill/>
@@ -26088,64 +27550,20 @@
       </p:sp>
       <p:sp>
         <p:nvSpPr>
-          <p:cNvPr id="27" name="TextBox 26"/>
-          <p:cNvSpPr txBox="1"/>
-          <p:nvPr/>
-        </p:nvSpPr>
-        <p:spPr>
-          <a:xfrm>
-            <a:off x="530352" y="6291072"/>
-            <a:ext cx="8595360" cy="256032"/>
-          </a:xfrm>
-          <a:prstGeom prst="rect">
-            <a:avLst/>
-          </a:prstGeom>
-          <a:noFill/>
-        </p:spPr>
-        <p:txBody>
-          <a:bodyPr wrap="square" lIns="0" rIns="0" tIns="0" bIns="0" anchor="t">
-            <a:noAutofit/>
-          </a:bodyPr>
-          <a:lstStyle/>
-          <a:p>
-            <a:pPr algn="l">
-              <a:spcBef>
-                <a:spcPts val="0"/>
-              </a:spcBef>
-              <a:spcAft>
-                <a:spcPts val="0"/>
-              </a:spcAft>
-            </a:pPr>
-            <a:r>
-              <a:rPr sz="900" b="0" i="0" lang="id-ID">
-                <a:solidFill>
-                  <a:srgbClr val="5C757C"/>
-                </a:solidFill>
-                <a:latin typeface="Calibri"/>
-              </a:rPr>
-              <a:t>Lopes dkk., Sci Rep 2021;11:22405 · DOI 10.1038/s41598-021-01541-7 · CC BY 4.0</a:t>
-            </a:r>
-          </a:p>
-        </p:txBody>
-      </p:sp>
-      <p:sp>
-        <p:nvSpPr>
-          <p:cNvPr id="28" name="Rounded Rectangle 27"/>
+          <p:cNvPr id="29" name="Rectangle 28"/>
           <p:cNvSpPr/>
           <p:nvPr/>
         </p:nvSpPr>
         <p:spPr>
           <a:xfrm>
-            <a:off x="11259007" y="6227064"/>
-            <a:ext cx="402336" cy="256032"/>
-          </a:xfrm>
-          <a:prstGeom prst="roundRect">
-            <a:avLst>
-              <a:gd name="adj" fmla="val 17857"/>
-            </a:avLst>
-          </a:prstGeom>
-          <a:solidFill>
-            <a:srgbClr val="0B4A5A"/>
+            <a:off x="0" y="6163056"/>
+            <a:ext cx="12191695" cy="41148"/>
+          </a:xfrm>
+          <a:prstGeom prst="rect">
+            <a:avLst/>
+          </a:prstGeom>
+          <a:solidFill>
+            <a:srgbClr val="D98A2B"/>
           </a:solidFill>
           <a:ln>
             <a:noFill/>
@@ -26174,14 +27592,14 @@
       </p:sp>
       <p:sp>
         <p:nvSpPr>
-          <p:cNvPr id="29" name="TextBox 28"/>
+          <p:cNvPr id="30" name="TextBox 29"/>
           <p:cNvSpPr txBox="1"/>
           <p:nvPr/>
         </p:nvSpPr>
         <p:spPr>
           <a:xfrm>
-            <a:off x="11259007" y="6286500"/>
-            <a:ext cx="402336" cy="182880"/>
+            <a:off x="530352" y="6327648"/>
+            <a:ext cx="8595360" cy="256032"/>
           </a:xfrm>
           <a:prstGeom prst="rect">
             <a:avLst/>
@@ -26194,6 +27612,92 @@
           </a:bodyPr>
           <a:lstStyle/>
           <a:p>
+            <a:pPr algn="l">
+              <a:spcBef>
+                <a:spcPts val="0"/>
+              </a:spcBef>
+              <a:spcAft>
+                <a:spcPts val="0"/>
+              </a:spcAft>
+            </a:pPr>
+            <a:r>
+              <a:rPr sz="850" b="0" i="0" lang="id-ID">
+                <a:solidFill>
+                  <a:srgbClr val="9FC7CF"/>
+                </a:solidFill>
+                <a:latin typeface="Calibri"/>
+              </a:rPr>
+              <a:t>Lopes dkk., Sci Rep 2021;11:22405 · DOI 10.1038/s41598-021-01541-7 · CC BY 4.0</a:t>
+            </a:r>
+          </a:p>
+        </p:txBody>
+      </p:sp>
+      <p:sp>
+        <p:nvSpPr>
+          <p:cNvPr id="31" name="Rounded Rectangle 30"/>
+          <p:cNvSpPr/>
+          <p:nvPr/>
+        </p:nvSpPr>
+        <p:spPr>
+          <a:xfrm>
+            <a:off x="11204143" y="6291072"/>
+            <a:ext cx="457200" cy="256032"/>
+          </a:xfrm>
+          <a:prstGeom prst="roundRect">
+            <a:avLst>
+              <a:gd name="adj" fmla="val 17857"/>
+            </a:avLst>
+          </a:prstGeom>
+          <a:solidFill>
+            <a:srgbClr val="E8F4F6"/>
+          </a:solidFill>
+          <a:ln>
+            <a:noFill/>
+          </a:ln>
+          <a:effectLst/>
+        </p:spPr>
+        <p:style>
+          <a:lnRef idx="1">
+            <a:schemeClr val="accent1"/>
+          </a:lnRef>
+          <a:fillRef idx="3">
+            <a:schemeClr val="accent1"/>
+          </a:fillRef>
+          <a:effectRef idx="2">
+            <a:schemeClr val="accent1"/>
+          </a:effectRef>
+          <a:fontRef idx="minor">
+            <a:schemeClr val="lt1"/>
+          </a:fontRef>
+        </p:style>
+        <p:txBody>
+          <a:bodyPr rtlCol="0" anchor="ctr"/>
+          <a:lstStyle/>
+          <a:p/>
+        </p:txBody>
+      </p:sp>
+      <p:sp>
+        <p:nvSpPr>
+          <p:cNvPr id="32" name="TextBox 31"/>
+          <p:cNvSpPr txBox="1"/>
+          <p:nvPr/>
+        </p:nvSpPr>
+        <p:spPr>
+          <a:xfrm>
+            <a:off x="11204143" y="6332220"/>
+            <a:ext cx="457200" cy="182880"/>
+          </a:xfrm>
+          <a:prstGeom prst="rect">
+            <a:avLst/>
+          </a:prstGeom>
+          <a:noFill/>
+        </p:spPr>
+        <p:txBody>
+          <a:bodyPr wrap="square" lIns="0" rIns="0" tIns="0" bIns="0" anchor="t">
+            <a:noAutofit/>
+          </a:bodyPr>
+          <a:lstStyle/>
+          <a:p>
             <a:pPr algn="ctr">
               <a:spcBef>
                 <a:spcPts val="0"/>
@@ -26205,7 +27709,7 @@
             <a:r>
               <a:rPr sz="950" b="1" i="0" lang="id-ID">
                 <a:solidFill>
-                  <a:srgbClr val="FFFFFF"/>
+                  <a:srgbClr val="0B4A5A"/>
                 </a:solidFill>
                 <a:latin typeface="Calibri"/>
               </a:rPr>
@@ -26246,17 +27750,9 @@
           <a:prstGeom prst="rect">
             <a:avLst/>
           </a:prstGeom>
-          <a:gradFill rotWithShape="1">
-            <a:gsLst>
-              <a:gs pos="0">
-                <a:srgbClr val="F9F7F3"/>
-              </a:gs>
-              <a:gs pos="100000">
-                <a:srgbClr val="E6EFF2"/>
-              </a:gs>
-            </a:gsLst>
-            <a:lin scaled="0" ang="19200000"/>
-          </a:gradFill>
+          <a:solidFill>
+            <a:srgbClr val="D8EAE5"/>
+          </a:solidFill>
           <a:ln>
             <a:noFill/>
           </a:ln>
@@ -26290,14 +27786,14 @@
         </p:nvSpPr>
         <p:spPr>
           <a:xfrm>
-            <a:off x="9098280" y="-2240280"/>
-            <a:ext cx="4480560" cy="4480560"/>
+            <a:off x="8732520" y="3520440"/>
+            <a:ext cx="5760720" cy="5760720"/>
           </a:xfrm>
           <a:prstGeom prst="ellipse">
             <a:avLst/>
           </a:prstGeom>
           <a:solidFill>
-            <a:srgbClr val="E4EFF1"/>
+            <a:srgbClr val="CCE1DF"/>
           </a:solidFill>
           <a:ln>
             <a:noFill/>
@@ -26326,20 +27822,20 @@
       </p:sp>
       <p:sp>
         <p:nvSpPr>
-          <p:cNvPr id="4" name="Oval 3"/>
+          <p:cNvPr id="4" name="Rectangle 3"/>
           <p:cNvSpPr/>
           <p:nvPr/>
         </p:nvSpPr>
         <p:spPr>
           <a:xfrm>
-            <a:off x="-1600200" y="4160520"/>
-            <a:ext cx="3931920" cy="3931920"/>
-          </a:xfrm>
-          <a:prstGeom prst="ellipse">
-            <a:avLst/>
-          </a:prstGeom>
-          <a:solidFill>
-            <a:srgbClr val="EAF3F4"/>
+            <a:off x="3309213" y="1417320"/>
+            <a:ext cx="7315" cy="4663440"/>
+          </a:xfrm>
+          <a:prstGeom prst="rect">
+            <a:avLst/>
+          </a:prstGeom>
+          <a:solidFill>
+            <a:srgbClr val="C7DCE1"/>
           </a:solidFill>
           <a:ln>
             <a:noFill/>
@@ -26374,16 +27870,14 @@
         </p:nvSpPr>
         <p:spPr>
           <a:xfrm>
-            <a:off x="0" y="6455664"/>
-            <a:ext cx="12191695" cy="402336"/>
-          </a:xfrm>
-          <a:prstGeom prst="rect">
-            <a:avLst/>
-          </a:prstGeom>
-          <a:solidFill>
-            <a:srgbClr val="DCE7EA">
-              <a:alpha val="85000"/>
-            </a:srgbClr>
+            <a:off x="6092647" y="1417320"/>
+            <a:ext cx="7315" cy="4663440"/>
+          </a:xfrm>
+          <a:prstGeom prst="rect">
+            <a:avLst/>
+          </a:prstGeom>
+          <a:solidFill>
+            <a:srgbClr val="C7DCE1"/>
           </a:solidFill>
           <a:ln>
             <a:noFill/>
@@ -26413,6 +27907,90 @@
       <p:sp>
         <p:nvSpPr>
           <p:cNvPr id="6" name="Rectangle 5"/>
+          <p:cNvSpPr/>
+          <p:nvPr/>
+        </p:nvSpPr>
+        <p:spPr>
+          <a:xfrm>
+            <a:off x="8875166" y="1417320"/>
+            <a:ext cx="7315" cy="4663440"/>
+          </a:xfrm>
+          <a:prstGeom prst="rect">
+            <a:avLst/>
+          </a:prstGeom>
+          <a:solidFill>
+            <a:srgbClr val="C7DCE1"/>
+          </a:solidFill>
+          <a:ln>
+            <a:noFill/>
+          </a:ln>
+          <a:effectLst/>
+        </p:spPr>
+        <p:style>
+          <a:lnRef idx="1">
+            <a:schemeClr val="accent1"/>
+          </a:lnRef>
+          <a:fillRef idx="3">
+            <a:schemeClr val="accent1"/>
+          </a:fillRef>
+          <a:effectRef idx="2">
+            <a:schemeClr val="accent1"/>
+          </a:effectRef>
+          <a:fontRef idx="minor">
+            <a:schemeClr val="lt1"/>
+          </a:fontRef>
+        </p:style>
+        <p:txBody>
+          <a:bodyPr rtlCol="0" anchor="ctr"/>
+          <a:lstStyle/>
+          <a:p/>
+        </p:txBody>
+      </p:sp>
+      <p:sp>
+        <p:nvSpPr>
+          <p:cNvPr id="7" name="Rectangle 6"/>
+          <p:cNvSpPr/>
+          <p:nvPr/>
+        </p:nvSpPr>
+        <p:spPr>
+          <a:xfrm>
+            <a:off x="0" y="0"/>
+            <a:ext cx="201168" cy="6858000"/>
+          </a:xfrm>
+          <a:prstGeom prst="rect">
+            <a:avLst/>
+          </a:prstGeom>
+          <a:solidFill>
+            <a:srgbClr val="0B4A5A"/>
+          </a:solidFill>
+          <a:ln>
+            <a:noFill/>
+          </a:ln>
+          <a:effectLst/>
+        </p:spPr>
+        <p:style>
+          <a:lnRef idx="1">
+            <a:schemeClr val="accent1"/>
+          </a:lnRef>
+          <a:fillRef idx="3">
+            <a:schemeClr val="accent1"/>
+          </a:fillRef>
+          <a:effectRef idx="2">
+            <a:schemeClr val="accent1"/>
+          </a:effectRef>
+          <a:fontRef idx="minor">
+            <a:schemeClr val="lt1"/>
+          </a:fontRef>
+        </p:style>
+        <p:txBody>
+          <a:bodyPr rtlCol="0" anchor="ctr"/>
+          <a:lstStyle/>
+          <a:p/>
+        </p:txBody>
+      </p:sp>
+      <p:sp>
+        <p:nvSpPr>
+          <p:cNvPr id="8" name="Rectangle 7"/>
           <p:cNvSpPr/>
           <p:nvPr/>
         </p:nvSpPr>
@@ -26462,20 +28040,20 @@
       </p:sp>
       <p:sp>
         <p:nvSpPr>
-          <p:cNvPr id="7" name="Rectangle 6"/>
+          <p:cNvPr id="9" name="Rectangle 8"/>
           <p:cNvSpPr/>
           <p:nvPr/>
         </p:nvSpPr>
         <p:spPr>
           <a:xfrm>
             <a:off x="0" y="1171346"/>
-            <a:ext cx="12191695" cy="45720"/>
-          </a:xfrm>
-          <a:prstGeom prst="rect">
-            <a:avLst/>
-          </a:prstGeom>
-          <a:solidFill>
-            <a:srgbClr val="14A0B4"/>
+            <a:ext cx="12191695" cy="64008"/>
+          </a:xfrm>
+          <a:prstGeom prst="rect">
+            <a:avLst/>
+          </a:prstGeom>
+          <a:solidFill>
+            <a:srgbClr val="D98A2B"/>
           </a:solidFill>
           <a:ln>
             <a:noFill/>
@@ -26504,7 +28082,7 @@
       </p:sp>
       <p:sp>
         <p:nvSpPr>
-          <p:cNvPr id="8" name="TextBox 7"/>
+          <p:cNvPr id="10" name="TextBox 9"/>
           <p:cNvSpPr txBox="1"/>
           <p:nvPr/>
         </p:nvSpPr>
@@ -26539,14 +28117,14 @@
                 </a:solidFill>
                 <a:latin typeface="Calibri"/>
               </a:rPr>
-              <a:t>HASIL · 2</a:t>
-            </a:r>
-          </a:p>
-        </p:txBody>
-      </p:sp>
-      <p:sp>
-        <p:nvSpPr>
-          <p:cNvPr id="9" name="TextBox 8"/>
+              <a:t>09  ·  HASIL · 2</a:t>
+            </a:r>
+          </a:p>
+        </p:txBody>
+      </p:sp>
+      <p:sp>
+        <p:nvSpPr>
+          <p:cNvPr id="11" name="TextBox 10"/>
           <p:cNvSpPr txBox="1"/>
           <p:nvPr/>
         </p:nvSpPr>
@@ -26588,7 +28166,7 @@
       </p:sp>
       <p:sp>
         <p:nvSpPr>
-          <p:cNvPr id="10" name="Rounded Rectangle 9"/>
+          <p:cNvPr id="12" name="Rounded Rectangle 11"/>
           <p:cNvSpPr/>
           <p:nvPr/>
         </p:nvSpPr>
@@ -26634,7 +28212,7 @@
       </p:sp>
       <p:sp>
         <p:nvSpPr>
-          <p:cNvPr id="11" name="Rectangle 10"/>
+          <p:cNvPr id="13" name="Rectangle 12"/>
           <p:cNvSpPr/>
           <p:nvPr/>
         </p:nvSpPr>
@@ -26676,7 +28254,7 @@
       </p:sp>
       <p:sp>
         <p:nvSpPr>
-          <p:cNvPr id="12" name="TextBox 11"/>
+          <p:cNvPr id="14" name="TextBox 13"/>
           <p:cNvSpPr txBox="1"/>
           <p:nvPr/>
         </p:nvSpPr>
@@ -26718,7 +28296,7 @@
       </p:sp>
       <p:sp>
         <p:nvSpPr>
-          <p:cNvPr id="13" name="Rounded Rectangle 12"/>
+          <p:cNvPr id="15" name="Rounded Rectangle 14"/>
           <p:cNvSpPr/>
           <p:nvPr/>
         </p:nvSpPr>
@@ -26762,7 +28340,7 @@
       </p:sp>
       <p:graphicFrame>
         <p:nvGraphicFramePr>
-          <p:cNvPr id="14" name="Chart 13"/>
+          <p:cNvPr id="16" name="Chart 15"/>
           <p:cNvGraphicFramePr>
             <a:graphicFrameLocks noGrp="1"/>
           </p:cNvGraphicFramePr>
@@ -26780,7 +28358,7 @@
       </p:graphicFrame>
       <p:sp>
         <p:nvSpPr>
-          <p:cNvPr id="15" name="TextBox 14"/>
+          <p:cNvPr id="17" name="TextBox 16"/>
           <p:cNvSpPr txBox="1"/>
           <p:nvPr/>
         </p:nvSpPr>
@@ -26822,7 +28400,7 @@
       </p:sp>
       <p:sp>
         <p:nvSpPr>
-          <p:cNvPr id="16" name="TextBox 15"/>
+          <p:cNvPr id="18" name="TextBox 17"/>
           <p:cNvSpPr txBox="1"/>
           <p:nvPr/>
         </p:nvSpPr>
@@ -26864,7 +28442,7 @@
       </p:sp>
       <p:sp>
         <p:nvSpPr>
-          <p:cNvPr id="17" name="Rounded Rectangle 16"/>
+          <p:cNvPr id="19" name="Rounded Rectangle 18"/>
           <p:cNvSpPr/>
           <p:nvPr/>
         </p:nvSpPr>
@@ -26908,7 +28486,7 @@
       </p:sp>
       <p:sp>
         <p:nvSpPr>
-          <p:cNvPr id="18" name="TextBox 17"/>
+          <p:cNvPr id="20" name="TextBox 19"/>
           <p:cNvSpPr txBox="1"/>
           <p:nvPr/>
         </p:nvSpPr>
@@ -26950,7 +28528,7 @@
       </p:sp>
       <p:sp>
         <p:nvSpPr>
-          <p:cNvPr id="19" name="TextBox 18"/>
+          <p:cNvPr id="21" name="TextBox 20"/>
           <p:cNvSpPr txBox="1"/>
           <p:nvPr/>
         </p:nvSpPr>
@@ -26992,7 +28570,7 @@
       </p:sp>
       <p:sp>
         <p:nvSpPr>
-          <p:cNvPr id="20" name="Rounded Rectangle 19"/>
+          <p:cNvPr id="22" name="Rounded Rectangle 21"/>
           <p:cNvSpPr/>
           <p:nvPr/>
         </p:nvSpPr>
@@ -27036,7 +28614,7 @@
       </p:sp>
       <p:sp>
         <p:nvSpPr>
-          <p:cNvPr id="21" name="TextBox 20"/>
+          <p:cNvPr id="23" name="TextBox 22"/>
           <p:cNvSpPr txBox="1"/>
           <p:nvPr/>
         </p:nvSpPr>
@@ -27078,7 +28656,7 @@
       </p:sp>
       <p:sp>
         <p:nvSpPr>
-          <p:cNvPr id="22" name="TextBox 21"/>
+          <p:cNvPr id="24" name="TextBox 23"/>
           <p:cNvSpPr txBox="1"/>
           <p:nvPr/>
         </p:nvSpPr>
@@ -27120,7 +28698,7 @@
       </p:sp>
       <p:sp>
         <p:nvSpPr>
-          <p:cNvPr id="23" name="Rounded Rectangle 22"/>
+          <p:cNvPr id="25" name="Rounded Rectangle 24"/>
           <p:cNvSpPr/>
           <p:nvPr/>
         </p:nvSpPr>
@@ -27164,7 +28742,7 @@
       </p:sp>
       <p:sp>
         <p:nvSpPr>
-          <p:cNvPr id="24" name="TextBox 23"/>
+          <p:cNvPr id="26" name="TextBox 25"/>
           <p:cNvSpPr txBox="1"/>
           <p:nvPr/>
         </p:nvSpPr>
@@ -27206,7 +28784,7 @@
       </p:sp>
       <p:sp>
         <p:nvSpPr>
-          <p:cNvPr id="25" name="TextBox 24"/>
+          <p:cNvPr id="27" name="TextBox 26"/>
           <p:cNvSpPr txBox="1"/>
           <p:nvPr/>
         </p:nvSpPr>
@@ -27248,7 +28826,7 @@
       </p:sp>
       <p:sp>
         <p:nvSpPr>
-          <p:cNvPr id="26" name="Rounded Rectangle 25"/>
+          <p:cNvPr id="28" name="Rounded Rectangle 27"/>
           <p:cNvSpPr/>
           <p:nvPr/>
         </p:nvSpPr>
@@ -27292,7 +28870,7 @@
       </p:sp>
       <p:sp>
         <p:nvSpPr>
-          <p:cNvPr id="27" name="TextBox 26"/>
+          <p:cNvPr id="29" name="TextBox 28"/>
           <p:cNvSpPr txBox="1"/>
           <p:nvPr/>
         </p:nvSpPr>
@@ -27334,7 +28912,7 @@
       </p:sp>
       <p:sp>
         <p:nvSpPr>
-          <p:cNvPr id="28" name="TextBox 27"/>
+          <p:cNvPr id="30" name="TextBox 29"/>
           <p:cNvSpPr txBox="1"/>
           <p:nvPr/>
         </p:nvSpPr>
@@ -27376,7 +28954,7 @@
       </p:sp>
       <p:sp>
         <p:nvSpPr>
-          <p:cNvPr id="29" name="TextBox 28"/>
+          <p:cNvPr id="31" name="TextBox 30"/>
           <p:cNvSpPr txBox="1"/>
           <p:nvPr/>
         </p:nvSpPr>
@@ -27418,7 +28996,7 @@
       </p:sp>
       <p:sp>
         <p:nvSpPr>
-          <p:cNvPr id="30" name="TextBox 29"/>
+          <p:cNvPr id="32" name="TextBox 31"/>
           <p:cNvSpPr txBox="1"/>
           <p:nvPr/>
         </p:nvSpPr>
@@ -27460,7 +29038,7 @@
       </p:sp>
       <p:sp>
         <p:nvSpPr>
-          <p:cNvPr id="31" name="TextBox 30"/>
+          <p:cNvPr id="33" name="TextBox 32"/>
           <p:cNvSpPr txBox="1"/>
           <p:nvPr/>
         </p:nvSpPr>
@@ -27502,7 +29080,7 @@
       </p:sp>
       <p:sp>
         <p:nvSpPr>
-          <p:cNvPr id="32" name="TextBox 31"/>
+          <p:cNvPr id="34" name="TextBox 33"/>
           <p:cNvSpPr txBox="1"/>
           <p:nvPr/>
         </p:nvSpPr>
@@ -27544,7 +29122,7 @@
       </p:sp>
       <p:sp>
         <p:nvSpPr>
-          <p:cNvPr id="33" name="TextBox 32"/>
+          <p:cNvPr id="35" name="TextBox 34"/>
           <p:cNvSpPr txBox="1"/>
           <p:nvPr/>
         </p:nvSpPr>
@@ -27586,7 +29164,7 @@
       </p:sp>
       <p:sp>
         <p:nvSpPr>
-          <p:cNvPr id="34" name="Rounded Rectangle 33"/>
+          <p:cNvPr id="36" name="Rounded Rectangle 35"/>
           <p:cNvSpPr/>
           <p:nvPr/>
         </p:nvSpPr>
@@ -27630,7 +29208,7 @@
       </p:sp>
       <p:sp>
         <p:nvSpPr>
-          <p:cNvPr id="35" name="TextBox 34"/>
+          <p:cNvPr id="37" name="TextBox 36"/>
           <p:cNvSpPr txBox="1"/>
           <p:nvPr/>
         </p:nvSpPr>
@@ -27672,20 +29250,20 @@
       </p:sp>
       <p:sp>
         <p:nvSpPr>
-          <p:cNvPr id="36" name="Rectangle 35"/>
+          <p:cNvPr id="38" name="Rectangle 37"/>
           <p:cNvSpPr/>
           <p:nvPr/>
         </p:nvSpPr>
         <p:spPr>
           <a:xfrm>
-            <a:off x="530352" y="6254496"/>
-            <a:ext cx="11130991" cy="12801"/>
-          </a:xfrm>
-          <a:prstGeom prst="rect">
-            <a:avLst/>
-          </a:prstGeom>
-          <a:solidFill>
-            <a:srgbClr val="D7E3E6"/>
+            <a:off x="0" y="6163056"/>
+            <a:ext cx="12191695" cy="694944"/>
+          </a:xfrm>
+          <a:prstGeom prst="rect">
+            <a:avLst/>
+          </a:prstGeom>
+          <a:solidFill>
+            <a:srgbClr val="0B4A5A"/>
           </a:solidFill>
           <a:ln>
             <a:noFill/>
@@ -27714,64 +29292,20 @@
       </p:sp>
       <p:sp>
         <p:nvSpPr>
-          <p:cNvPr id="37" name="TextBox 36"/>
-          <p:cNvSpPr txBox="1"/>
-          <p:nvPr/>
-        </p:nvSpPr>
-        <p:spPr>
-          <a:xfrm>
-            <a:off x="530352" y="6291072"/>
-            <a:ext cx="8595360" cy="256032"/>
-          </a:xfrm>
-          <a:prstGeom prst="rect">
-            <a:avLst/>
-          </a:prstGeom>
-          <a:noFill/>
-        </p:spPr>
-        <p:txBody>
-          <a:bodyPr wrap="square" lIns="0" rIns="0" tIns="0" bIns="0" anchor="t">
-            <a:noAutofit/>
-          </a:bodyPr>
-          <a:lstStyle/>
-          <a:p>
-            <a:pPr algn="l">
-              <a:spcBef>
-                <a:spcPts val="0"/>
-              </a:spcBef>
-              <a:spcAft>
-                <a:spcPts val="0"/>
-              </a:spcAft>
-            </a:pPr>
-            <a:r>
-              <a:rPr sz="900" b="0" i="0" lang="id-ID">
-                <a:solidFill>
-                  <a:srgbClr val="5C757C"/>
-                </a:solidFill>
-                <a:latin typeface="Calibri"/>
-              </a:rPr>
-              <a:t>Lopes dkk., Sci Rep 2021;11:22405 · DOI 10.1038/s41598-021-01541-7 · CC BY 4.0</a:t>
-            </a:r>
-          </a:p>
-        </p:txBody>
-      </p:sp>
-      <p:sp>
-        <p:nvSpPr>
-          <p:cNvPr id="38" name="Rounded Rectangle 37"/>
+          <p:cNvPr id="39" name="Rectangle 38"/>
           <p:cNvSpPr/>
           <p:nvPr/>
         </p:nvSpPr>
         <p:spPr>
           <a:xfrm>
-            <a:off x="11259007" y="6227064"/>
-            <a:ext cx="402336" cy="256032"/>
-          </a:xfrm>
-          <a:prstGeom prst="roundRect">
-            <a:avLst>
-              <a:gd name="adj" fmla="val 17857"/>
-            </a:avLst>
-          </a:prstGeom>
-          <a:solidFill>
-            <a:srgbClr val="0B4A5A"/>
+            <a:off x="0" y="6163056"/>
+            <a:ext cx="12191695" cy="41148"/>
+          </a:xfrm>
+          <a:prstGeom prst="rect">
+            <a:avLst/>
+          </a:prstGeom>
+          <a:solidFill>
+            <a:srgbClr val="D98A2B"/>
           </a:solidFill>
           <a:ln>
             <a:noFill/>
@@ -27800,14 +29334,14 @@
       </p:sp>
       <p:sp>
         <p:nvSpPr>
-          <p:cNvPr id="39" name="TextBox 38"/>
+          <p:cNvPr id="40" name="TextBox 39"/>
           <p:cNvSpPr txBox="1"/>
           <p:nvPr/>
         </p:nvSpPr>
         <p:spPr>
           <a:xfrm>
-            <a:off x="11259007" y="6286500"/>
-            <a:ext cx="402336" cy="182880"/>
+            <a:off x="530352" y="6327648"/>
+            <a:ext cx="8595360" cy="256032"/>
           </a:xfrm>
           <a:prstGeom prst="rect">
             <a:avLst/>
@@ -27820,6 +29354,92 @@
           </a:bodyPr>
           <a:lstStyle/>
           <a:p>
+            <a:pPr algn="l">
+              <a:spcBef>
+                <a:spcPts val="0"/>
+              </a:spcBef>
+              <a:spcAft>
+                <a:spcPts val="0"/>
+              </a:spcAft>
+            </a:pPr>
+            <a:r>
+              <a:rPr sz="850" b="0" i="0" lang="id-ID">
+                <a:solidFill>
+                  <a:srgbClr val="9FC7CF"/>
+                </a:solidFill>
+                <a:latin typeface="Calibri"/>
+              </a:rPr>
+              <a:t>Lopes dkk., Sci Rep 2021;11:22405 · DOI 10.1038/s41598-021-01541-7 · CC BY 4.0</a:t>
+            </a:r>
+          </a:p>
+        </p:txBody>
+      </p:sp>
+      <p:sp>
+        <p:nvSpPr>
+          <p:cNvPr id="41" name="Rounded Rectangle 40"/>
+          <p:cNvSpPr/>
+          <p:nvPr/>
+        </p:nvSpPr>
+        <p:spPr>
+          <a:xfrm>
+            <a:off x="11204143" y="6291072"/>
+            <a:ext cx="457200" cy="256032"/>
+          </a:xfrm>
+          <a:prstGeom prst="roundRect">
+            <a:avLst>
+              <a:gd name="adj" fmla="val 17857"/>
+            </a:avLst>
+          </a:prstGeom>
+          <a:solidFill>
+            <a:srgbClr val="E8F4F6"/>
+          </a:solidFill>
+          <a:ln>
+            <a:noFill/>
+          </a:ln>
+          <a:effectLst/>
+        </p:spPr>
+        <p:style>
+          <a:lnRef idx="1">
+            <a:schemeClr val="accent1"/>
+          </a:lnRef>
+          <a:fillRef idx="3">
+            <a:schemeClr val="accent1"/>
+          </a:fillRef>
+          <a:effectRef idx="2">
+            <a:schemeClr val="accent1"/>
+          </a:effectRef>
+          <a:fontRef idx="minor">
+            <a:schemeClr val="lt1"/>
+          </a:fontRef>
+        </p:style>
+        <p:txBody>
+          <a:bodyPr rtlCol="0" anchor="ctr"/>
+          <a:lstStyle/>
+          <a:p/>
+        </p:txBody>
+      </p:sp>
+      <p:sp>
+        <p:nvSpPr>
+          <p:cNvPr id="42" name="TextBox 41"/>
+          <p:cNvSpPr txBox="1"/>
+          <p:nvPr/>
+        </p:nvSpPr>
+        <p:spPr>
+          <a:xfrm>
+            <a:off x="11204143" y="6332220"/>
+            <a:ext cx="457200" cy="182880"/>
+          </a:xfrm>
+          <a:prstGeom prst="rect">
+            <a:avLst/>
+          </a:prstGeom>
+          <a:noFill/>
+        </p:spPr>
+        <p:txBody>
+          <a:bodyPr wrap="square" lIns="0" rIns="0" tIns="0" bIns="0" anchor="t">
+            <a:noAutofit/>
+          </a:bodyPr>
+          <a:lstStyle/>
+          <a:p>
             <a:pPr algn="ctr">
               <a:spcBef>
                 <a:spcPts val="0"/>
@@ -27831,7 +29451,7 @@
             <a:r>
               <a:rPr sz="950" b="1" i="0" lang="id-ID">
                 <a:solidFill>
-                  <a:srgbClr val="FFFFFF"/>
+                  <a:srgbClr val="0B4A5A"/>
                 </a:solidFill>
                 <a:latin typeface="Calibri"/>
               </a:rPr>
